--- a/Nie tylko websocket/Nie tylko WebSocket.pptx
+++ b/Nie tylko websocket/Nie tylko WebSocket.pptx
@@ -1307,31 +1307,31 @@
     </dgm:pt>
   </dgm:ptLst>
   <dgm:cxnLst>
+    <dgm:cxn modelId="{2151A70E-0460-4D3D-9454-A417C645E6BF}" type="presOf" srcId="{8D44837D-6D77-48A5-AC51-487F1AE6E844}" destId="{B7BA2CBF-7548-4E3D-8458-E0163848FD25}" srcOrd="1" destOrd="0" presId="urn:microsoft.com/office/officeart/2005/8/layout/hierarchy3"/>
+    <dgm:cxn modelId="{08DB685B-9077-4697-B498-CFBED2768F53}" type="presOf" srcId="{2CA9AC8A-4CC8-41E4-938A-50C5EA013CB8}" destId="{E85EC6A4-0CCA-4A32-B3AA-BAB8431256BB}" srcOrd="0" destOrd="0" presId="urn:microsoft.com/office/officeart/2005/8/layout/hierarchy3"/>
     <dgm:cxn modelId="{2CAC4A62-518A-4782-94AF-E2F0E5F76784}" srcId="{15F28D4F-5AAB-4B09-B283-E382933D1F59}" destId="{F2CDC2EC-8F59-46AC-8065-BCAD53139E35}" srcOrd="0" destOrd="0" parTransId="{4446A58A-9B2A-45F2-A172-D15B8B43B07F}" sibTransId="{B5FCCE96-0857-466D-99E3-A055A8DE850B}"/>
-    <dgm:cxn modelId="{B45E536E-D952-4AE1-8514-71C08B447FE3}" type="presOf" srcId="{2CA9AC8A-4CC8-41E4-938A-50C5EA013CB8}" destId="{6F5A2E9C-80B1-4F45-BAD4-B9A011556FFA}" srcOrd="1" destOrd="0" presId="urn:microsoft.com/office/officeart/2005/8/layout/hierarchy3"/>
-    <dgm:cxn modelId="{A1181F9F-0C0B-4E0E-A51A-97FE011104A9}" type="presOf" srcId="{F2CDC2EC-8F59-46AC-8065-BCAD53139E35}" destId="{C76293D1-7629-4699-8D9B-8A696B93A5A1}" srcOrd="0" destOrd="0" presId="urn:microsoft.com/office/officeart/2005/8/layout/hierarchy3"/>
-    <dgm:cxn modelId="{6B67A2A5-D099-42D1-9C8A-93060CEA53F7}" type="presOf" srcId="{15F28D4F-5AAB-4B09-B283-E382933D1F59}" destId="{419A9DA7-4CD3-4345-AF43-694027F10F16}" srcOrd="0" destOrd="0" presId="urn:microsoft.com/office/officeart/2005/8/layout/hierarchy3"/>
-    <dgm:cxn modelId="{500F18A7-9C76-4F5B-9B59-C0D021D1A516}" type="presOf" srcId="{F2CDC2EC-8F59-46AC-8065-BCAD53139E35}" destId="{A745B92F-9090-4BBF-A7BB-A8A1599AF0D6}" srcOrd="1" destOrd="0" presId="urn:microsoft.com/office/officeart/2005/8/layout/hierarchy3"/>
-    <dgm:cxn modelId="{2E8178A7-D12D-4C4F-AC24-BF51A2B2B0E1}" type="presOf" srcId="{8D44837D-6D77-48A5-AC51-487F1AE6E844}" destId="{C365FAFB-830B-4011-B7EC-84BA03C9B176}" srcOrd="0" destOrd="0" presId="urn:microsoft.com/office/officeart/2005/8/layout/hierarchy3"/>
-    <dgm:cxn modelId="{3104B8AD-2A24-42C6-AC53-7AC0689DCBA1}" type="presOf" srcId="{2CA9AC8A-4CC8-41E4-938A-50C5EA013CB8}" destId="{E85EC6A4-0CCA-4A32-B3AA-BAB8431256BB}" srcOrd="0" destOrd="0" presId="urn:microsoft.com/office/officeart/2005/8/layout/hierarchy3"/>
+    <dgm:cxn modelId="{180E5D67-695D-4DA1-B706-CBEDD75F32B1}" type="presOf" srcId="{15F28D4F-5AAB-4B09-B283-E382933D1F59}" destId="{419A9DA7-4CD3-4345-AF43-694027F10F16}" srcOrd="0" destOrd="0" presId="urn:microsoft.com/office/officeart/2005/8/layout/hierarchy3"/>
     <dgm:cxn modelId="{1C4B25C7-B172-4F89-93B4-80C76F08C224}" srcId="{15F28D4F-5AAB-4B09-B283-E382933D1F59}" destId="{2CA9AC8A-4CC8-41E4-938A-50C5EA013CB8}" srcOrd="1" destOrd="0" parTransId="{0338F26C-7CF4-4E39-A7F2-0AE83819F936}" sibTransId="{B6E32940-8840-47B8-85D0-B8E86AF1CD02}"/>
-    <dgm:cxn modelId="{1A8056D9-197F-4776-9FD3-E610AE2A97E6}" type="presOf" srcId="{8D44837D-6D77-48A5-AC51-487F1AE6E844}" destId="{B7BA2CBF-7548-4E3D-8458-E0163848FD25}" srcOrd="1" destOrd="0" presId="urn:microsoft.com/office/officeart/2005/8/layout/hierarchy3"/>
+    <dgm:cxn modelId="{6839F6CE-F0E6-4B88-9D4C-7D29E17B15B0}" type="presOf" srcId="{F2CDC2EC-8F59-46AC-8065-BCAD53139E35}" destId="{C76293D1-7629-4699-8D9B-8A696B93A5A1}" srcOrd="0" destOrd="0" presId="urn:microsoft.com/office/officeart/2005/8/layout/hierarchy3"/>
+    <dgm:cxn modelId="{E24963E7-3BB0-4FB5-BD48-4C7AFE803E3C}" type="presOf" srcId="{8D44837D-6D77-48A5-AC51-487F1AE6E844}" destId="{C365FAFB-830B-4011-B7EC-84BA03C9B176}" srcOrd="0" destOrd="0" presId="urn:microsoft.com/office/officeart/2005/8/layout/hierarchy3"/>
+    <dgm:cxn modelId="{C7B7AFEB-3DFD-460B-A95D-3DFC695BFFFC}" type="presOf" srcId="{F2CDC2EC-8F59-46AC-8065-BCAD53139E35}" destId="{A745B92F-9090-4BBF-A7BB-A8A1599AF0D6}" srcOrd="1" destOrd="0" presId="urn:microsoft.com/office/officeart/2005/8/layout/hierarchy3"/>
+    <dgm:cxn modelId="{C0664EEE-F8E3-49E7-BAB1-2E0039A2EE26}" type="presOf" srcId="{2CA9AC8A-4CC8-41E4-938A-50C5EA013CB8}" destId="{6F5A2E9C-80B1-4F45-BAD4-B9A011556FFA}" srcOrd="1" destOrd="0" presId="urn:microsoft.com/office/officeart/2005/8/layout/hierarchy3"/>
     <dgm:cxn modelId="{4D9905F0-AE61-4494-B560-600AA17AA17F}" srcId="{15F28D4F-5AAB-4B09-B283-E382933D1F59}" destId="{8D44837D-6D77-48A5-AC51-487F1AE6E844}" srcOrd="2" destOrd="0" parTransId="{D0479ED3-6610-432C-BBF6-782E530C972F}" sibTransId="{277AAA6B-5416-461A-BB0A-22DD4EA9A930}"/>
-    <dgm:cxn modelId="{7C1B0DA8-539F-4CEE-A458-BA266A0911B0}" type="presParOf" srcId="{419A9DA7-4CD3-4345-AF43-694027F10F16}" destId="{8C41CB2C-7002-4EA6-92C8-EE451AE6B5C0}" srcOrd="0" destOrd="0" presId="urn:microsoft.com/office/officeart/2005/8/layout/hierarchy3"/>
-    <dgm:cxn modelId="{1AE45875-73BB-4F2D-BC09-07B04F02C743}" type="presParOf" srcId="{8C41CB2C-7002-4EA6-92C8-EE451AE6B5C0}" destId="{DE3554FA-C513-4215-A822-3A91C8A3D6FE}" srcOrd="0" destOrd="0" presId="urn:microsoft.com/office/officeart/2005/8/layout/hierarchy3"/>
-    <dgm:cxn modelId="{07FF79D7-F2A0-45DB-A474-E849EC866B2A}" type="presParOf" srcId="{DE3554FA-C513-4215-A822-3A91C8A3D6FE}" destId="{C76293D1-7629-4699-8D9B-8A696B93A5A1}" srcOrd="0" destOrd="0" presId="urn:microsoft.com/office/officeart/2005/8/layout/hierarchy3"/>
-    <dgm:cxn modelId="{3CBB4BA4-23E5-408D-BE73-6471CC4F7DFF}" type="presParOf" srcId="{DE3554FA-C513-4215-A822-3A91C8A3D6FE}" destId="{A745B92F-9090-4BBF-A7BB-A8A1599AF0D6}" srcOrd="1" destOrd="0" presId="urn:microsoft.com/office/officeart/2005/8/layout/hierarchy3"/>
-    <dgm:cxn modelId="{A21FEE96-309E-44DA-9D39-31DDF80DFDEA}" type="presParOf" srcId="{8C41CB2C-7002-4EA6-92C8-EE451AE6B5C0}" destId="{D71A14FC-729A-463C-A24A-18F9BD436FD8}" srcOrd="1" destOrd="0" presId="urn:microsoft.com/office/officeart/2005/8/layout/hierarchy3"/>
-    <dgm:cxn modelId="{FADD36A3-C8CF-487C-8C6F-08EE59CE6CCF}" type="presParOf" srcId="{419A9DA7-4CD3-4345-AF43-694027F10F16}" destId="{C53AC567-A9EF-4A77-8958-7BFB53F4F48B}" srcOrd="1" destOrd="0" presId="urn:microsoft.com/office/officeart/2005/8/layout/hierarchy3"/>
-    <dgm:cxn modelId="{AFC12C44-EE16-4BAE-BC0A-EF26E5145163}" type="presParOf" srcId="{C53AC567-A9EF-4A77-8958-7BFB53F4F48B}" destId="{9BF32A94-4164-4836-873F-6B0A050B36C0}" srcOrd="0" destOrd="0" presId="urn:microsoft.com/office/officeart/2005/8/layout/hierarchy3"/>
-    <dgm:cxn modelId="{198EC71A-9425-40D4-B8F6-59F7FC8A75B3}" type="presParOf" srcId="{9BF32A94-4164-4836-873F-6B0A050B36C0}" destId="{E85EC6A4-0CCA-4A32-B3AA-BAB8431256BB}" srcOrd="0" destOrd="0" presId="urn:microsoft.com/office/officeart/2005/8/layout/hierarchy3"/>
-    <dgm:cxn modelId="{52358B44-1603-4EBB-BEBA-FE2FAA0B65E6}" type="presParOf" srcId="{9BF32A94-4164-4836-873F-6B0A050B36C0}" destId="{6F5A2E9C-80B1-4F45-BAD4-B9A011556FFA}" srcOrd="1" destOrd="0" presId="urn:microsoft.com/office/officeart/2005/8/layout/hierarchy3"/>
-    <dgm:cxn modelId="{02A007DB-E56A-4CBA-BF4B-1C1344A5F87E}" type="presParOf" srcId="{C53AC567-A9EF-4A77-8958-7BFB53F4F48B}" destId="{606363C4-CBFF-4417-9B29-49AFF86838C8}" srcOrd="1" destOrd="0" presId="urn:microsoft.com/office/officeart/2005/8/layout/hierarchy3"/>
-    <dgm:cxn modelId="{067A41B7-86C4-469B-8B02-72DF53F472D0}" type="presParOf" srcId="{419A9DA7-4CD3-4345-AF43-694027F10F16}" destId="{8B47521F-28A2-4DD4-A9D2-51CF8793D0BD}" srcOrd="2" destOrd="0" presId="urn:microsoft.com/office/officeart/2005/8/layout/hierarchy3"/>
-    <dgm:cxn modelId="{6F2030A0-C7BA-4E2A-BED4-24CFADB49CE2}" type="presParOf" srcId="{8B47521F-28A2-4DD4-A9D2-51CF8793D0BD}" destId="{D3359DBE-27B4-45DC-BAFA-7617B833BBF5}" srcOrd="0" destOrd="0" presId="urn:microsoft.com/office/officeart/2005/8/layout/hierarchy3"/>
-    <dgm:cxn modelId="{B410714E-E95D-4DF0-9A16-77ED2EA67F4B}" type="presParOf" srcId="{D3359DBE-27B4-45DC-BAFA-7617B833BBF5}" destId="{C365FAFB-830B-4011-B7EC-84BA03C9B176}" srcOrd="0" destOrd="0" presId="urn:microsoft.com/office/officeart/2005/8/layout/hierarchy3"/>
-    <dgm:cxn modelId="{BAAABC66-847D-46C0-A940-03440C1A9841}" type="presParOf" srcId="{D3359DBE-27B4-45DC-BAFA-7617B833BBF5}" destId="{B7BA2CBF-7548-4E3D-8458-E0163848FD25}" srcOrd="1" destOrd="0" presId="urn:microsoft.com/office/officeart/2005/8/layout/hierarchy3"/>
-    <dgm:cxn modelId="{154DDE93-3A53-4FAB-9462-D346C1AAC032}" type="presParOf" srcId="{8B47521F-28A2-4DD4-A9D2-51CF8793D0BD}" destId="{D887A30C-5F04-4D28-9FFB-3B235DFDE2F8}" srcOrd="1" destOrd="0" presId="urn:microsoft.com/office/officeart/2005/8/layout/hierarchy3"/>
+    <dgm:cxn modelId="{22ACAEC8-7ADD-4890-98FA-B4E572702634}" type="presParOf" srcId="{419A9DA7-4CD3-4345-AF43-694027F10F16}" destId="{8C41CB2C-7002-4EA6-92C8-EE451AE6B5C0}" srcOrd="0" destOrd="0" presId="urn:microsoft.com/office/officeart/2005/8/layout/hierarchy3"/>
+    <dgm:cxn modelId="{1DDFDB8A-DC1E-4250-A3C7-1135C6A9F656}" type="presParOf" srcId="{8C41CB2C-7002-4EA6-92C8-EE451AE6B5C0}" destId="{DE3554FA-C513-4215-A822-3A91C8A3D6FE}" srcOrd="0" destOrd="0" presId="urn:microsoft.com/office/officeart/2005/8/layout/hierarchy3"/>
+    <dgm:cxn modelId="{50A80FEC-6F31-40B8-9CDB-A76CD3789E71}" type="presParOf" srcId="{DE3554FA-C513-4215-A822-3A91C8A3D6FE}" destId="{C76293D1-7629-4699-8D9B-8A696B93A5A1}" srcOrd="0" destOrd="0" presId="urn:microsoft.com/office/officeart/2005/8/layout/hierarchy3"/>
+    <dgm:cxn modelId="{29A116D4-7AB5-498B-BCFC-F357E7C7C6C4}" type="presParOf" srcId="{DE3554FA-C513-4215-A822-3A91C8A3D6FE}" destId="{A745B92F-9090-4BBF-A7BB-A8A1599AF0D6}" srcOrd="1" destOrd="0" presId="urn:microsoft.com/office/officeart/2005/8/layout/hierarchy3"/>
+    <dgm:cxn modelId="{25810EB7-E62E-4F39-AAC4-FAAAB8740766}" type="presParOf" srcId="{8C41CB2C-7002-4EA6-92C8-EE451AE6B5C0}" destId="{D71A14FC-729A-463C-A24A-18F9BD436FD8}" srcOrd="1" destOrd="0" presId="urn:microsoft.com/office/officeart/2005/8/layout/hierarchy3"/>
+    <dgm:cxn modelId="{E8C9D92B-C996-46A3-9BBB-4AD3BC4F1B43}" type="presParOf" srcId="{419A9DA7-4CD3-4345-AF43-694027F10F16}" destId="{C53AC567-A9EF-4A77-8958-7BFB53F4F48B}" srcOrd="1" destOrd="0" presId="urn:microsoft.com/office/officeart/2005/8/layout/hierarchy3"/>
+    <dgm:cxn modelId="{431F73D3-0911-4581-BD77-8E3E591F2647}" type="presParOf" srcId="{C53AC567-A9EF-4A77-8958-7BFB53F4F48B}" destId="{9BF32A94-4164-4836-873F-6B0A050B36C0}" srcOrd="0" destOrd="0" presId="urn:microsoft.com/office/officeart/2005/8/layout/hierarchy3"/>
+    <dgm:cxn modelId="{1D551510-1275-4590-8A04-4602BC13FF6A}" type="presParOf" srcId="{9BF32A94-4164-4836-873F-6B0A050B36C0}" destId="{E85EC6A4-0CCA-4A32-B3AA-BAB8431256BB}" srcOrd="0" destOrd="0" presId="urn:microsoft.com/office/officeart/2005/8/layout/hierarchy3"/>
+    <dgm:cxn modelId="{E2212915-92CB-4F1A-9CDD-1C0F8D42F0D3}" type="presParOf" srcId="{9BF32A94-4164-4836-873F-6B0A050B36C0}" destId="{6F5A2E9C-80B1-4F45-BAD4-B9A011556FFA}" srcOrd="1" destOrd="0" presId="urn:microsoft.com/office/officeart/2005/8/layout/hierarchy3"/>
+    <dgm:cxn modelId="{9E055D6A-B342-4BC5-BB38-B2DEC580773E}" type="presParOf" srcId="{C53AC567-A9EF-4A77-8958-7BFB53F4F48B}" destId="{606363C4-CBFF-4417-9B29-49AFF86838C8}" srcOrd="1" destOrd="0" presId="urn:microsoft.com/office/officeart/2005/8/layout/hierarchy3"/>
+    <dgm:cxn modelId="{00E81B43-8F7E-4842-875A-43025CEF1D0F}" type="presParOf" srcId="{419A9DA7-4CD3-4345-AF43-694027F10F16}" destId="{8B47521F-28A2-4DD4-A9D2-51CF8793D0BD}" srcOrd="2" destOrd="0" presId="urn:microsoft.com/office/officeart/2005/8/layout/hierarchy3"/>
+    <dgm:cxn modelId="{AC74454F-44EB-49DC-B29B-F5B2C3FF6783}" type="presParOf" srcId="{8B47521F-28A2-4DD4-A9D2-51CF8793D0BD}" destId="{D3359DBE-27B4-45DC-BAFA-7617B833BBF5}" srcOrd="0" destOrd="0" presId="urn:microsoft.com/office/officeart/2005/8/layout/hierarchy3"/>
+    <dgm:cxn modelId="{265435DE-0698-40C2-846A-BC55B43EA850}" type="presParOf" srcId="{D3359DBE-27B4-45DC-BAFA-7617B833BBF5}" destId="{C365FAFB-830B-4011-B7EC-84BA03C9B176}" srcOrd="0" destOrd="0" presId="urn:microsoft.com/office/officeart/2005/8/layout/hierarchy3"/>
+    <dgm:cxn modelId="{34D40DAF-81EB-4E3A-83D5-78AA4BFAF6C2}" type="presParOf" srcId="{D3359DBE-27B4-45DC-BAFA-7617B833BBF5}" destId="{B7BA2CBF-7548-4E3D-8458-E0163848FD25}" srcOrd="1" destOrd="0" presId="urn:microsoft.com/office/officeart/2005/8/layout/hierarchy3"/>
+    <dgm:cxn modelId="{A3FE14DD-12D6-427D-BB08-463723E7F76E}" type="presParOf" srcId="{8B47521F-28A2-4DD4-A9D2-51CF8793D0BD}" destId="{D887A30C-5F04-4D28-9FFB-3B235DFDE2F8}" srcOrd="1" destOrd="0" presId="urn:microsoft.com/office/officeart/2005/8/layout/hierarchy3"/>
   </dgm:cxnLst>
   <dgm:bg/>
   <dgm:whole/>
@@ -3197,7 +3197,7 @@
           <a:p>
             <a:fld id="{5BCAD085-E8A6-8845-BD4E-CB4CCA059FC4}" type="datetimeFigureOut">
               <a:rPr lang="en-US" smtClean="0"/>
-              <a:t>8/26/2025</a:t>
+              <a:t>8/28/2025</a:t>
             </a:fld>
             <a:endParaRPr lang="en-US"/>
           </a:p>
@@ -3529,7 +3529,7 @@
           <a:p>
             <a:fld id="{5BCAD085-E8A6-8845-BD4E-CB4CCA059FC4}" type="datetimeFigureOut">
               <a:rPr lang="en-US" smtClean="0"/>
-              <a:t>8/26/2025</a:t>
+              <a:t>8/27/2025</a:t>
             </a:fld>
             <a:endParaRPr lang="en-US"/>
           </a:p>
@@ -3928,7 +3928,7 @@
           <a:p>
             <a:fld id="{5BCAD085-E8A6-8845-BD4E-CB4CCA059FC4}" type="datetimeFigureOut">
               <a:rPr lang="en-US" smtClean="0"/>
-              <a:t>8/26/2025</a:t>
+              <a:t>8/27/2025</a:t>
             </a:fld>
             <a:endParaRPr lang="en-US"/>
           </a:p>
@@ -4262,7 +4262,7 @@
           <a:p>
             <a:fld id="{5BCAD085-E8A6-8845-BD4E-CB4CCA059FC4}" type="datetimeFigureOut">
               <a:rPr lang="en-US" smtClean="0"/>
-              <a:t>8/26/2025</a:t>
+              <a:t>8/27/2025</a:t>
             </a:fld>
             <a:endParaRPr lang="en-US"/>
           </a:p>
@@ -4580,7 +4580,7 @@
           <a:p>
             <a:fld id="{5BCAD085-E8A6-8845-BD4E-CB4CCA059FC4}" type="datetimeFigureOut">
               <a:rPr lang="en-US" smtClean="0"/>
-              <a:t>8/26/2025</a:t>
+              <a:t>8/27/2025</a:t>
             </a:fld>
             <a:endParaRPr lang="en-US"/>
           </a:p>
@@ -4974,7 +4974,7 @@
           <a:p>
             <a:fld id="{5BCAD085-E8A6-8845-BD4E-CB4CCA059FC4}" type="datetimeFigureOut">
               <a:rPr lang="en-US" smtClean="0"/>
-              <a:t>8/26/2025</a:t>
+              <a:t>8/27/2025</a:t>
             </a:fld>
             <a:endParaRPr lang="en-US"/>
           </a:p>
@@ -5229,7 +5229,7 @@
           <a:p>
             <a:fld id="{5BCAD085-E8A6-8845-BD4E-CB4CCA059FC4}" type="datetimeFigureOut">
               <a:rPr lang="en-US" smtClean="0"/>
-              <a:t>8/26/2025</a:t>
+              <a:t>8/27/2025</a:t>
             </a:fld>
             <a:endParaRPr lang="en-US"/>
           </a:p>
@@ -5489,7 +5489,7 @@
           <a:p>
             <a:fld id="{5BCAD085-E8A6-8845-BD4E-CB4CCA059FC4}" type="datetimeFigureOut">
               <a:rPr lang="en-US" smtClean="0"/>
-              <a:t>8/26/2025</a:t>
+              <a:t>8/27/2025</a:t>
             </a:fld>
             <a:endParaRPr lang="en-US"/>
           </a:p>
@@ -5749,7 +5749,7 @@
           <a:p>
             <a:fld id="{5BCAD085-E8A6-8845-BD4E-CB4CCA059FC4}" type="datetimeFigureOut">
               <a:rPr lang="en-US" smtClean="0"/>
-              <a:t>8/26/2025</a:t>
+              <a:t>8/27/2025</a:t>
             </a:fld>
             <a:endParaRPr lang="en-US"/>
           </a:p>
@@ -6076,7 +6076,7 @@
           <a:p>
             <a:fld id="{5BCAD085-E8A6-8845-BD4E-CB4CCA059FC4}" type="datetimeFigureOut">
               <a:rPr lang="en-US" smtClean="0"/>
-              <a:t>8/26/2025</a:t>
+              <a:t>8/27/2025</a:t>
             </a:fld>
             <a:endParaRPr lang="en-US"/>
           </a:p>
@@ -6397,7 +6397,7 @@
           <a:p>
             <a:fld id="{5BCAD085-E8A6-8845-BD4E-CB4CCA059FC4}" type="datetimeFigureOut">
               <a:rPr lang="en-US" smtClean="0"/>
-              <a:t>8/26/2025</a:t>
+              <a:t>8/27/2025</a:t>
             </a:fld>
             <a:endParaRPr lang="en-US"/>
           </a:p>
@@ -6852,7 +6852,7 @@
           <a:p>
             <a:fld id="{5BCAD085-E8A6-8845-BD4E-CB4CCA059FC4}" type="datetimeFigureOut">
               <a:rPr lang="en-US" smtClean="0"/>
-              <a:t>8/26/2025</a:t>
+              <a:t>8/27/2025</a:t>
             </a:fld>
             <a:endParaRPr lang="en-US"/>
           </a:p>
@@ -7060,7 +7060,7 @@
           <a:p>
             <a:fld id="{5BCAD085-E8A6-8845-BD4E-CB4CCA059FC4}" type="datetimeFigureOut">
               <a:rPr lang="en-US" smtClean="0"/>
-              <a:t>8/26/2025</a:t>
+              <a:t>8/27/2025</a:t>
             </a:fld>
             <a:endParaRPr lang="en-US"/>
           </a:p>
@@ -7235,7 +7235,7 @@
           <a:p>
             <a:fld id="{5BCAD085-E8A6-8845-BD4E-CB4CCA059FC4}" type="datetimeFigureOut">
               <a:rPr lang="en-US" smtClean="0"/>
-              <a:t>8/26/2025</a:t>
+              <a:t>8/27/2025</a:t>
             </a:fld>
             <a:endParaRPr lang="en-US"/>
           </a:p>
@@ -7566,7 +7566,7 @@
           <a:p>
             <a:fld id="{5BCAD085-E8A6-8845-BD4E-CB4CCA059FC4}" type="datetimeFigureOut">
               <a:rPr lang="en-US" smtClean="0"/>
-              <a:t>8/26/2025</a:t>
+              <a:t>8/27/2025</a:t>
             </a:fld>
             <a:endParaRPr lang="en-US"/>
           </a:p>
@@ -7909,7 +7909,7 @@
           <a:p>
             <a:fld id="{5BCAD085-E8A6-8845-BD4E-CB4CCA059FC4}" type="datetimeFigureOut">
               <a:rPr lang="en-US" smtClean="0"/>
-              <a:t>8/26/2025</a:t>
+              <a:t>8/27/2025</a:t>
             </a:fld>
             <a:endParaRPr lang="en-US"/>
           </a:p>
@@ -10024,7 +10024,7 @@
           <a:p>
             <a:fld id="{5BCAD085-E8A6-8845-BD4E-CB4CCA059FC4}" type="datetimeFigureOut">
               <a:rPr lang="en-US" smtClean="0"/>
-              <a:t>8/26/2025</a:t>
+              <a:t>8/27/2025</a:t>
             </a:fld>
             <a:endParaRPr lang="en-US"/>
           </a:p>
@@ -10701,9 +10701,67 @@
               </a:rPr>
               <a:t> PL 2025</a:t>
             </a:r>
+            <a:endParaRPr lang="pl-PL" dirty="0">
+              <a:solidFill>
+                <a:schemeClr val="tx2">
+                  <a:lumMod val="75000"/>
+                </a:schemeClr>
+              </a:solidFill>
+            </a:endParaRPr>
+          </a:p>
+          <a:p>
+            <a:r>
+              <a:rPr lang="pl-PL" sz="1400" dirty="0">
+                <a:solidFill>
+                  <a:schemeClr val="tx2">
+                    <a:lumMod val="75000"/>
+                  </a:schemeClr>
+                </a:solidFill>
+              </a:rPr>
+              <a:t>Gliwice 29.08</a:t>
+            </a:r>
+            <a:endParaRPr lang="fr-FR" sz="1400" dirty="0">
+              <a:solidFill>
+                <a:schemeClr val="tx2">
+                  <a:lumMod val="75000"/>
+                </a:schemeClr>
+              </a:solidFill>
+            </a:endParaRPr>
           </a:p>
         </p:txBody>
       </p:sp>
+      <p:pic>
+        <p:nvPicPr>
+          <p:cNvPr id="9" name="Obraz 8">
+            <a:extLst>
+              <a:ext uri="{FF2B5EF4-FFF2-40B4-BE49-F238E27FC236}">
+                <a16:creationId xmlns:a16="http://schemas.microsoft.com/office/drawing/2014/main" id="{B4ACF670-3881-5B8E-FCC3-B5C3FDEE3605}"/>
+              </a:ext>
+            </a:extLst>
+          </p:cNvPr>
+          <p:cNvPicPr>
+            <a:picLocks noChangeAspect="1"/>
+          </p:cNvPicPr>
+          <p:nvPr/>
+        </p:nvPicPr>
+        <p:blipFill>
+          <a:blip r:embed="rId4">
+            <a:alphaModFix amt="11000"/>
+          </a:blip>
+          <a:stretch>
+            <a:fillRect/>
+          </a:stretch>
+        </p:blipFill>
+        <p:spPr>
+          <a:xfrm flipH="1">
+            <a:off x="6293223" y="352740"/>
+            <a:ext cx="2192753" cy="2192753"/>
+          </a:xfrm>
+          <a:prstGeom prst="rect">
+            <a:avLst/>
+          </a:prstGeom>
+        </p:spPr>
+      </p:pic>
     </p:spTree>
   </p:cSld>
   <p:clrMapOvr>
@@ -10808,6 +10866,70 @@
                                           <p:spTgt spid="3">
                                             <p:txEl>
                                               <p:pRg st="0" end="0"/>
+                                            </p:txEl>
+                                          </p:spTgt>
+                                        </p:tgtEl>
+                                      </p:cBhvr>
+                                    </p:animEffect>
+                                  </p:childTnLst>
+                                </p:cTn>
+                              </p:par>
+                            </p:childTnLst>
+                          </p:cTn>
+                        </p:par>
+                      </p:childTnLst>
+                    </p:cTn>
+                  </p:par>
+                  <p:par>
+                    <p:cTn id="11" fill="hold">
+                      <p:stCondLst>
+                        <p:cond delay="indefinite"/>
+                      </p:stCondLst>
+                      <p:childTnLst>
+                        <p:par>
+                          <p:cTn id="12" fill="hold">
+                            <p:stCondLst>
+                              <p:cond delay="0"/>
+                            </p:stCondLst>
+                            <p:childTnLst>
+                              <p:par>
+                                <p:cTn id="13" presetID="10" presetClass="entr" presetSubtype="0" fill="hold" grpId="0" nodeType="clickEffect">
+                                  <p:stCondLst>
+                                    <p:cond delay="2000"/>
+                                  </p:stCondLst>
+                                  <p:iterate type="lt">
+                                    <p:tmPct val="10000"/>
+                                  </p:iterate>
+                                  <p:childTnLst>
+                                    <p:set>
+                                      <p:cBhvr>
+                                        <p:cTn id="14" dur="1" fill="hold">
+                                          <p:stCondLst>
+                                            <p:cond delay="0"/>
+                                          </p:stCondLst>
+                                        </p:cTn>
+                                        <p:tgtEl>
+                                          <p:spTgt spid="3">
+                                            <p:txEl>
+                                              <p:pRg st="1" end="1"/>
+                                            </p:txEl>
+                                          </p:spTgt>
+                                        </p:tgtEl>
+                                        <p:attrNameLst>
+                                          <p:attrName>style.visibility</p:attrName>
+                                        </p:attrNameLst>
+                                      </p:cBhvr>
+                                      <p:to>
+                                        <p:strVal val="visible"/>
+                                      </p:to>
+                                    </p:set>
+                                    <p:animEffect transition="in" filter="fade">
+                                      <p:cBhvr>
+                                        <p:cTn id="15" dur="400"/>
+                                        <p:tgtEl>
+                                          <p:spTgt spid="3">
+                                            <p:txEl>
+                                              <p:pRg st="1" end="1"/>
                                             </p:txEl>
                                           </p:spTgt>
                                         </p:tgtEl>
@@ -12243,6 +12365,36 @@
           </p:txBody>
         </p:sp>
       </p:grpSp>
+      <p:pic>
+        <p:nvPicPr>
+          <p:cNvPr id="6" name="Obraz 5">
+            <a:extLst>
+              <a:ext uri="{FF2B5EF4-FFF2-40B4-BE49-F238E27FC236}">
+                <a16:creationId xmlns:a16="http://schemas.microsoft.com/office/drawing/2014/main" id="{9268F8EC-EF9A-E9D6-B925-C91A166F3B94}"/>
+              </a:ext>
+            </a:extLst>
+          </p:cNvPr>
+          <p:cNvPicPr>
+            <a:picLocks noChangeAspect="1"/>
+          </p:cNvPicPr>
+          <p:nvPr/>
+        </p:nvPicPr>
+        <p:blipFill>
+          <a:blip r:embed="rId2"/>
+          <a:stretch>
+            <a:fillRect/>
+          </a:stretch>
+        </p:blipFill>
+        <p:spPr>
+          <a:xfrm>
+            <a:off x="6135418" y="315527"/>
+            <a:ext cx="2397289" cy="2397289"/>
+          </a:xfrm>
+          <a:prstGeom prst="rect">
+            <a:avLst/>
+          </a:prstGeom>
+        </p:spPr>
+      </p:pic>
       <p:sp>
         <p:nvSpPr>
           <p:cNvPr id="3" name="Content Placeholder 2">
@@ -12375,7 +12527,7 @@
             </a:pPr>
             <a:r>
               <a:rPr lang="pl-PL" dirty="0"/>
-              <a:t>Wsparcie w przeglądarkach: SSE ma natywne wsparcie przez </a:t>
+              <a:t>SSE ma natywne wsparcie przez </a:t>
             </a:r>
             <a:r>
               <a:rPr lang="pl-PL" dirty="0" err="1"/>
@@ -13832,6 +13984,36 @@
           </p:txBody>
         </p:sp>
       </p:grpSp>
+      <p:pic>
+        <p:nvPicPr>
+          <p:cNvPr id="6" name="Obraz 5">
+            <a:extLst>
+              <a:ext uri="{FF2B5EF4-FFF2-40B4-BE49-F238E27FC236}">
+                <a16:creationId xmlns:a16="http://schemas.microsoft.com/office/drawing/2014/main" id="{9838C5AD-EB1C-8130-CBC5-6BD80B6FF6C3}"/>
+              </a:ext>
+            </a:extLst>
+          </p:cNvPr>
+          <p:cNvPicPr>
+            <a:picLocks noChangeAspect="1"/>
+          </p:cNvPicPr>
+          <p:nvPr/>
+        </p:nvPicPr>
+        <p:blipFill>
+          <a:blip r:embed="rId2"/>
+          <a:stretch>
+            <a:fillRect/>
+          </a:stretch>
+        </p:blipFill>
+        <p:spPr>
+          <a:xfrm>
+            <a:off x="6187073" y="377134"/>
+            <a:ext cx="2121983" cy="2121983"/>
+          </a:xfrm>
+          <a:prstGeom prst="rect">
+            <a:avLst/>
+          </a:prstGeom>
+        </p:spPr>
+      </p:pic>
       <p:sp>
         <p:nvSpPr>
           <p:cNvPr id="3" name="Content Placeholder 2">
@@ -14038,22 +14220,64 @@
           <a:lstStyle/>
           <a:p>
             <a:r>
-              <a:rPr lang="pl-PL" sz="2800">
+              <a:rPr lang="pl-PL" sz="2800" dirty="0">
                 <a:solidFill>
                   <a:schemeClr val="tx2">
                     <a:lumMod val="75000"/>
                   </a:schemeClr>
                 </a:solidFill>
               </a:rPr>
-              <a:t>Rozwiązania "push" w HTTP1.1 i HTTP/2</a:t>
-            </a:r>
-            <a:endParaRPr lang="en-US" sz="2800">
-              <a:solidFill>
-                <a:schemeClr val="tx2">
-                  <a:lumMod val="75000"/>
-                </a:schemeClr>
-              </a:solidFill>
-            </a:endParaRPr>
+              <a:t>Rozwiązania "</a:t>
+            </a:r>
+            <a:r>
+              <a:rPr lang="pl-PL" sz="2800" dirty="0" err="1">
+                <a:solidFill>
+                  <a:schemeClr val="tx2">
+                    <a:lumMod val="75000"/>
+                  </a:schemeClr>
+                </a:solidFill>
+              </a:rPr>
+              <a:t>push</a:t>
+            </a:r>
+            <a:r>
+              <a:rPr lang="pl-PL" sz="2800" dirty="0">
+                <a:solidFill>
+                  <a:schemeClr val="tx2">
+                    <a:lumMod val="75000"/>
+                  </a:schemeClr>
+                </a:solidFill>
+              </a:rPr>
+              <a:t>" w HTTP1.1, HTTP/2</a:t>
+            </a:r>
+            <a:br>
+              <a:rPr lang="pl-PL" sz="2800" dirty="0">
+                <a:solidFill>
+                  <a:schemeClr val="tx2">
+                    <a:lumMod val="75000"/>
+                  </a:schemeClr>
+                </a:solidFill>
+              </a:rPr>
+            </a:br>
+            <a:r>
+              <a:rPr lang="pl-PL" sz="2800" dirty="0">
+                <a:solidFill>
+                  <a:schemeClr val="tx2">
+                    <a:lumMod val="75000"/>
+                  </a:schemeClr>
+                </a:solidFill>
+              </a:rPr>
+              <a:t>i </a:t>
+            </a:r>
+            <a:r>
+              <a:rPr lang="en-US" sz="2800" dirty="0">
+                <a:solidFill>
+                  <a:schemeClr val="tx2">
+                    <a:lumMod val="75000"/>
+                  </a:schemeClr>
+                </a:solidFill>
+              </a:rPr>
+              <a:t>HTTP/3</a:t>
+            </a:r>
           </a:p>
         </p:txBody>
       </p:sp>
@@ -15544,6 +15768,38 @@
           </a:p>
         </p:txBody>
       </p:sp>
+      <p:pic>
+        <p:nvPicPr>
+          <p:cNvPr id="4" name="Obraz 3">
+            <a:extLst>
+              <a:ext uri="{FF2B5EF4-FFF2-40B4-BE49-F238E27FC236}">
+                <a16:creationId xmlns:a16="http://schemas.microsoft.com/office/drawing/2014/main" id="{F522C332-C6F4-732F-04A7-F14ED93D9C52}"/>
+              </a:ext>
+            </a:extLst>
+          </p:cNvPr>
+          <p:cNvPicPr>
+            <a:picLocks noChangeAspect="1"/>
+          </p:cNvPicPr>
+          <p:nvPr/>
+        </p:nvPicPr>
+        <p:blipFill>
+          <a:blip r:embed="rId2">
+            <a:alphaModFix amt="11000"/>
+          </a:blip>
+          <a:stretch>
+            <a:fillRect/>
+          </a:stretch>
+        </p:blipFill>
+        <p:spPr>
+          <a:xfrm flipH="1">
+            <a:off x="6293223" y="352740"/>
+            <a:ext cx="2192753" cy="2192753"/>
+          </a:xfrm>
+          <a:prstGeom prst="rect">
+            <a:avLst/>
+          </a:prstGeom>
+        </p:spPr>
+      </p:pic>
     </p:spTree>
     <p:extLst>
       <p:ext uri="{BB962C8B-B14F-4D97-AF65-F5344CB8AC3E}">
@@ -15562,6 +15818,552 @@
   <p:cSld>
     <p:bg>
       <p:bgPr>
+        <a:gradFill rotWithShape="1">
+          <a:gsLst>
+            <a:gs pos="0">
+              <a:schemeClr val="bg2">
+                <a:tint val="90000"/>
+                <a:satMod val="92000"/>
+                <a:lumMod val="120000"/>
+              </a:schemeClr>
+            </a:gs>
+            <a:gs pos="100000">
+              <a:schemeClr val="bg2">
+                <a:shade val="98000"/>
+                <a:satMod val="120000"/>
+                <a:lumMod val="98000"/>
+              </a:schemeClr>
+            </a:gs>
+          </a:gsLst>
+          <a:path path="circle">
+            <a:fillToRect l="50000" t="50000" r="100000" b="100000"/>
+          </a:path>
+        </a:gradFill>
+        <a:effectLst/>
+      </p:bgPr>
+    </p:bg>
+    <p:spTree>
+      <p:nvGrpSpPr>
+        <p:cNvPr id="1" name="">
+          <a:extLst>
+            <a:ext uri="{FF2B5EF4-FFF2-40B4-BE49-F238E27FC236}">
+              <a16:creationId xmlns:a16="http://schemas.microsoft.com/office/drawing/2014/main" id="{449BA951-8D13-96CF-A748-0677AD93C47E}"/>
+            </a:ext>
+          </a:extLst>
+        </p:cNvPr>
+        <p:cNvGrpSpPr/>
+        <p:nvPr/>
+      </p:nvGrpSpPr>
+      <p:grpSpPr>
+        <a:xfrm>
+          <a:off x="0" y="0"/>
+          <a:ext cx="0" cy="0"/>
+          <a:chOff x="0" y="0"/>
+          <a:chExt cx="0" cy="0"/>
+        </a:xfrm>
+      </p:grpSpPr>
+      <p:sp useBgFill="1">
+        <p:nvSpPr>
+          <p:cNvPr id="31" name="Rectangle 30">
+            <a:extLst>
+              <a:ext uri="{FF2B5EF4-FFF2-40B4-BE49-F238E27FC236}">
+                <a16:creationId xmlns:a16="http://schemas.microsoft.com/office/drawing/2014/main" id="{3F4C104D-5F30-4811-9376-566B26E4719A}"/>
+              </a:ext>
+              <a:ext uri="{C183D7F6-B498-43B3-948B-1728B52AA6E4}">
+                <adec:decorative xmlns:adec="http://schemas.microsoft.com/office/drawing/2017/decorative" val="1"/>
+              </a:ext>
+            </a:extLst>
+          </p:cNvPr>
+          <p:cNvSpPr>
+            <a:spLocks noGrp="1" noRot="1" noChangeAspect="1" noMove="1" noResize="1" noEditPoints="1" noAdjustHandles="1" noChangeArrowheads="1" noChangeShapeType="1" noTextEdit="1"/>
+          </p:cNvSpPr>
+          <p:nvPr>
+            <p:extLst>
+              <p:ext uri="{386F3935-93C4-4BCD-93E2-E3B085C9AB24}">
+                <p16:designElem xmlns:p16="http://schemas.microsoft.com/office/powerpoint/2015/main" val="1"/>
+              </p:ext>
+            </p:extLst>
+          </p:nvPr>
+        </p:nvSpPr>
+        <p:spPr>
+          <a:xfrm>
+            <a:off x="0" y="-786"/>
+            <a:ext cx="9144000" cy="6854038"/>
+          </a:xfrm>
+          <a:prstGeom prst="rect">
+            <a:avLst/>
+          </a:prstGeom>
+          <a:ln>
+            <a:noFill/>
+          </a:ln>
+        </p:spPr>
+        <p:style>
+          <a:lnRef idx="2">
+            <a:schemeClr val="accent1">
+              <a:shade val="50000"/>
+            </a:schemeClr>
+          </a:lnRef>
+          <a:fillRef idx="1">
+            <a:schemeClr val="accent1"/>
+          </a:fillRef>
+          <a:effectRef idx="0">
+            <a:schemeClr val="accent1"/>
+          </a:effectRef>
+          <a:fontRef idx="minor">
+            <a:schemeClr val="lt1"/>
+          </a:fontRef>
+        </p:style>
+        <p:txBody>
+          <a:bodyPr rtlCol="0" anchor="ctr"/>
+          <a:lstStyle/>
+          <a:p>
+            <a:pPr algn="ctr"/>
+            <a:endParaRPr lang="en-US"/>
+          </a:p>
+        </p:txBody>
+      </p:sp>
+      <p:sp>
+        <p:nvSpPr>
+          <p:cNvPr id="2" name="Title 1">
+            <a:extLst>
+              <a:ext uri="{FF2B5EF4-FFF2-40B4-BE49-F238E27FC236}">
+                <a16:creationId xmlns:a16="http://schemas.microsoft.com/office/drawing/2014/main" id="{98C437BB-DCD8-F559-5F73-5ACA43DD5425}"/>
+              </a:ext>
+            </a:extLst>
+          </p:cNvPr>
+          <p:cNvSpPr>
+            <a:spLocks noGrp="1"/>
+          </p:cNvSpPr>
+          <p:nvPr>
+            <p:ph type="title"/>
+          </p:nvPr>
+        </p:nvSpPr>
+        <p:spPr>
+          <a:xfrm>
+            <a:off x="486918" y="645106"/>
+            <a:ext cx="2737709" cy="1259894"/>
+          </a:xfrm>
+        </p:spPr>
+        <p:txBody>
+          <a:bodyPr>
+            <a:normAutofit/>
+          </a:bodyPr>
+          <a:lstStyle/>
+          <a:p>
+            <a:pPr>
+              <a:lnSpc>
+                <a:spcPct val="90000"/>
+              </a:lnSpc>
+            </a:pPr>
+            <a:r>
+              <a:rPr lang="pl-PL" sz="2800"/>
+              <a:t>Konfiguracja serwera (Nginx)</a:t>
+            </a:r>
+            <a:endParaRPr lang="en-US" sz="2800"/>
+          </a:p>
+        </p:txBody>
+      </p:sp>
+      <p:sp>
+        <p:nvSpPr>
+          <p:cNvPr id="33" name="Rectangle 32">
+            <a:extLst>
+              <a:ext uri="{FF2B5EF4-FFF2-40B4-BE49-F238E27FC236}">
+                <a16:creationId xmlns:a16="http://schemas.microsoft.com/office/drawing/2014/main" id="{0815E34B-5D02-4E01-A936-E8E1C0AB6F12}"/>
+              </a:ext>
+              <a:ext uri="{C183D7F6-B498-43B3-948B-1728B52AA6E4}">
+                <adec:decorative xmlns:adec="http://schemas.microsoft.com/office/drawing/2017/decorative" val="1"/>
+              </a:ext>
+            </a:extLst>
+          </p:cNvPr>
+          <p:cNvSpPr>
+            <a:spLocks noGrp="1" noRot="1" noChangeAspect="1" noMove="1" noResize="1" noEditPoints="1" noAdjustHandles="1" noChangeArrowheads="1" noChangeShapeType="1" noTextEdit="1"/>
+          </p:cNvSpPr>
+          <p:nvPr>
+            <p:extLst>
+              <p:ext uri="{386F3935-93C4-4BCD-93E2-E3B085C9AB24}">
+                <p16:designElem xmlns:p16="http://schemas.microsoft.com/office/powerpoint/2015/main" val="1"/>
+              </p:ext>
+            </p:extLst>
+          </p:nvPr>
+        </p:nvSpPr>
+        <p:spPr>
+          <a:xfrm>
+            <a:off x="0" y="0"/>
+            <a:ext cx="137160" cy="6858000"/>
+          </a:xfrm>
+          <a:prstGeom prst="rect">
+            <a:avLst/>
+          </a:prstGeom>
+          <a:solidFill>
+            <a:schemeClr val="tx2"/>
+          </a:solidFill>
+          <a:ln>
+            <a:noFill/>
+          </a:ln>
+          <a:effectLst/>
+        </p:spPr>
+        <p:style>
+          <a:lnRef idx="1">
+            <a:schemeClr val="accent1"/>
+          </a:lnRef>
+          <a:fillRef idx="3">
+            <a:schemeClr val="accent1"/>
+          </a:fillRef>
+          <a:effectRef idx="2">
+            <a:schemeClr val="accent1"/>
+          </a:effectRef>
+          <a:fontRef idx="minor">
+            <a:schemeClr val="lt1"/>
+          </a:fontRef>
+        </p:style>
+        <p:txBody>
+          <a:bodyPr/>
+          <a:lstStyle/>
+          <a:p>
+            <a:endParaRPr lang="pl-PL"/>
+          </a:p>
+        </p:txBody>
+      </p:sp>
+      <p:sp>
+        <p:nvSpPr>
+          <p:cNvPr id="3" name="Content Placeholder 2">
+            <a:extLst>
+              <a:ext uri="{FF2B5EF4-FFF2-40B4-BE49-F238E27FC236}">
+                <a16:creationId xmlns:a16="http://schemas.microsoft.com/office/drawing/2014/main" id="{68CC19A4-2B7B-40B4-ACEC-BCE1EF99104B}"/>
+              </a:ext>
+            </a:extLst>
+          </p:cNvPr>
+          <p:cNvSpPr>
+            <a:spLocks noGrp="1"/>
+          </p:cNvSpPr>
+          <p:nvPr>
+            <p:ph idx="1"/>
+          </p:nvPr>
+        </p:nvSpPr>
+        <p:spPr>
+          <a:xfrm>
+            <a:off x="486918" y="2133600"/>
+            <a:ext cx="2737709" cy="3759253"/>
+          </a:xfrm>
+        </p:spPr>
+        <p:txBody>
+          <a:bodyPr>
+            <a:normAutofit/>
+          </a:bodyPr>
+          <a:lstStyle/>
+          <a:p>
+            <a:r>
+              <a:rPr lang="pl-PL" dirty="0"/>
+              <a:t>Problem: </a:t>
+            </a:r>
+            <a:r>
+              <a:rPr lang="pl-PL" dirty="0" err="1"/>
+              <a:t>Nginx</a:t>
+            </a:r>
+            <a:r>
+              <a:rPr lang="pl-PL" dirty="0"/>
+              <a:t> może buforować odpowiedzi 👉 SSE przestaje działać. </a:t>
+            </a:r>
+          </a:p>
+        </p:txBody>
+      </p:sp>
+      <p:pic>
+        <p:nvPicPr>
+          <p:cNvPr id="5" name="Obraz 4">
+            <a:extLst>
+              <a:ext uri="{FF2B5EF4-FFF2-40B4-BE49-F238E27FC236}">
+                <a16:creationId xmlns:a16="http://schemas.microsoft.com/office/drawing/2014/main" id="{AAEE1462-1E9E-B08F-80FE-3EB66BFCA75D}"/>
+              </a:ext>
+            </a:extLst>
+          </p:cNvPr>
+          <p:cNvPicPr>
+            <a:picLocks noChangeAspect="1"/>
+          </p:cNvPicPr>
+          <p:nvPr/>
+        </p:nvPicPr>
+        <p:blipFill>
+          <a:blip r:embed="rId2"/>
+          <a:stretch>
+            <a:fillRect/>
+          </a:stretch>
+        </p:blipFill>
+        <p:spPr>
+          <a:xfrm>
+            <a:off x="3464657" y="1082609"/>
+            <a:ext cx="5215183" cy="4367715"/>
+          </a:xfrm>
+          <a:prstGeom prst="rect">
+            <a:avLst/>
+          </a:prstGeom>
+        </p:spPr>
+      </p:pic>
+      <p:sp>
+        <p:nvSpPr>
+          <p:cNvPr id="35" name="Freeform 11">
+            <a:extLst>
+              <a:ext uri="{FF2B5EF4-FFF2-40B4-BE49-F238E27FC236}">
+                <a16:creationId xmlns:a16="http://schemas.microsoft.com/office/drawing/2014/main" id="{7DE3414B-B032-4710-A468-D3285E38C5FF}"/>
+              </a:ext>
+              <a:ext uri="{C183D7F6-B498-43B3-948B-1728B52AA6E4}">
+                <adec:decorative xmlns:adec="http://schemas.microsoft.com/office/drawing/2017/decorative" val="1"/>
+              </a:ext>
+            </a:extLst>
+          </p:cNvPr>
+          <p:cNvSpPr>
+            <a:spLocks noGrp="1" noRot="1" noChangeAspect="1" noMove="1" noResize="1" noEditPoints="1" noAdjustHandles="1" noChangeArrowheads="1" noChangeShapeType="1" noTextEdit="1"/>
+          </p:cNvSpPr>
+          <p:nvPr>
+            <p:extLst>
+              <p:ext uri="{386F3935-93C4-4BCD-93E2-E3B085C9AB24}">
+                <p16:designElem xmlns:p16="http://schemas.microsoft.com/office/powerpoint/2015/main" val="1"/>
+              </p:ext>
+            </p:extLst>
+          </p:nvPr>
+        </p:nvSpPr>
+        <p:spPr>
+          <a:xfrm>
+            <a:off x="0" y="6061223"/>
+            <a:ext cx="778526" cy="506277"/>
+          </a:xfrm>
+          <a:custGeom>
+            <a:avLst/>
+            <a:gdLst>
+              <a:gd name="connsiteX0" fmla="*/ 0 w 1038036"/>
+              <a:gd name="connsiteY0" fmla="*/ 0 h 506277"/>
+              <a:gd name="connsiteX1" fmla="*/ 182880 w 1038036"/>
+              <a:gd name="connsiteY1" fmla="*/ 0 h 506277"/>
+              <a:gd name="connsiteX2" fmla="*/ 291705 w 1038036"/>
+              <a:gd name="connsiteY2" fmla="*/ 0 h 506277"/>
+              <a:gd name="connsiteX3" fmla="*/ 291705 w 1038036"/>
+              <a:gd name="connsiteY3" fmla="*/ 151 h 506277"/>
+              <a:gd name="connsiteX4" fmla="*/ 692049 w 1038036"/>
+              <a:gd name="connsiteY4" fmla="*/ 705 h 506277"/>
+              <a:gd name="connsiteX5" fmla="*/ 782744 w 1038036"/>
+              <a:gd name="connsiteY5" fmla="*/ 705 h 506277"/>
+              <a:gd name="connsiteX6" fmla="*/ 797001 w 1038036"/>
+              <a:gd name="connsiteY6" fmla="*/ 5473 h 506277"/>
+              <a:gd name="connsiteX7" fmla="*/ 801982 w 1038036"/>
+              <a:gd name="connsiteY7" fmla="*/ 10242 h 506277"/>
+              <a:gd name="connsiteX8" fmla="*/ 1030951 w 1038036"/>
+              <a:gd name="connsiteY8" fmla="*/ 239185 h 506277"/>
+              <a:gd name="connsiteX9" fmla="*/ 1030951 w 1038036"/>
+              <a:gd name="connsiteY9" fmla="*/ 267797 h 506277"/>
+              <a:gd name="connsiteX10" fmla="*/ 801982 w 1038036"/>
+              <a:gd name="connsiteY10" fmla="*/ 496740 h 506277"/>
+              <a:gd name="connsiteX11" fmla="*/ 797001 w 1038036"/>
+              <a:gd name="connsiteY11" fmla="*/ 501508 h 506277"/>
+              <a:gd name="connsiteX12" fmla="*/ 782744 w 1038036"/>
+              <a:gd name="connsiteY12" fmla="*/ 506277 h 506277"/>
+              <a:gd name="connsiteX13" fmla="*/ 692049 w 1038036"/>
+              <a:gd name="connsiteY13" fmla="*/ 506277 h 506277"/>
+              <a:gd name="connsiteX14" fmla="*/ 291705 w 1038036"/>
+              <a:gd name="connsiteY14" fmla="*/ 505140 h 506277"/>
+              <a:gd name="connsiteX15" fmla="*/ 291705 w 1038036"/>
+              <a:gd name="connsiteY15" fmla="*/ 506277 h 506277"/>
+              <a:gd name="connsiteX16" fmla="*/ 0 w 1038036"/>
+              <a:gd name="connsiteY16" fmla="*/ 506277 h 506277"/>
+            </a:gdLst>
+            <a:ahLst/>
+            <a:cxnLst>
+              <a:cxn ang="0">
+                <a:pos x="connsiteX0" y="connsiteY0"/>
+              </a:cxn>
+              <a:cxn ang="0">
+                <a:pos x="connsiteX1" y="connsiteY1"/>
+              </a:cxn>
+              <a:cxn ang="0">
+                <a:pos x="connsiteX2" y="connsiteY2"/>
+              </a:cxn>
+              <a:cxn ang="0">
+                <a:pos x="connsiteX3" y="connsiteY3"/>
+              </a:cxn>
+              <a:cxn ang="0">
+                <a:pos x="connsiteX4" y="connsiteY4"/>
+              </a:cxn>
+              <a:cxn ang="0">
+                <a:pos x="connsiteX5" y="connsiteY5"/>
+              </a:cxn>
+              <a:cxn ang="0">
+                <a:pos x="connsiteX6" y="connsiteY6"/>
+              </a:cxn>
+              <a:cxn ang="0">
+                <a:pos x="connsiteX7" y="connsiteY7"/>
+              </a:cxn>
+              <a:cxn ang="0">
+                <a:pos x="connsiteX8" y="connsiteY8"/>
+              </a:cxn>
+              <a:cxn ang="0">
+                <a:pos x="connsiteX9" y="connsiteY9"/>
+              </a:cxn>
+              <a:cxn ang="0">
+                <a:pos x="connsiteX10" y="connsiteY10"/>
+              </a:cxn>
+              <a:cxn ang="0">
+                <a:pos x="connsiteX11" y="connsiteY11"/>
+              </a:cxn>
+              <a:cxn ang="0">
+                <a:pos x="connsiteX12" y="connsiteY12"/>
+              </a:cxn>
+              <a:cxn ang="0">
+                <a:pos x="connsiteX13" y="connsiteY13"/>
+              </a:cxn>
+              <a:cxn ang="0">
+                <a:pos x="connsiteX14" y="connsiteY14"/>
+              </a:cxn>
+              <a:cxn ang="0">
+                <a:pos x="connsiteX15" y="connsiteY15"/>
+              </a:cxn>
+              <a:cxn ang="0">
+                <a:pos x="connsiteX16" y="connsiteY16"/>
+              </a:cxn>
+            </a:cxnLst>
+            <a:rect l="l" t="t" r="r" b="b"/>
+            <a:pathLst>
+              <a:path w="1038036" h="506277">
+                <a:moveTo>
+                  <a:pt x="0" y="0"/>
+                </a:moveTo>
+                <a:lnTo>
+                  <a:pt x="182880" y="0"/>
+                </a:lnTo>
+                <a:lnTo>
+                  <a:pt x="291705" y="0"/>
+                </a:lnTo>
+                <a:lnTo>
+                  <a:pt x="291705" y="151"/>
+                </a:lnTo>
+                <a:lnTo>
+                  <a:pt x="692049" y="705"/>
+                </a:lnTo>
+                <a:lnTo>
+                  <a:pt x="782744" y="705"/>
+                </a:lnTo>
+                <a:cubicBezTo>
+                  <a:pt x="787553" y="705"/>
+                  <a:pt x="792363" y="5473"/>
+                  <a:pt x="797001" y="5473"/>
+                </a:cubicBezTo>
+                <a:cubicBezTo>
+                  <a:pt x="797001" y="10242"/>
+                  <a:pt x="801982" y="10242"/>
+                  <a:pt x="801982" y="10242"/>
+                </a:cubicBezTo>
+                <a:lnTo>
+                  <a:pt x="1030951" y="239185"/>
+                </a:lnTo>
+                <a:cubicBezTo>
+                  <a:pt x="1040398" y="248722"/>
+                  <a:pt x="1040398" y="258259"/>
+                  <a:pt x="1030951" y="267797"/>
+                </a:cubicBezTo>
+                <a:lnTo>
+                  <a:pt x="801982" y="496740"/>
+                </a:lnTo>
+                <a:cubicBezTo>
+                  <a:pt x="800436" y="498363"/>
+                  <a:pt x="798547" y="499885"/>
+                  <a:pt x="797001" y="501508"/>
+                </a:cubicBezTo>
+                <a:cubicBezTo>
+                  <a:pt x="792363" y="506277"/>
+                  <a:pt x="787553" y="506277"/>
+                  <a:pt x="782744" y="506277"/>
+                </a:cubicBezTo>
+                <a:lnTo>
+                  <a:pt x="692049" y="506277"/>
+                </a:lnTo>
+                <a:lnTo>
+                  <a:pt x="291705" y="505140"/>
+                </a:lnTo>
+                <a:lnTo>
+                  <a:pt x="291705" y="506277"/>
+                </a:lnTo>
+                <a:lnTo>
+                  <a:pt x="0" y="506277"/>
+                </a:lnTo>
+                <a:close/>
+              </a:path>
+            </a:pathLst>
+          </a:custGeom>
+          <a:ln>
+            <a:noFill/>
+          </a:ln>
+        </p:spPr>
+        <p:style>
+          <a:lnRef idx="2">
+            <a:schemeClr val="accent1">
+              <a:shade val="50000"/>
+            </a:schemeClr>
+          </a:lnRef>
+          <a:fillRef idx="1">
+            <a:schemeClr val="accent1"/>
+          </a:fillRef>
+          <a:effectRef idx="0">
+            <a:schemeClr val="accent1"/>
+          </a:effectRef>
+          <a:fontRef idx="minor">
+            <a:schemeClr val="lt1"/>
+          </a:fontRef>
+        </p:style>
+        <p:txBody>
+          <a:bodyPr rtlCol="0" anchor="ctr"/>
+          <a:lstStyle/>
+          <a:p>
+            <a:pPr algn="ctr"/>
+            <a:endParaRPr lang="en-US"/>
+          </a:p>
+        </p:txBody>
+      </p:sp>
+      <p:pic>
+        <p:nvPicPr>
+          <p:cNvPr id="6" name="Obraz 5">
+            <a:extLst>
+              <a:ext uri="{FF2B5EF4-FFF2-40B4-BE49-F238E27FC236}">
+                <a16:creationId xmlns:a16="http://schemas.microsoft.com/office/drawing/2014/main" id="{AFB10D1A-5A72-4412-5A82-3FE31F7427E6}"/>
+              </a:ext>
+            </a:extLst>
+          </p:cNvPr>
+          <p:cNvPicPr>
+            <a:picLocks noChangeAspect="1"/>
+          </p:cNvPicPr>
+          <p:nvPr/>
+        </p:nvPicPr>
+        <p:blipFill>
+          <a:blip r:embed="rId3">
+            <a:alphaModFix amt="11000"/>
+          </a:blip>
+          <a:stretch>
+            <a:fillRect/>
+          </a:stretch>
+        </p:blipFill>
+        <p:spPr>
+          <a:xfrm flipH="1">
+            <a:off x="6293223" y="352740"/>
+            <a:ext cx="2192753" cy="2192753"/>
+          </a:xfrm>
+          <a:prstGeom prst="rect">
+            <a:avLst/>
+          </a:prstGeom>
+        </p:spPr>
+      </p:pic>
+    </p:spTree>
+    <p:extLst>
+      <p:ext uri="{BB962C8B-B14F-4D97-AF65-F5344CB8AC3E}">
+        <p14:creationId xmlns:p14="http://schemas.microsoft.com/office/powerpoint/2010/main" val="485090723"/>
+      </p:ext>
+    </p:extLst>
+  </p:cSld>
+  <p:clrMapOvr>
+    <a:masterClrMapping/>
+  </p:clrMapOvr>
+</p:sld>
+</file>
+
+<file path=ppt/slides/slide14.xml><?xml version="1.0" encoding="utf-8"?>
+<p:sld xmlns:a="http://schemas.openxmlformats.org/drawingml/2006/main" xmlns:r="http://schemas.openxmlformats.org/officeDocument/2006/relationships" xmlns:p="http://schemas.openxmlformats.org/presentationml/2006/main">
+  <p:cSld>
+    <p:bg>
+      <p:bgPr>
         <a:solidFill>
           <a:schemeClr val="bg2"/>
         </a:solidFill>
@@ -15573,7 +16375,7 @@
         <p:cNvPr id="1" name="">
           <a:extLst>
             <a:ext uri="{FF2B5EF4-FFF2-40B4-BE49-F238E27FC236}">
-              <a16:creationId xmlns:a16="http://schemas.microsoft.com/office/drawing/2014/main" id="{449BA951-8D13-96CF-A748-0677AD93C47E}"/>
+              <a16:creationId xmlns:a16="http://schemas.microsoft.com/office/drawing/2014/main" id="{AAA07E38-70D6-D161-6229-E92DB189AB73}"/>
             </a:ext>
           </a:extLst>
         </p:cNvPr>
@@ -15653,7 +16455,7 @@
           <p:cNvPr id="2" name="Title 1">
             <a:extLst>
               <a:ext uri="{FF2B5EF4-FFF2-40B4-BE49-F238E27FC236}">
-                <a16:creationId xmlns:a16="http://schemas.microsoft.com/office/drawing/2014/main" id="{98C437BB-DCD8-F559-5F73-5ACA43DD5425}"/>
+                <a16:creationId xmlns:a16="http://schemas.microsoft.com/office/drawing/2014/main" id="{FEF048B7-4355-0C8E-5D80-2DF6C3B194F3}"/>
               </a:ext>
             </a:extLst>
           </p:cNvPr>
@@ -15667,7 +16469,7 @@
         <p:spPr>
           <a:xfrm>
             <a:off x="784514" y="942108"/>
-            <a:ext cx="2442412" cy="4969113"/>
+            <a:ext cx="2305006" cy="4969113"/>
           </a:xfrm>
         </p:spPr>
         <p:txBody>
@@ -15677,16 +16479,36 @@
           <a:lstStyle/>
           <a:p>
             <a:r>
-              <a:rPr lang="pl-PL" sz="2800">
+              <a:rPr lang="pl-PL" sz="2500" dirty="0">
                 <a:solidFill>
                   <a:schemeClr val="tx2">
                     <a:lumMod val="75000"/>
                   </a:schemeClr>
                 </a:solidFill>
               </a:rPr>
-              <a:t>Konfiguracja serwera (Nginx)</a:t>
-            </a:r>
-            <a:endParaRPr lang="en-US" sz="2800">
+              <a:t>SSE</a:t>
+            </a:r>
+            <a:r>
+              <a:rPr lang="en-US" sz="2500" dirty="0">
+                <a:solidFill>
+                  <a:schemeClr val="tx2">
+                    <a:lumMod val="75000"/>
+                  </a:schemeClr>
+                </a:solidFill>
+              </a:rPr>
+              <a:t> w </a:t>
+            </a:r>
+            <a:r>
+              <a:rPr lang="en-US" sz="2500" dirty="0" err="1">
+                <a:solidFill>
+                  <a:schemeClr val="tx2">
+                    <a:lumMod val="75000"/>
+                  </a:schemeClr>
+                </a:solidFill>
+              </a:rPr>
+              <a:t>przeglądarce</a:t>
+            </a:r>
+            <a:endParaRPr lang="en-US" sz="2500" dirty="0">
               <a:solidFill>
                 <a:schemeClr val="tx2">
                   <a:lumMod val="75000"/>
@@ -16919,250 +17741,72 @@
           </p:txBody>
         </p:sp>
       </p:grpSp>
-      <p:sp>
-        <p:nvSpPr>
-          <p:cNvPr id="3" name="Content Placeholder 2">
+      <p:pic>
+        <p:nvPicPr>
+          <p:cNvPr id="30" name="Symbol zastępczy zawartości 29">
             <a:extLst>
               <a:ext uri="{FF2B5EF4-FFF2-40B4-BE49-F238E27FC236}">
-                <a16:creationId xmlns:a16="http://schemas.microsoft.com/office/drawing/2014/main" id="{68CC19A4-2B7B-40B4-ACEC-BCE1EF99104B}"/>
+                <a16:creationId xmlns:a16="http://schemas.microsoft.com/office/drawing/2014/main" id="{A2376BDD-50F7-3482-7D97-25745F23F25F}"/>
               </a:ext>
             </a:extLst>
           </p:cNvPr>
-          <p:cNvSpPr>
-            <a:spLocks noGrp="1"/>
-          </p:cNvSpPr>
+          <p:cNvPicPr>
+            <a:picLocks noGrp="1" noChangeAspect="1"/>
+          </p:cNvPicPr>
           <p:nvPr>
             <p:ph idx="1"/>
           </p:nvPr>
-        </p:nvSpPr>
+        </p:nvPicPr>
+        <p:blipFill>
+          <a:blip r:embed="rId2"/>
+          <a:stretch>
+            <a:fillRect/>
+          </a:stretch>
+        </p:blipFill>
         <p:spPr>
           <a:xfrm>
-            <a:off x="3786796" y="942108"/>
-            <a:ext cx="4841662" cy="4969114"/>
+            <a:off x="3622164" y="2092087"/>
+            <a:ext cx="4862512" cy="2641802"/>
           </a:xfrm>
+          <a:prstGeom prst="rect">
+            <a:avLst/>
+          </a:prstGeom>
         </p:spPr>
-        <p:txBody>
-          <a:bodyPr anchor="ctr">
-            <a:normAutofit/>
-          </a:bodyPr>
-          <a:lstStyle/>
-          <a:p>
-            <a:pPr>
-              <a:lnSpc>
-                <a:spcPct val="90000"/>
-              </a:lnSpc>
-            </a:pPr>
-            <a:r>
-              <a:rPr lang="pl-PL" dirty="0"/>
-              <a:t>Problem: </a:t>
-            </a:r>
-            <a:r>
-              <a:rPr lang="pl-PL" dirty="0" err="1"/>
-              <a:t>Nginx</a:t>
-            </a:r>
-            <a:r>
-              <a:rPr lang="pl-PL" dirty="0"/>
-              <a:t> domyślnie buforuje odpowiedzi → SSE przestaje działać.  </a:t>
-            </a:r>
-          </a:p>
-          <a:p>
-            <a:pPr>
-              <a:lnSpc>
-                <a:spcPct val="90000"/>
-              </a:lnSpc>
-            </a:pPr>
-            <a:r>
-              <a:rPr lang="pl-PL" dirty="0"/>
-              <a:t>Rozwiązanie: wyłączyć buforowanie + utrzymać </a:t>
-            </a:r>
-            <a:r>
-              <a:rPr lang="pl-PL" dirty="0" err="1"/>
-              <a:t>connection</a:t>
-            </a:r>
-            <a:r>
-              <a:rPr lang="pl-PL" dirty="0"/>
-              <a:t> open.</a:t>
-            </a:r>
-          </a:p>
-          <a:p>
-            <a:pPr marL="0" indent="0">
-              <a:lnSpc>
-                <a:spcPct val="90000"/>
-              </a:lnSpc>
-              <a:buNone/>
-            </a:pPr>
-            <a:endParaRPr lang="pl-PL" dirty="0"/>
-          </a:p>
-          <a:p>
-            <a:pPr marL="0" indent="0">
-              <a:lnSpc>
-                <a:spcPct val="90000"/>
-              </a:lnSpc>
-              <a:buNone/>
-            </a:pPr>
-            <a:r>
-              <a:rPr lang="en-US" dirty="0"/>
-              <a:t>location /events {</a:t>
-            </a:r>
-          </a:p>
-          <a:p>
-            <a:pPr marL="0" indent="0">
-              <a:lnSpc>
-                <a:spcPct val="90000"/>
-              </a:lnSpc>
-              <a:buNone/>
-            </a:pPr>
-            <a:r>
-              <a:rPr lang="en-US" dirty="0"/>
-              <a:t>   </a:t>
-            </a:r>
-            <a:r>
-              <a:rPr lang="en-US" dirty="0" err="1"/>
-              <a:t>proxy_pass</a:t>
-            </a:r>
-            <a:r>
-              <a:rPr lang="en-US" dirty="0"/>
-              <a:t> http://127.0.0.1:8000;</a:t>
-            </a:r>
-          </a:p>
-          <a:p>
-            <a:pPr marL="0" indent="0">
-              <a:lnSpc>
-                <a:spcPct val="90000"/>
-              </a:lnSpc>
-              <a:buNone/>
-            </a:pPr>
-            <a:r>
-              <a:rPr lang="en-US" dirty="0"/>
-              <a:t>   </a:t>
-            </a:r>
-            <a:r>
-              <a:rPr lang="en-US" dirty="0" err="1"/>
-              <a:t>proxy_http_version</a:t>
-            </a:r>
-            <a:r>
-              <a:rPr lang="en-US" dirty="0"/>
-              <a:t> 1.1;</a:t>
-            </a:r>
-          </a:p>
-          <a:p>
-            <a:pPr marL="0" indent="0">
-              <a:lnSpc>
-                <a:spcPct val="90000"/>
-              </a:lnSpc>
-              <a:buNone/>
-            </a:pPr>
-            <a:r>
-              <a:rPr lang="en-US" dirty="0"/>
-              <a:t>   </a:t>
-            </a:r>
-            <a:r>
-              <a:rPr lang="en-US" dirty="0" err="1"/>
-              <a:t>proxy_set_header</a:t>
-            </a:r>
-            <a:r>
-              <a:rPr lang="en-US" dirty="0"/>
-              <a:t> Connection '';</a:t>
-            </a:r>
-          </a:p>
-          <a:p>
-            <a:pPr marL="0" indent="0">
-              <a:lnSpc>
-                <a:spcPct val="90000"/>
-              </a:lnSpc>
-              <a:buNone/>
-            </a:pPr>
-            <a:r>
-              <a:rPr lang="en-US" dirty="0"/>
-              <a:t>   </a:t>
-            </a:r>
-            <a:r>
-              <a:rPr lang="en-US" dirty="0" err="1"/>
-              <a:t>chunked_transfer_encoding</a:t>
-            </a:r>
-            <a:r>
-              <a:rPr lang="en-US" dirty="0"/>
-              <a:t> off;</a:t>
-            </a:r>
-          </a:p>
-          <a:p>
-            <a:pPr marL="0" indent="0">
-              <a:lnSpc>
-                <a:spcPct val="90000"/>
-              </a:lnSpc>
-              <a:buNone/>
-            </a:pPr>
-            <a:r>
-              <a:rPr lang="en-US" dirty="0"/>
-              <a:t>   </a:t>
-            </a:r>
-            <a:r>
-              <a:rPr lang="en-US" dirty="0" err="1"/>
-              <a:t>proxy_buffering</a:t>
-            </a:r>
-            <a:r>
-              <a:rPr lang="en-US" dirty="0"/>
-              <a:t> off;</a:t>
-            </a:r>
-          </a:p>
-          <a:p>
-            <a:pPr marL="0" indent="0">
-              <a:lnSpc>
-                <a:spcPct val="90000"/>
-              </a:lnSpc>
-              <a:buNone/>
-            </a:pPr>
-            <a:r>
-              <a:rPr lang="en-US" dirty="0"/>
-              <a:t>   </a:t>
-            </a:r>
-            <a:r>
-              <a:rPr lang="en-US" dirty="0" err="1"/>
-              <a:t>proxy_cache</a:t>
-            </a:r>
-            <a:r>
-              <a:rPr lang="en-US" dirty="0"/>
-              <a:t> off;</a:t>
-            </a:r>
-          </a:p>
-          <a:p>
-            <a:pPr marL="0" indent="0">
-              <a:lnSpc>
-                <a:spcPct val="90000"/>
-              </a:lnSpc>
-              <a:buNone/>
-            </a:pPr>
-            <a:r>
-              <a:rPr lang="en-US" dirty="0"/>
-              <a:t>   </a:t>
-            </a:r>
-            <a:r>
-              <a:rPr lang="en-US" dirty="0" err="1"/>
-              <a:t>keepalive_requests</a:t>
-            </a:r>
-            <a:r>
-              <a:rPr lang="en-US" dirty="0"/>
-              <a:t> 100000;</a:t>
-            </a:r>
-          </a:p>
-          <a:p>
-            <a:pPr marL="0" indent="0">
-              <a:lnSpc>
-                <a:spcPct val="90000"/>
-              </a:lnSpc>
-              <a:buNone/>
-            </a:pPr>
-            <a:r>
-              <a:rPr lang="en-US" dirty="0"/>
-              <a:t>}</a:t>
-            </a:r>
-          </a:p>
-        </p:txBody>
-      </p:sp>
+      </p:pic>
+      <p:pic>
+        <p:nvPicPr>
+          <p:cNvPr id="32" name="Obraz 31">
+            <a:extLst>
+              <a:ext uri="{FF2B5EF4-FFF2-40B4-BE49-F238E27FC236}">
+                <a16:creationId xmlns:a16="http://schemas.microsoft.com/office/drawing/2014/main" id="{F040028F-7F35-2F6D-3D60-E71D7B519257}"/>
+              </a:ext>
+            </a:extLst>
+          </p:cNvPr>
+          <p:cNvPicPr>
+            <a:picLocks noChangeAspect="1"/>
+          </p:cNvPicPr>
+          <p:nvPr/>
+        </p:nvPicPr>
+        <p:blipFill>
+          <a:blip r:embed="rId3"/>
+          <a:stretch>
+            <a:fillRect/>
+          </a:stretch>
+        </p:blipFill>
+        <p:spPr>
+          <a:xfrm>
+            <a:off x="6936301" y="461452"/>
+            <a:ext cx="1597926" cy="1597926"/>
+          </a:xfrm>
+          <a:prstGeom prst="rect">
+            <a:avLst/>
+          </a:prstGeom>
+        </p:spPr>
+      </p:pic>
     </p:spTree>
     <p:extLst>
       <p:ext uri="{BB962C8B-B14F-4D97-AF65-F5344CB8AC3E}">
-        <p14:creationId xmlns:p14="http://schemas.microsoft.com/office/powerpoint/2010/main" val="485090723"/>
+        <p14:creationId xmlns:p14="http://schemas.microsoft.com/office/powerpoint/2010/main" val="2265997671"/>
       </p:ext>
     </p:extLst>
   </p:cSld>
@@ -17172,7 +17816,7 @@
 </p:sld>
 </file>
 
-<file path=ppt/slides/slide14.xml><?xml version="1.0" encoding="utf-8"?>
+<file path=ppt/slides/slide15.xml><?xml version="1.0" encoding="utf-8"?>
 <p:sld xmlns:a="http://schemas.openxmlformats.org/drawingml/2006/main" xmlns:r="http://schemas.openxmlformats.org/officeDocument/2006/relationships" xmlns:p="http://schemas.openxmlformats.org/presentationml/2006/main">
   <p:cSld>
     <p:bg>
@@ -17188,7 +17832,7 @@
         <p:cNvPr id="1" name="">
           <a:extLst>
             <a:ext uri="{FF2B5EF4-FFF2-40B4-BE49-F238E27FC236}">
-              <a16:creationId xmlns:a16="http://schemas.microsoft.com/office/drawing/2014/main" id="{AAA07E38-70D6-D161-6229-E92DB189AB73}"/>
+              <a16:creationId xmlns:a16="http://schemas.microsoft.com/office/drawing/2014/main" id="{49E11521-D965-AECE-DEDC-71BE385E81B2}"/>
             </a:ext>
           </a:extLst>
         </p:cNvPr>
@@ -17268,7 +17912,7 @@
           <p:cNvPr id="2" name="Title 1">
             <a:extLst>
               <a:ext uri="{FF2B5EF4-FFF2-40B4-BE49-F238E27FC236}">
-                <a16:creationId xmlns:a16="http://schemas.microsoft.com/office/drawing/2014/main" id="{FEF048B7-4355-0C8E-5D80-2DF6C3B194F3}"/>
+                <a16:creationId xmlns:a16="http://schemas.microsoft.com/office/drawing/2014/main" id="{815D2363-81D2-8A17-5EF1-A042FBDE1637}"/>
               </a:ext>
             </a:extLst>
           </p:cNvPr>
@@ -17292,25 +17936,32 @@
           <a:lstStyle/>
           <a:p>
             <a:r>
-              <a:rPr lang="pl-PL" sz="2500">
+              <a:rPr lang="pl-PL" dirty="0" err="1">
                 <a:solidFill>
                   <a:schemeClr val="tx2">
                     <a:lumMod val="75000"/>
                   </a:schemeClr>
                 </a:solidFill>
               </a:rPr>
-              <a:t>SSE</a:t>
-            </a:r>
-            <a:r>
-              <a:rPr lang="en-US" sz="2500">
+              <a:t>FastAPI</a:t>
+            </a:r>
+            <a:r>
+              <a:rPr lang="pl-PL" dirty="0">
                 <a:solidFill>
                   <a:schemeClr val="tx2">
                     <a:lumMod val="75000"/>
                   </a:schemeClr>
                 </a:solidFill>
               </a:rPr>
-              <a:t> w przeglądarce</a:t>
-            </a:r>
+              <a:t> i SSE</a:t>
+            </a:r>
+            <a:endParaRPr lang="en-US" dirty="0">
+              <a:solidFill>
+                <a:schemeClr val="tx2">
+                  <a:lumMod val="75000"/>
+                </a:schemeClr>
+              </a:solidFill>
+            </a:endParaRPr>
           </a:p>
         </p:txBody>
       </p:sp>
@@ -18537,2320 +19188,70 @@
           </p:txBody>
         </p:sp>
       </p:grpSp>
-      <p:sp>
-        <p:nvSpPr>
-          <p:cNvPr id="3" name="Content Placeholder 2">
+      <p:pic>
+        <p:nvPicPr>
+          <p:cNvPr id="29" name="Symbol zastępczy zawartości 28">
             <a:extLst>
               <a:ext uri="{FF2B5EF4-FFF2-40B4-BE49-F238E27FC236}">
-                <a16:creationId xmlns:a16="http://schemas.microsoft.com/office/drawing/2014/main" id="{C0A7EDE5-44BA-03D4-11CF-414C213B34A8}"/>
+                <a16:creationId xmlns:a16="http://schemas.microsoft.com/office/drawing/2014/main" id="{0F63EFFB-B0FA-888F-C681-655659532E3E}"/>
               </a:ext>
             </a:extLst>
           </p:cNvPr>
-          <p:cNvSpPr>
-            <a:spLocks noGrp="1"/>
-          </p:cNvSpPr>
+          <p:cNvPicPr>
+            <a:picLocks noGrp="1" noChangeAspect="1"/>
+          </p:cNvPicPr>
           <p:nvPr>
             <p:ph idx="1"/>
           </p:nvPr>
-        </p:nvSpPr>
+        </p:nvPicPr>
+        <p:blipFill>
+          <a:blip r:embed="rId2"/>
+          <a:stretch>
+            <a:fillRect/>
+          </a:stretch>
+        </p:blipFill>
         <p:spPr>
           <a:xfrm>
-            <a:off x="3786796" y="942108"/>
-            <a:ext cx="4841662" cy="4969114"/>
-          </a:xfrm>
-        </p:spPr>
-        <p:txBody>
-          <a:bodyPr anchor="ctr">
-            <a:normAutofit fontScale="92500" lnSpcReduction="10000"/>
-          </a:bodyPr>
-          <a:lstStyle/>
-          <a:p>
-            <a:pPr marL="0" indent="0">
-              <a:lnSpc>
-                <a:spcPct val="90000"/>
-              </a:lnSpc>
-              <a:buNone/>
-            </a:pPr>
-            <a:r>
-              <a:rPr lang="en-US" dirty="0"/>
-              <a:t>const </a:t>
-            </a:r>
-            <a:r>
-              <a:rPr lang="en-US" dirty="0" err="1"/>
-              <a:t>evtSource</a:t>
-            </a:r>
-            <a:r>
-              <a:rPr lang="en-US" dirty="0"/>
-              <a:t> = new </a:t>
-            </a:r>
-            <a:r>
-              <a:rPr lang="en-US" dirty="0" err="1"/>
-              <a:t>EventSource</a:t>
-            </a:r>
-            <a:r>
-              <a:rPr lang="en-US" dirty="0"/>
-              <a:t>("/events");</a:t>
-            </a:r>
-          </a:p>
-          <a:p>
-            <a:pPr marL="0" indent="0">
-              <a:lnSpc>
-                <a:spcPct val="90000"/>
-              </a:lnSpc>
-              <a:buNone/>
-            </a:pPr>
-            <a:endParaRPr lang="en-US" dirty="0"/>
-          </a:p>
-          <a:p>
-            <a:pPr marL="0" indent="0">
-              <a:lnSpc>
-                <a:spcPct val="90000"/>
-              </a:lnSpc>
-              <a:buNone/>
-            </a:pPr>
-            <a:r>
-              <a:rPr lang="en-US" dirty="0" err="1"/>
-              <a:t>evtSource.onmessage</a:t>
-            </a:r>
-            <a:r>
-              <a:rPr lang="en-US" dirty="0"/>
-              <a:t> = (event) =&gt; {</a:t>
-            </a:r>
-          </a:p>
-          <a:p>
-            <a:pPr marL="0" indent="0">
-              <a:lnSpc>
-                <a:spcPct val="90000"/>
-              </a:lnSpc>
-              <a:buNone/>
-            </a:pPr>
-            <a:r>
-              <a:rPr lang="en-US" dirty="0"/>
-              <a:t>  console.log("Nowa </a:t>
-            </a:r>
-            <a:r>
-              <a:rPr lang="en-US" dirty="0" err="1"/>
-              <a:t>wiadomość</a:t>
-            </a:r>
-            <a:r>
-              <a:rPr lang="en-US" dirty="0"/>
-              <a:t>:", </a:t>
-            </a:r>
-            <a:r>
-              <a:rPr lang="en-US" dirty="0" err="1"/>
-              <a:t>event.data</a:t>
-            </a:r>
-            <a:r>
-              <a:rPr lang="en-US" dirty="0"/>
-              <a:t>);</a:t>
-            </a:r>
-          </a:p>
-          <a:p>
-            <a:pPr marL="0" indent="0">
-              <a:lnSpc>
-                <a:spcPct val="90000"/>
-              </a:lnSpc>
-              <a:buNone/>
-            </a:pPr>
-            <a:r>
-              <a:rPr lang="en-US" dirty="0"/>
-              <a:t>};</a:t>
-            </a:r>
-          </a:p>
-          <a:p>
-            <a:pPr marL="0" indent="0">
-              <a:lnSpc>
-                <a:spcPct val="90000"/>
-              </a:lnSpc>
-              <a:buNone/>
-            </a:pPr>
-            <a:endParaRPr lang="en-US" dirty="0"/>
-          </a:p>
-          <a:p>
-            <a:pPr marL="0" indent="0">
-              <a:lnSpc>
-                <a:spcPct val="90000"/>
-              </a:lnSpc>
-              <a:buNone/>
-            </a:pPr>
-            <a:r>
-              <a:rPr lang="en-US" dirty="0" err="1"/>
-              <a:t>evtSource.addEventListener</a:t>
-            </a:r>
-            <a:r>
-              <a:rPr lang="en-US" dirty="0"/>
-              <a:t>("custom", (event) =&gt; {</a:t>
-            </a:r>
-          </a:p>
-          <a:p>
-            <a:pPr marL="0" indent="0">
-              <a:lnSpc>
-                <a:spcPct val="90000"/>
-              </a:lnSpc>
-              <a:buNone/>
-            </a:pPr>
-            <a:r>
-              <a:rPr lang="en-US" dirty="0"/>
-              <a:t>  console.log("Custom event:", </a:t>
-            </a:r>
-            <a:r>
-              <a:rPr lang="en-US" dirty="0" err="1"/>
-              <a:t>event.data</a:t>
-            </a:r>
-            <a:r>
-              <a:rPr lang="en-US" dirty="0"/>
-              <a:t>);</a:t>
-            </a:r>
-          </a:p>
-          <a:p>
-            <a:pPr marL="0" indent="0">
-              <a:lnSpc>
-                <a:spcPct val="90000"/>
-              </a:lnSpc>
-              <a:buNone/>
-            </a:pPr>
-            <a:r>
-              <a:rPr lang="en-US" dirty="0"/>
-              <a:t>});</a:t>
-            </a:r>
-          </a:p>
-          <a:p>
-            <a:pPr marL="0" indent="0">
-              <a:lnSpc>
-                <a:spcPct val="90000"/>
-              </a:lnSpc>
-              <a:buNone/>
-            </a:pPr>
-            <a:endParaRPr lang="en-US" dirty="0"/>
-          </a:p>
-          <a:p>
-            <a:pPr marL="0" indent="0">
-              <a:lnSpc>
-                <a:spcPct val="90000"/>
-              </a:lnSpc>
-              <a:buNone/>
-            </a:pPr>
-            <a:r>
-              <a:rPr lang="en-US" dirty="0" err="1"/>
-              <a:t>evtSource.onerror</a:t>
-            </a:r>
-            <a:r>
-              <a:rPr lang="en-US" dirty="0"/>
-              <a:t> = () =&gt; {</a:t>
-            </a:r>
-          </a:p>
-          <a:p>
-            <a:pPr marL="0" indent="0">
-              <a:lnSpc>
-                <a:spcPct val="90000"/>
-              </a:lnSpc>
-              <a:buNone/>
-            </a:pPr>
-            <a:r>
-              <a:rPr lang="en-US" dirty="0"/>
-              <a:t>  </a:t>
-            </a:r>
-            <a:r>
-              <a:rPr lang="en-US" dirty="0" err="1"/>
-              <a:t>console.error</a:t>
-            </a:r>
-            <a:r>
-              <a:rPr lang="en-US" dirty="0"/>
-              <a:t>("</a:t>
-            </a:r>
-            <a:r>
-              <a:rPr lang="en-US" dirty="0" err="1"/>
-              <a:t>Błąd</a:t>
-            </a:r>
-            <a:r>
-              <a:rPr lang="en-US" dirty="0"/>
-              <a:t> </a:t>
-            </a:r>
-            <a:r>
-              <a:rPr lang="en-US" dirty="0" err="1"/>
-              <a:t>połączenia</a:t>
-            </a:r>
-            <a:r>
-              <a:rPr lang="en-US" dirty="0"/>
-              <a:t>");</a:t>
-            </a:r>
-          </a:p>
-          <a:p>
-            <a:pPr marL="0" indent="0">
-              <a:lnSpc>
-                <a:spcPct val="90000"/>
-              </a:lnSpc>
-              <a:buNone/>
-            </a:pPr>
-            <a:r>
-              <a:rPr lang="en-US" dirty="0"/>
-              <a:t>};</a:t>
-            </a:r>
-          </a:p>
-        </p:txBody>
-      </p:sp>
-    </p:spTree>
-    <p:extLst>
-      <p:ext uri="{BB962C8B-B14F-4D97-AF65-F5344CB8AC3E}">
-        <p14:creationId xmlns:p14="http://schemas.microsoft.com/office/powerpoint/2010/main" val="2265997671"/>
-      </p:ext>
-    </p:extLst>
-  </p:cSld>
-  <p:clrMapOvr>
-    <a:masterClrMapping/>
-  </p:clrMapOvr>
-</p:sld>
-</file>
-
-<file path=ppt/slides/slide15.xml><?xml version="1.0" encoding="utf-8"?>
-<p:sld xmlns:a="http://schemas.openxmlformats.org/drawingml/2006/main" xmlns:r="http://schemas.openxmlformats.org/officeDocument/2006/relationships" xmlns:p="http://schemas.openxmlformats.org/presentationml/2006/main">
-  <p:cSld>
-    <p:bg>
-      <p:bgPr>
-        <a:solidFill>
-          <a:schemeClr val="bg2"/>
-        </a:solidFill>
-        <a:effectLst/>
-      </p:bgPr>
-    </p:bg>
-    <p:spTree>
-      <p:nvGrpSpPr>
-        <p:cNvPr id="1" name="">
-          <a:extLst>
-            <a:ext uri="{FF2B5EF4-FFF2-40B4-BE49-F238E27FC236}">
-              <a16:creationId xmlns:a16="http://schemas.microsoft.com/office/drawing/2014/main" id="{49E11521-D965-AECE-DEDC-71BE385E81B2}"/>
-            </a:ext>
-          </a:extLst>
-        </p:cNvPr>
-        <p:cNvGrpSpPr/>
-        <p:nvPr/>
-      </p:nvGrpSpPr>
-      <p:grpSpPr>
-        <a:xfrm>
-          <a:off x="0" y="0"/>
-          <a:ext cx="0" cy="0"/>
-          <a:chOff x="0" y="0"/>
-          <a:chExt cx="0" cy="0"/>
-        </a:xfrm>
-      </p:grpSpPr>
-      <p:sp useBgFill="1">
-        <p:nvSpPr>
-          <p:cNvPr id="8" name="Rectangle 7">
-            <a:extLst>
-              <a:ext uri="{FF2B5EF4-FFF2-40B4-BE49-F238E27FC236}">
-                <a16:creationId xmlns:a16="http://schemas.microsoft.com/office/drawing/2014/main" id="{CD306B45-25EE-434D-ABA9-A27B79320CFF}"/>
-              </a:ext>
-              <a:ext uri="{C183D7F6-B498-43B3-948B-1728B52AA6E4}">
-                <adec:decorative xmlns:adec="http://schemas.microsoft.com/office/drawing/2017/decorative" val="1"/>
-              </a:ext>
-            </a:extLst>
-          </p:cNvPr>
-          <p:cNvSpPr>
-            <a:spLocks noGrp="1" noRot="1" noChangeAspect="1" noMove="1" noResize="1" noEditPoints="1" noAdjustHandles="1" noChangeArrowheads="1" noChangeShapeType="1" noTextEdit="1"/>
-          </p:cNvSpPr>
-          <p:nvPr>
-            <p:extLst>
-              <p:ext uri="{386F3935-93C4-4BCD-93E2-E3B085C9AB24}">
-                <p16:designElem xmlns:p16="http://schemas.microsoft.com/office/powerpoint/2015/main" val="1"/>
-              </p:ext>
-            </p:extLst>
-          </p:nvPr>
-        </p:nvSpPr>
-        <p:spPr>
-          <a:xfrm>
-            <a:off x="1" y="0"/>
-            <a:ext cx="9143999" cy="6858000"/>
+            <a:off x="3592513" y="1110081"/>
+            <a:ext cx="4941887" cy="4436225"/>
           </a:xfrm>
           <a:prstGeom prst="rect">
             <a:avLst/>
           </a:prstGeom>
-          <a:ln>
-            <a:noFill/>
-          </a:ln>
         </p:spPr>
-        <p:style>
-          <a:lnRef idx="2">
-            <a:schemeClr val="accent1">
-              <a:shade val="50000"/>
-            </a:schemeClr>
-          </a:lnRef>
-          <a:fillRef idx="1">
-            <a:schemeClr val="accent1"/>
-          </a:fillRef>
-          <a:effectRef idx="0">
-            <a:schemeClr val="accent1"/>
-          </a:effectRef>
-          <a:fontRef idx="minor">
-            <a:schemeClr val="lt1"/>
-          </a:fontRef>
-        </p:style>
-        <p:txBody>
-          <a:bodyPr rtlCol="0" anchor="ctr"/>
-          <a:lstStyle/>
-          <a:p>
-            <a:pPr algn="ctr"/>
-            <a:endParaRPr lang="en-US"/>
-          </a:p>
-        </p:txBody>
-      </p:sp>
-      <p:sp>
-        <p:nvSpPr>
-          <p:cNvPr id="2" name="Title 1">
+      </p:pic>
+      <p:pic>
+        <p:nvPicPr>
+          <p:cNvPr id="30" name="Obraz 29">
             <a:extLst>
               <a:ext uri="{FF2B5EF4-FFF2-40B4-BE49-F238E27FC236}">
-                <a16:creationId xmlns:a16="http://schemas.microsoft.com/office/drawing/2014/main" id="{815D2363-81D2-8A17-5EF1-A042FBDE1637}"/>
+                <a16:creationId xmlns:a16="http://schemas.microsoft.com/office/drawing/2014/main" id="{035F5F75-E905-C1AA-B30E-979766009993}"/>
               </a:ext>
             </a:extLst>
           </p:cNvPr>
-          <p:cNvSpPr>
-            <a:spLocks noGrp="1"/>
-          </p:cNvSpPr>
-          <p:nvPr>
-            <p:ph type="title"/>
-          </p:nvPr>
-        </p:nvSpPr>
+          <p:cNvPicPr>
+            <a:picLocks noChangeAspect="1"/>
+          </p:cNvPicPr>
+          <p:nvPr/>
+        </p:nvPicPr>
+        <p:blipFill>
+          <a:blip r:embed="rId3">
+            <a:alphaModFix amt="11000"/>
+          </a:blip>
+          <a:stretch>
+            <a:fillRect/>
+          </a:stretch>
+        </p:blipFill>
         <p:spPr>
-          <a:xfrm>
-            <a:off x="784514" y="942108"/>
-            <a:ext cx="2442412" cy="4969113"/>
-          </a:xfrm>
-        </p:spPr>
-        <p:txBody>
-          <a:bodyPr anchor="ctr">
-            <a:normAutofit/>
-          </a:bodyPr>
-          <a:lstStyle/>
-          <a:p>
-            <a:r>
-              <a:rPr lang="pl-PL">
-                <a:solidFill>
-                  <a:schemeClr val="tx2">
-                    <a:lumMod val="75000"/>
-                  </a:schemeClr>
-                </a:solidFill>
-              </a:rPr>
-              <a:t>FastAPI i Redis</a:t>
-            </a:r>
-            <a:endParaRPr lang="en-US">
-              <a:solidFill>
-                <a:schemeClr val="tx2">
-                  <a:lumMod val="75000"/>
-                </a:schemeClr>
-              </a:solidFill>
-            </a:endParaRPr>
-          </a:p>
-        </p:txBody>
-      </p:sp>
-      <p:sp>
-        <p:nvSpPr>
-          <p:cNvPr id="10" name="Rectangle 9">
-            <a:extLst>
-              <a:ext uri="{FF2B5EF4-FFF2-40B4-BE49-F238E27FC236}">
-                <a16:creationId xmlns:a16="http://schemas.microsoft.com/office/drawing/2014/main" id="{0A42F85E-4939-431E-8B4A-EC07C8E0AB65}"/>
-              </a:ext>
-              <a:ext uri="{C183D7F6-B498-43B3-948B-1728B52AA6E4}">
-                <adec:decorative xmlns:adec="http://schemas.microsoft.com/office/drawing/2017/decorative" val="1"/>
-              </a:ext>
-            </a:extLst>
-          </p:cNvPr>
-          <p:cNvSpPr>
-            <a:spLocks noGrp="1" noRot="1" noChangeAspect="1" noMove="1" noResize="1" noEditPoints="1" noAdjustHandles="1" noChangeArrowheads="1" noChangeShapeType="1" noTextEdit="1"/>
-          </p:cNvSpPr>
-          <p:nvPr>
-            <p:extLst>
-              <p:ext uri="{386F3935-93C4-4BCD-93E2-E3B085C9AB24}">
-                <p16:designElem xmlns:p16="http://schemas.microsoft.com/office/powerpoint/2015/main" val="1"/>
-              </p:ext>
-            </p:extLst>
-          </p:nvPr>
-        </p:nvSpPr>
-        <p:spPr>
-          <a:xfrm>
-            <a:off x="0" y="0"/>
-            <a:ext cx="137160" cy="6858000"/>
+          <a:xfrm flipH="1">
+            <a:off x="6293223" y="352740"/>
+            <a:ext cx="2192753" cy="2192753"/>
           </a:xfrm>
           <a:prstGeom prst="rect">
             <a:avLst/>
           </a:prstGeom>
-          <a:solidFill>
-            <a:schemeClr val="tx2"/>
-          </a:solidFill>
-          <a:ln>
-            <a:noFill/>
-          </a:ln>
-          <a:effectLst/>
         </p:spPr>
-        <p:style>
-          <a:lnRef idx="1">
-            <a:schemeClr val="accent1"/>
-          </a:lnRef>
-          <a:fillRef idx="3">
-            <a:schemeClr val="accent1"/>
-          </a:fillRef>
-          <a:effectRef idx="2">
-            <a:schemeClr val="accent1"/>
-          </a:effectRef>
-          <a:fontRef idx="minor">
-            <a:schemeClr val="lt1"/>
-          </a:fontRef>
-        </p:style>
-        <p:txBody>
-          <a:bodyPr/>
-          <a:lstStyle/>
-          <a:p>
-            <a:endParaRPr lang="en-US"/>
-          </a:p>
-        </p:txBody>
-      </p:sp>
-      <p:cxnSp>
-        <p:nvCxnSpPr>
-          <p:cNvPr id="12" name="Straight Connector 11">
-            <a:extLst>
-              <a:ext uri="{FF2B5EF4-FFF2-40B4-BE49-F238E27FC236}">
-                <a16:creationId xmlns:a16="http://schemas.microsoft.com/office/drawing/2014/main" id="{27EBB3F9-D6F7-4F6A-8843-9FEBA15E4969}"/>
-              </a:ext>
-              <a:ext uri="{C183D7F6-B498-43B3-948B-1728B52AA6E4}">
-                <adec:decorative xmlns:adec="http://schemas.microsoft.com/office/drawing/2017/decorative" val="1"/>
-              </a:ext>
-            </a:extLst>
-          </p:cNvPr>
-          <p:cNvCxnSpPr>
-            <a:cxnSpLocks noGrp="1" noRot="1" noChangeAspect="1" noMove="1" noResize="1" noEditPoints="1" noAdjustHandles="1" noChangeArrowheads="1" noChangeShapeType="1"/>
-          </p:cNvCxnSpPr>
-          <p:nvPr>
-            <p:extLst>
-              <p:ext uri="{386F3935-93C4-4BCD-93E2-E3B085C9AB24}">
-                <p16:designElem xmlns:p16="http://schemas.microsoft.com/office/powerpoint/2015/main" val="1"/>
-              </p:ext>
-            </p:extLst>
-          </p:nvPr>
-        </p:nvCxnSpPr>
-        <p:spPr>
-          <a:xfrm>
-            <a:off x="3490722" y="1871831"/>
-            <a:ext cx="0" cy="3200400"/>
-          </a:xfrm>
-          <a:prstGeom prst="line">
-            <a:avLst/>
-          </a:prstGeom>
-          <a:ln w="15875">
-            <a:solidFill>
-              <a:schemeClr val="accent4"/>
-            </a:solidFill>
-          </a:ln>
-        </p:spPr>
-        <p:style>
-          <a:lnRef idx="1">
-            <a:schemeClr val="accent1"/>
-          </a:lnRef>
-          <a:fillRef idx="0">
-            <a:schemeClr val="accent1"/>
-          </a:fillRef>
-          <a:effectRef idx="0">
-            <a:schemeClr val="accent1"/>
-          </a:effectRef>
-          <a:fontRef idx="minor">
-            <a:schemeClr val="tx1"/>
-          </a:fontRef>
-        </p:style>
-      </p:cxnSp>
-      <p:grpSp>
-        <p:nvGrpSpPr>
-          <p:cNvPr id="14" name="Group 13">
-            <a:extLst>
-              <a:ext uri="{FF2B5EF4-FFF2-40B4-BE49-F238E27FC236}">
-                <a16:creationId xmlns:a16="http://schemas.microsoft.com/office/drawing/2014/main" id="{5D2B17EF-74EB-4C33-B2E2-8E727B2E7D68}"/>
-              </a:ext>
-              <a:ext uri="{C183D7F6-B498-43B3-948B-1728B52AA6E4}">
-                <adec:decorative xmlns:adec="http://schemas.microsoft.com/office/drawing/2017/decorative" val="1"/>
-              </a:ext>
-            </a:extLst>
-          </p:cNvPr>
-          <p:cNvGrpSpPr>
-            <a:grpSpLocks noGrp="1" noUngrp="1" noRot="1" noChangeAspect="1" noMove="1" noResize="1"/>
-          </p:cNvGrpSpPr>
-          <p:nvPr>
-            <p:extLst>
-              <p:ext uri="{386F3935-93C4-4BCD-93E2-E3B085C9AB24}">
-                <p16:designElem xmlns:p16="http://schemas.microsoft.com/office/powerpoint/2015/main" val="1"/>
-              </p:ext>
-            </p:extLst>
-          </p:nvPr>
-        </p:nvGrpSpPr>
-        <p:grpSpPr>
-          <a:xfrm flipH="1">
-            <a:off x="4507495" y="0"/>
-            <a:ext cx="4632727" cy="6853245"/>
-            <a:chOff x="2487613" y="285750"/>
-            <a:chExt cx="2428876" cy="5654676"/>
-          </a:xfrm>
-          <a:solidFill>
-            <a:schemeClr val="bg1">
-              <a:alpha val="30000"/>
-            </a:schemeClr>
-          </a:solidFill>
-        </p:grpSpPr>
-        <p:sp>
-          <p:nvSpPr>
-            <p:cNvPr id="15" name="Freeform 11">
-              <a:extLst>
-                <a:ext uri="{FF2B5EF4-FFF2-40B4-BE49-F238E27FC236}">
-                  <a16:creationId xmlns:a16="http://schemas.microsoft.com/office/drawing/2014/main" id="{0A5F1F8A-3206-4B86-883F-65E98BB6E475}"/>
-                </a:ext>
-                <a:ext uri="{C183D7F6-B498-43B3-948B-1728B52AA6E4}">
-                  <adec:decorative xmlns:adec="http://schemas.microsoft.com/office/drawing/2017/decorative" val="1"/>
-                </a:ext>
-              </a:extLst>
-            </p:cNvPr>
-            <p:cNvSpPr/>
-            <p:nvPr>
-              <p:extLst>
-                <p:ext uri="{386F3935-93C4-4BCD-93E2-E3B085C9AB24}">
-                  <p16:designElem xmlns:p16="http://schemas.microsoft.com/office/powerpoint/2015/main" val="1"/>
-                </p:ext>
-              </p:extLst>
-            </p:nvPr>
-          </p:nvSpPr>
-          <p:spPr bwMode="auto">
-            <a:xfrm>
-              <a:off x="2487613" y="2284413"/>
-              <a:ext cx="85725" cy="533400"/>
-            </a:xfrm>
-            <a:custGeom>
-              <a:avLst/>
-              <a:gdLst/>
-              <a:ahLst/>
-              <a:cxnLst/>
-              <a:rect l="0" t="0" r="r" b="b"/>
-              <a:pathLst>
-                <a:path w="22" h="136">
-                  <a:moveTo>
-                    <a:pt x="22" y="136"/>
-                  </a:moveTo>
-                  <a:cubicBezTo>
-                    <a:pt x="20" y="117"/>
-                    <a:pt x="19" y="99"/>
-                    <a:pt x="17" y="80"/>
-                  </a:cubicBezTo>
-                  <a:cubicBezTo>
-                    <a:pt x="11" y="54"/>
-                    <a:pt x="6" y="27"/>
-                    <a:pt x="0" y="0"/>
-                  </a:cubicBezTo>
-                  <a:cubicBezTo>
-                    <a:pt x="0" y="35"/>
-                    <a:pt x="0" y="35"/>
-                    <a:pt x="0" y="35"/>
-                  </a:cubicBezTo>
-                  <a:cubicBezTo>
-                    <a:pt x="6" y="64"/>
-                    <a:pt x="13" y="94"/>
-                    <a:pt x="20" y="124"/>
-                  </a:cubicBezTo>
-                  <a:cubicBezTo>
-                    <a:pt x="20" y="128"/>
-                    <a:pt x="21" y="132"/>
-                    <a:pt x="22" y="136"/>
-                  </a:cubicBezTo>
-                  <a:close/>
-                </a:path>
-              </a:pathLst>
-            </a:custGeom>
-            <a:grpFill/>
-            <a:ln>
-              <a:noFill/>
-            </a:ln>
-          </p:spPr>
-          <p:txBody>
-            <a:bodyPr/>
-            <a:lstStyle/>
-            <a:p>
-              <a:endParaRPr lang="en-US"/>
-            </a:p>
-          </p:txBody>
-        </p:sp>
-        <p:sp>
-          <p:nvSpPr>
-            <p:cNvPr id="16" name="Freeform 12">
-              <a:extLst>
-                <a:ext uri="{FF2B5EF4-FFF2-40B4-BE49-F238E27FC236}">
-                  <a16:creationId xmlns:a16="http://schemas.microsoft.com/office/drawing/2014/main" id="{6935F8C7-CC88-4243-9786-F3CDBF04A09F}"/>
-                </a:ext>
-                <a:ext uri="{C183D7F6-B498-43B3-948B-1728B52AA6E4}">
-                  <adec:decorative xmlns:adec="http://schemas.microsoft.com/office/drawing/2017/decorative" val="1"/>
-                </a:ext>
-              </a:extLst>
-            </p:cNvPr>
-            <p:cNvSpPr/>
-            <p:nvPr>
-              <p:extLst>
-                <p:ext uri="{386F3935-93C4-4BCD-93E2-E3B085C9AB24}">
-                  <p16:designElem xmlns:p16="http://schemas.microsoft.com/office/powerpoint/2015/main" val="1"/>
-                </p:ext>
-              </p:extLst>
-            </p:nvPr>
-          </p:nvSpPr>
-          <p:spPr bwMode="auto">
-            <a:xfrm>
-              <a:off x="2597151" y="2779713"/>
-              <a:ext cx="550863" cy="1978025"/>
-            </a:xfrm>
-            <a:custGeom>
-              <a:avLst/>
-              <a:gdLst/>
-              <a:ahLst/>
-              <a:cxnLst/>
-              <a:rect l="0" t="0" r="r" b="b"/>
-              <a:pathLst>
-                <a:path w="140" h="504">
-                  <a:moveTo>
-                    <a:pt x="86" y="350"/>
-                  </a:moveTo>
-                  <a:cubicBezTo>
-                    <a:pt x="103" y="402"/>
-                    <a:pt x="120" y="453"/>
-                    <a:pt x="139" y="504"/>
-                  </a:cubicBezTo>
-                  <a:cubicBezTo>
-                    <a:pt x="139" y="495"/>
-                    <a:pt x="139" y="487"/>
-                    <a:pt x="140" y="478"/>
-                  </a:cubicBezTo>
-                  <a:cubicBezTo>
-                    <a:pt x="124" y="435"/>
-                    <a:pt x="109" y="391"/>
-                    <a:pt x="95" y="347"/>
-                  </a:cubicBezTo>
-                  <a:cubicBezTo>
-                    <a:pt x="58" y="233"/>
-                    <a:pt x="27" y="117"/>
-                    <a:pt x="0" y="0"/>
-                  </a:cubicBezTo>
-                  <a:cubicBezTo>
-                    <a:pt x="2" y="20"/>
-                    <a:pt x="4" y="41"/>
-                    <a:pt x="6" y="61"/>
-                  </a:cubicBezTo>
-                  <a:cubicBezTo>
-                    <a:pt x="30" y="158"/>
-                    <a:pt x="56" y="255"/>
-                    <a:pt x="86" y="350"/>
-                  </a:cubicBezTo>
-                  <a:close/>
-                </a:path>
-              </a:pathLst>
-            </a:custGeom>
-            <a:grpFill/>
-            <a:ln>
-              <a:noFill/>
-            </a:ln>
-          </p:spPr>
-          <p:txBody>
-            <a:bodyPr/>
-            <a:lstStyle/>
-            <a:p>
-              <a:endParaRPr lang="en-US"/>
-            </a:p>
-          </p:txBody>
-        </p:sp>
-        <p:sp>
-          <p:nvSpPr>
-            <p:cNvPr id="17" name="Freeform 13">
-              <a:extLst>
-                <a:ext uri="{FF2B5EF4-FFF2-40B4-BE49-F238E27FC236}">
-                  <a16:creationId xmlns:a16="http://schemas.microsoft.com/office/drawing/2014/main" id="{9AF7BAD9-71B3-40D8-A089-EFF7FE67BD66}"/>
-                </a:ext>
-                <a:ext uri="{C183D7F6-B498-43B3-948B-1728B52AA6E4}">
-                  <adec:decorative xmlns:adec="http://schemas.microsoft.com/office/drawing/2017/decorative" val="1"/>
-                </a:ext>
-              </a:extLst>
-            </p:cNvPr>
-            <p:cNvSpPr/>
-            <p:nvPr>
-              <p:extLst>
-                <p:ext uri="{386F3935-93C4-4BCD-93E2-E3B085C9AB24}">
-                  <p16:designElem xmlns:p16="http://schemas.microsoft.com/office/powerpoint/2015/main" val="1"/>
-                </p:ext>
-              </p:extLst>
-            </p:nvPr>
-          </p:nvSpPr>
-          <p:spPr bwMode="auto">
-            <a:xfrm>
-              <a:off x="3175001" y="4730750"/>
-              <a:ext cx="519113" cy="1209675"/>
-            </a:xfrm>
-            <a:custGeom>
-              <a:avLst/>
-              <a:gdLst/>
-              <a:ahLst/>
-              <a:cxnLst/>
-              <a:rect l="0" t="0" r="r" b="b"/>
-              <a:pathLst>
-                <a:path w="132" h="308">
-                  <a:moveTo>
-                    <a:pt x="8" y="22"/>
-                  </a:moveTo>
-                  <a:cubicBezTo>
-                    <a:pt x="5" y="15"/>
-                    <a:pt x="2" y="8"/>
-                    <a:pt x="0" y="0"/>
-                  </a:cubicBezTo>
-                  <a:cubicBezTo>
-                    <a:pt x="0" y="10"/>
-                    <a:pt x="0" y="19"/>
-                    <a:pt x="0" y="29"/>
-                  </a:cubicBezTo>
-                  <a:cubicBezTo>
-                    <a:pt x="21" y="85"/>
-                    <a:pt x="44" y="140"/>
-                    <a:pt x="68" y="194"/>
-                  </a:cubicBezTo>
-                  <a:cubicBezTo>
-                    <a:pt x="85" y="232"/>
-                    <a:pt x="104" y="270"/>
-                    <a:pt x="123" y="308"/>
-                  </a:cubicBezTo>
-                  <a:cubicBezTo>
-                    <a:pt x="132" y="308"/>
-                    <a:pt x="132" y="308"/>
-                    <a:pt x="132" y="308"/>
-                  </a:cubicBezTo>
-                  <a:cubicBezTo>
-                    <a:pt x="113" y="269"/>
-                    <a:pt x="94" y="230"/>
-                    <a:pt x="77" y="190"/>
-                  </a:cubicBezTo>
-                  <a:cubicBezTo>
-                    <a:pt x="52" y="135"/>
-                    <a:pt x="29" y="79"/>
-                    <a:pt x="8" y="22"/>
-                  </a:cubicBezTo>
-                  <a:close/>
-                </a:path>
-              </a:pathLst>
-            </a:custGeom>
-            <a:grpFill/>
-            <a:ln>
-              <a:noFill/>
-            </a:ln>
-          </p:spPr>
-          <p:txBody>
-            <a:bodyPr/>
-            <a:lstStyle/>
-            <a:p>
-              <a:endParaRPr lang="en-US"/>
-            </a:p>
-          </p:txBody>
-        </p:sp>
-        <p:sp>
-          <p:nvSpPr>
-            <p:cNvPr id="18" name="Freeform 14">
-              <a:extLst>
-                <a:ext uri="{FF2B5EF4-FFF2-40B4-BE49-F238E27FC236}">
-                  <a16:creationId xmlns:a16="http://schemas.microsoft.com/office/drawing/2014/main" id="{6467094F-AEF0-4D3B-BB76-8B3C1F08B937}"/>
-                </a:ext>
-                <a:ext uri="{C183D7F6-B498-43B3-948B-1728B52AA6E4}">
-                  <adec:decorative xmlns:adec="http://schemas.microsoft.com/office/drawing/2017/decorative" val="1"/>
-                </a:ext>
-              </a:extLst>
-            </p:cNvPr>
-            <p:cNvSpPr/>
-            <p:nvPr>
-              <p:extLst>
-                <p:ext uri="{386F3935-93C4-4BCD-93E2-E3B085C9AB24}">
-                  <p16:designElem xmlns:p16="http://schemas.microsoft.com/office/powerpoint/2015/main" val="1"/>
-                </p:ext>
-              </p:extLst>
-            </p:nvPr>
-          </p:nvSpPr>
-          <p:spPr bwMode="auto">
-            <a:xfrm>
-              <a:off x="3305176" y="5630863"/>
-              <a:ext cx="146050" cy="309563"/>
-            </a:xfrm>
-            <a:custGeom>
-              <a:avLst/>
-              <a:gdLst/>
-              <a:ahLst/>
-              <a:cxnLst/>
-              <a:rect l="0" t="0" r="r" b="b"/>
-              <a:pathLst>
-                <a:path w="37" h="79">
-                  <a:moveTo>
-                    <a:pt x="28" y="79"/>
-                  </a:moveTo>
-                  <a:cubicBezTo>
-                    <a:pt x="37" y="79"/>
-                    <a:pt x="37" y="79"/>
-                    <a:pt x="37" y="79"/>
-                  </a:cubicBezTo>
-                  <a:cubicBezTo>
-                    <a:pt x="24" y="53"/>
-                    <a:pt x="12" y="27"/>
-                    <a:pt x="0" y="0"/>
-                  </a:cubicBezTo>
-                  <a:cubicBezTo>
-                    <a:pt x="8" y="27"/>
-                    <a:pt x="17" y="53"/>
-                    <a:pt x="28" y="79"/>
-                  </a:cubicBezTo>
-                  <a:close/>
-                </a:path>
-              </a:pathLst>
-            </a:custGeom>
-            <a:grpFill/>
-            <a:ln>
-              <a:noFill/>
-            </a:ln>
-          </p:spPr>
-          <p:txBody>
-            <a:bodyPr/>
-            <a:lstStyle/>
-            <a:p>
-              <a:endParaRPr lang="en-US"/>
-            </a:p>
-          </p:txBody>
-        </p:sp>
-        <p:sp>
-          <p:nvSpPr>
-            <p:cNvPr id="19" name="Freeform 15">
-              <a:extLst>
-                <a:ext uri="{FF2B5EF4-FFF2-40B4-BE49-F238E27FC236}">
-                  <a16:creationId xmlns:a16="http://schemas.microsoft.com/office/drawing/2014/main" id="{36F56AF9-DEF1-44E7-BF42-6AAC1AA9D19D}"/>
-                </a:ext>
-                <a:ext uri="{C183D7F6-B498-43B3-948B-1728B52AA6E4}">
-                  <adec:decorative xmlns:adec="http://schemas.microsoft.com/office/drawing/2017/decorative" val="1"/>
-                </a:ext>
-              </a:extLst>
-            </p:cNvPr>
-            <p:cNvSpPr/>
-            <p:nvPr>
-              <p:extLst>
-                <p:ext uri="{386F3935-93C4-4BCD-93E2-E3B085C9AB24}">
-                  <p16:designElem xmlns:p16="http://schemas.microsoft.com/office/powerpoint/2015/main" val="1"/>
-                </p:ext>
-              </p:extLst>
-            </p:nvPr>
-          </p:nvSpPr>
-          <p:spPr bwMode="auto">
-            <a:xfrm>
-              <a:off x="2573338" y="2817813"/>
-              <a:ext cx="700088" cy="2835275"/>
-            </a:xfrm>
-            <a:custGeom>
-              <a:avLst/>
-              <a:gdLst/>
-              <a:ahLst/>
-              <a:cxnLst/>
-              <a:rect l="0" t="0" r="r" b="b"/>
-              <a:pathLst>
-                <a:path w="178" h="722">
-                  <a:moveTo>
-                    <a:pt x="162" y="660"/>
-                  </a:moveTo>
-                  <a:cubicBezTo>
-                    <a:pt x="145" y="618"/>
-                    <a:pt x="130" y="576"/>
-                    <a:pt x="116" y="534"/>
-                  </a:cubicBezTo>
-                  <a:cubicBezTo>
-                    <a:pt x="84" y="437"/>
-                    <a:pt x="59" y="337"/>
-                    <a:pt x="40" y="236"/>
-                  </a:cubicBezTo>
-                  <a:cubicBezTo>
-                    <a:pt x="29" y="175"/>
-                    <a:pt x="20" y="113"/>
-                    <a:pt x="12" y="51"/>
-                  </a:cubicBezTo>
-                  <a:cubicBezTo>
-                    <a:pt x="8" y="34"/>
-                    <a:pt x="4" y="17"/>
-                    <a:pt x="0" y="0"/>
-                  </a:cubicBezTo>
-                  <a:cubicBezTo>
-                    <a:pt x="8" y="79"/>
-                    <a:pt x="19" y="159"/>
-                    <a:pt x="33" y="237"/>
-                  </a:cubicBezTo>
-                  <a:cubicBezTo>
-                    <a:pt x="51" y="339"/>
-                    <a:pt x="76" y="439"/>
-                    <a:pt x="107" y="537"/>
-                  </a:cubicBezTo>
-                  <a:cubicBezTo>
-                    <a:pt x="123" y="586"/>
-                    <a:pt x="141" y="634"/>
-                    <a:pt x="160" y="681"/>
-                  </a:cubicBezTo>
-                  <a:cubicBezTo>
-                    <a:pt x="166" y="695"/>
-                    <a:pt x="172" y="708"/>
-                    <a:pt x="178" y="722"/>
-                  </a:cubicBezTo>
-                  <a:cubicBezTo>
-                    <a:pt x="176" y="717"/>
-                    <a:pt x="175" y="713"/>
-                    <a:pt x="174" y="708"/>
-                  </a:cubicBezTo>
-                  <a:cubicBezTo>
-                    <a:pt x="169" y="692"/>
-                    <a:pt x="165" y="676"/>
-                    <a:pt x="162" y="660"/>
-                  </a:cubicBezTo>
-                  <a:close/>
-                </a:path>
-              </a:pathLst>
-            </a:custGeom>
-            <a:grpFill/>
-            <a:ln>
-              <a:noFill/>
-            </a:ln>
-          </p:spPr>
-          <p:txBody>
-            <a:bodyPr/>
-            <a:lstStyle/>
-            <a:p>
-              <a:endParaRPr lang="en-US"/>
-            </a:p>
-          </p:txBody>
-        </p:sp>
-        <p:sp>
-          <p:nvSpPr>
-            <p:cNvPr id="20" name="Freeform 16">
-              <a:extLst>
-                <a:ext uri="{FF2B5EF4-FFF2-40B4-BE49-F238E27FC236}">
-                  <a16:creationId xmlns:a16="http://schemas.microsoft.com/office/drawing/2014/main" id="{A43EBE71-20BA-4A40-A513-516678089D11}"/>
-                </a:ext>
-                <a:ext uri="{C183D7F6-B498-43B3-948B-1728B52AA6E4}">
-                  <adec:decorative xmlns:adec="http://schemas.microsoft.com/office/drawing/2017/decorative" val="1"/>
-                </a:ext>
-              </a:extLst>
-            </p:cNvPr>
-            <p:cNvSpPr/>
-            <p:nvPr>
-              <p:extLst>
-                <p:ext uri="{386F3935-93C4-4BCD-93E2-E3B085C9AB24}">
-                  <p16:designElem xmlns:p16="http://schemas.microsoft.com/office/powerpoint/2015/main" val="1"/>
-                </p:ext>
-              </p:extLst>
-            </p:nvPr>
-          </p:nvSpPr>
-          <p:spPr bwMode="auto">
-            <a:xfrm>
-              <a:off x="2506663" y="285750"/>
-              <a:ext cx="90488" cy="2493963"/>
-            </a:xfrm>
-            <a:custGeom>
-              <a:avLst/>
-              <a:gdLst/>
-              <a:ahLst/>
-              <a:cxnLst/>
-              <a:rect l="0" t="0" r="r" b="b"/>
-              <a:pathLst>
-                <a:path w="23" h="635">
-                  <a:moveTo>
-                    <a:pt x="11" y="577"/>
-                  </a:moveTo>
-                  <a:cubicBezTo>
-                    <a:pt x="12" y="581"/>
-                    <a:pt x="12" y="585"/>
-                    <a:pt x="12" y="589"/>
-                  </a:cubicBezTo>
-                  <a:cubicBezTo>
-                    <a:pt x="15" y="603"/>
-                    <a:pt x="19" y="617"/>
-                    <a:pt x="22" y="632"/>
-                  </a:cubicBezTo>
-                  <a:cubicBezTo>
-                    <a:pt x="22" y="633"/>
-                    <a:pt x="22" y="634"/>
-                    <a:pt x="23" y="635"/>
-                  </a:cubicBezTo>
-                  <a:cubicBezTo>
-                    <a:pt x="21" y="615"/>
-                    <a:pt x="19" y="596"/>
-                    <a:pt x="17" y="576"/>
-                  </a:cubicBezTo>
-                  <a:cubicBezTo>
-                    <a:pt x="9" y="474"/>
-                    <a:pt x="5" y="372"/>
-                    <a:pt x="5" y="269"/>
-                  </a:cubicBezTo>
-                  <a:cubicBezTo>
-                    <a:pt x="6" y="179"/>
-                    <a:pt x="9" y="90"/>
-                    <a:pt x="15" y="0"/>
-                  </a:cubicBezTo>
-                  <a:cubicBezTo>
-                    <a:pt x="12" y="0"/>
-                    <a:pt x="12" y="0"/>
-                    <a:pt x="12" y="0"/>
-                  </a:cubicBezTo>
-                  <a:cubicBezTo>
-                    <a:pt x="5" y="89"/>
-                    <a:pt x="2" y="179"/>
-                    <a:pt x="1" y="269"/>
-                  </a:cubicBezTo>
-                  <a:cubicBezTo>
-                    <a:pt x="0" y="372"/>
-                    <a:pt x="3" y="474"/>
-                    <a:pt x="11" y="577"/>
-                  </a:cubicBezTo>
-                  <a:close/>
-                </a:path>
-              </a:pathLst>
-            </a:custGeom>
-            <a:grpFill/>
-            <a:ln>
-              <a:noFill/>
-            </a:ln>
-          </p:spPr>
-          <p:txBody>
-            <a:bodyPr/>
-            <a:lstStyle/>
-            <a:p>
-              <a:endParaRPr lang="en-US"/>
-            </a:p>
-          </p:txBody>
-        </p:sp>
-        <p:sp>
-          <p:nvSpPr>
-            <p:cNvPr id="21" name="Freeform 17">
-              <a:extLst>
-                <a:ext uri="{FF2B5EF4-FFF2-40B4-BE49-F238E27FC236}">
-                  <a16:creationId xmlns:a16="http://schemas.microsoft.com/office/drawing/2014/main" id="{1DB39648-7B38-4D0B-93C5-048EC4A45C99}"/>
-                </a:ext>
-                <a:ext uri="{C183D7F6-B498-43B3-948B-1728B52AA6E4}">
-                  <adec:decorative xmlns:adec="http://schemas.microsoft.com/office/drawing/2017/decorative" val="1"/>
-                </a:ext>
-              </a:extLst>
-            </p:cNvPr>
-            <p:cNvSpPr/>
-            <p:nvPr>
-              <p:extLst>
-                <p:ext uri="{386F3935-93C4-4BCD-93E2-E3B085C9AB24}">
-                  <p16:designElem xmlns:p16="http://schemas.microsoft.com/office/powerpoint/2015/main" val="1"/>
-                </p:ext>
-              </p:extLst>
-            </p:nvPr>
-          </p:nvSpPr>
-          <p:spPr bwMode="auto">
-            <a:xfrm>
-              <a:off x="2554288" y="2598738"/>
-              <a:ext cx="66675" cy="420688"/>
-            </a:xfrm>
-            <a:custGeom>
-              <a:avLst/>
-              <a:gdLst/>
-              <a:ahLst/>
-              <a:cxnLst/>
-              <a:rect l="0" t="0" r="r" b="b"/>
-              <a:pathLst>
-                <a:path w="17" h="107">
-                  <a:moveTo>
-                    <a:pt x="0" y="0"/>
-                  </a:moveTo>
-                  <a:cubicBezTo>
-                    <a:pt x="2" y="19"/>
-                    <a:pt x="3" y="37"/>
-                    <a:pt x="5" y="56"/>
-                  </a:cubicBezTo>
-                  <a:cubicBezTo>
-                    <a:pt x="9" y="73"/>
-                    <a:pt x="13" y="90"/>
-                    <a:pt x="17" y="107"/>
-                  </a:cubicBezTo>
-                  <a:cubicBezTo>
-                    <a:pt x="15" y="87"/>
-                    <a:pt x="13" y="66"/>
-                    <a:pt x="11" y="46"/>
-                  </a:cubicBezTo>
-                  <a:cubicBezTo>
-                    <a:pt x="10" y="45"/>
-                    <a:pt x="10" y="44"/>
-                    <a:pt x="10" y="43"/>
-                  </a:cubicBezTo>
-                  <a:cubicBezTo>
-                    <a:pt x="7" y="28"/>
-                    <a:pt x="3" y="14"/>
-                    <a:pt x="0" y="0"/>
-                  </a:cubicBezTo>
-                  <a:close/>
-                </a:path>
-              </a:pathLst>
-            </a:custGeom>
-            <a:grpFill/>
-            <a:ln>
-              <a:noFill/>
-            </a:ln>
-          </p:spPr>
-          <p:txBody>
-            <a:bodyPr/>
-            <a:lstStyle/>
-            <a:p>
-              <a:endParaRPr lang="en-US"/>
-            </a:p>
-          </p:txBody>
-        </p:sp>
-        <p:sp>
-          <p:nvSpPr>
-            <p:cNvPr id="22" name="Freeform 18">
-              <a:extLst>
-                <a:ext uri="{FF2B5EF4-FFF2-40B4-BE49-F238E27FC236}">
-                  <a16:creationId xmlns:a16="http://schemas.microsoft.com/office/drawing/2014/main" id="{8DD2661F-DE5F-45EA-B30B-7C6589638836}"/>
-                </a:ext>
-                <a:ext uri="{C183D7F6-B498-43B3-948B-1728B52AA6E4}">
-                  <adec:decorative xmlns:adec="http://schemas.microsoft.com/office/drawing/2017/decorative" val="1"/>
-                </a:ext>
-              </a:extLst>
-            </p:cNvPr>
-            <p:cNvSpPr/>
-            <p:nvPr>
-              <p:extLst>
-                <p:ext uri="{386F3935-93C4-4BCD-93E2-E3B085C9AB24}">
-                  <p16:designElem xmlns:p16="http://schemas.microsoft.com/office/powerpoint/2015/main" val="1"/>
-                </p:ext>
-              </p:extLst>
-            </p:nvPr>
-          </p:nvSpPr>
-          <p:spPr bwMode="auto">
-            <a:xfrm>
-              <a:off x="3143251" y="4757738"/>
-              <a:ext cx="161925" cy="873125"/>
-            </a:xfrm>
-            <a:custGeom>
-              <a:avLst/>
-              <a:gdLst/>
-              <a:ahLst/>
-              <a:cxnLst/>
-              <a:rect l="0" t="0" r="r" b="b"/>
-              <a:pathLst>
-                <a:path w="41" h="222">
-                  <a:moveTo>
-                    <a:pt x="0" y="0"/>
-                  </a:moveTo>
-                  <a:cubicBezTo>
-                    <a:pt x="0" y="31"/>
-                    <a:pt x="2" y="62"/>
-                    <a:pt x="5" y="93"/>
-                  </a:cubicBezTo>
-                  <a:cubicBezTo>
-                    <a:pt x="8" y="117"/>
-                    <a:pt x="12" y="142"/>
-                    <a:pt x="17" y="166"/>
-                  </a:cubicBezTo>
-                  <a:cubicBezTo>
-                    <a:pt x="19" y="172"/>
-                    <a:pt x="22" y="178"/>
-                    <a:pt x="24" y="184"/>
-                  </a:cubicBezTo>
-                  <a:cubicBezTo>
-                    <a:pt x="30" y="197"/>
-                    <a:pt x="35" y="209"/>
-                    <a:pt x="41" y="222"/>
-                  </a:cubicBezTo>
-                  <a:cubicBezTo>
-                    <a:pt x="40" y="219"/>
-                    <a:pt x="39" y="215"/>
-                    <a:pt x="38" y="212"/>
-                  </a:cubicBezTo>
-                  <a:cubicBezTo>
-                    <a:pt x="26" y="172"/>
-                    <a:pt x="18" y="132"/>
-                    <a:pt x="13" y="92"/>
-                  </a:cubicBezTo>
-                  <a:cubicBezTo>
-                    <a:pt x="11" y="68"/>
-                    <a:pt x="9" y="45"/>
-                    <a:pt x="8" y="22"/>
-                  </a:cubicBezTo>
-                  <a:cubicBezTo>
-                    <a:pt x="8" y="21"/>
-                    <a:pt x="7" y="20"/>
-                    <a:pt x="7" y="18"/>
-                  </a:cubicBezTo>
-                  <a:cubicBezTo>
-                    <a:pt x="5" y="12"/>
-                    <a:pt x="2" y="6"/>
-                    <a:pt x="0" y="0"/>
-                  </a:cubicBezTo>
-                  <a:close/>
-                </a:path>
-              </a:pathLst>
-            </a:custGeom>
-            <a:grpFill/>
-            <a:ln>
-              <a:noFill/>
-            </a:ln>
-          </p:spPr>
-          <p:txBody>
-            <a:bodyPr/>
-            <a:lstStyle/>
-            <a:p>
-              <a:endParaRPr lang="en-US"/>
-            </a:p>
-          </p:txBody>
-        </p:sp>
-        <p:sp>
-          <p:nvSpPr>
-            <p:cNvPr id="23" name="Freeform 19">
-              <a:extLst>
-                <a:ext uri="{FF2B5EF4-FFF2-40B4-BE49-F238E27FC236}">
-                  <a16:creationId xmlns:a16="http://schemas.microsoft.com/office/drawing/2014/main" id="{ABF0A0E5-E68E-4183-A913-228692FD85EC}"/>
-                </a:ext>
-                <a:ext uri="{C183D7F6-B498-43B3-948B-1728B52AA6E4}">
-                  <adec:decorative xmlns:adec="http://schemas.microsoft.com/office/drawing/2017/decorative" val="1"/>
-                </a:ext>
-              </a:extLst>
-            </p:cNvPr>
-            <p:cNvSpPr/>
-            <p:nvPr>
-              <p:extLst>
-                <p:ext uri="{386F3935-93C4-4BCD-93E2-E3B085C9AB24}">
-                  <p16:designElem xmlns:p16="http://schemas.microsoft.com/office/powerpoint/2015/main" val="1"/>
-                </p:ext>
-              </p:extLst>
-            </p:nvPr>
-          </p:nvSpPr>
-          <p:spPr bwMode="auto">
-            <a:xfrm>
-              <a:off x="3148014" y="468286"/>
-              <a:ext cx="1768475" cy="4262464"/>
-            </a:xfrm>
-            <a:custGeom>
-              <a:avLst/>
-              <a:gdLst/>
-              <a:ahLst/>
-              <a:cxnLst/>
-              <a:rect l="0" t="0" r="r" b="b"/>
-              <a:pathLst>
-                <a:path w="450" h="878">
-                  <a:moveTo>
-                    <a:pt x="7" y="854"/>
-                  </a:moveTo>
-                  <a:cubicBezTo>
-                    <a:pt x="10" y="772"/>
-                    <a:pt x="26" y="691"/>
-                    <a:pt x="50" y="613"/>
-                  </a:cubicBezTo>
-                  <a:cubicBezTo>
-                    <a:pt x="75" y="535"/>
-                    <a:pt x="109" y="460"/>
-                    <a:pt x="149" y="388"/>
-                  </a:cubicBezTo>
-                  <a:cubicBezTo>
-                    <a:pt x="189" y="316"/>
-                    <a:pt x="235" y="248"/>
-                    <a:pt x="285" y="183"/>
-                  </a:cubicBezTo>
-                  <a:cubicBezTo>
-                    <a:pt x="310" y="151"/>
-                    <a:pt x="337" y="119"/>
-                    <a:pt x="364" y="89"/>
-                  </a:cubicBezTo>
-                  <a:cubicBezTo>
-                    <a:pt x="378" y="74"/>
-                    <a:pt x="392" y="58"/>
-                    <a:pt x="406" y="44"/>
-                  </a:cubicBezTo>
-                  <a:cubicBezTo>
-                    <a:pt x="421" y="29"/>
-                    <a:pt x="435" y="15"/>
-                    <a:pt x="450" y="1"/>
-                  </a:cubicBezTo>
-                  <a:cubicBezTo>
-                    <a:pt x="450" y="0"/>
-                    <a:pt x="450" y="0"/>
-                    <a:pt x="450" y="0"/>
-                  </a:cubicBezTo>
-                  <a:cubicBezTo>
-                    <a:pt x="434" y="14"/>
-                    <a:pt x="420" y="28"/>
-                    <a:pt x="405" y="43"/>
-                  </a:cubicBezTo>
-                  <a:cubicBezTo>
-                    <a:pt x="391" y="57"/>
-                    <a:pt x="377" y="72"/>
-                    <a:pt x="363" y="88"/>
-                  </a:cubicBezTo>
-                  <a:cubicBezTo>
-                    <a:pt x="335" y="118"/>
-                    <a:pt x="308" y="149"/>
-                    <a:pt x="283" y="181"/>
-                  </a:cubicBezTo>
-                  <a:cubicBezTo>
-                    <a:pt x="232" y="246"/>
-                    <a:pt x="185" y="314"/>
-                    <a:pt x="145" y="386"/>
-                  </a:cubicBezTo>
-                  <a:cubicBezTo>
-                    <a:pt x="104" y="457"/>
-                    <a:pt x="70" y="533"/>
-                    <a:pt x="45" y="611"/>
-                  </a:cubicBezTo>
-                  <a:cubicBezTo>
-                    <a:pt x="19" y="690"/>
-                    <a:pt x="3" y="771"/>
-                    <a:pt x="0" y="854"/>
-                  </a:cubicBezTo>
-                  <a:cubicBezTo>
-                    <a:pt x="0" y="856"/>
-                    <a:pt x="0" y="857"/>
-                    <a:pt x="0" y="859"/>
-                  </a:cubicBezTo>
-                  <a:cubicBezTo>
-                    <a:pt x="2" y="865"/>
-                    <a:pt x="4" y="872"/>
-                    <a:pt x="7" y="878"/>
-                  </a:cubicBezTo>
-                  <a:cubicBezTo>
-                    <a:pt x="7" y="870"/>
-                    <a:pt x="7" y="862"/>
-                    <a:pt x="7" y="854"/>
-                  </a:cubicBezTo>
-                  <a:close/>
-                </a:path>
-              </a:pathLst>
-            </a:custGeom>
-            <a:grpFill/>
-            <a:ln>
-              <a:noFill/>
-            </a:ln>
-          </p:spPr>
-          <p:txBody>
-            <a:bodyPr/>
-            <a:lstStyle/>
-            <a:p>
-              <a:endParaRPr lang="en-US"/>
-            </a:p>
-          </p:txBody>
-        </p:sp>
-        <p:sp>
-          <p:nvSpPr>
-            <p:cNvPr id="24" name="Freeform 20">
-              <a:extLst>
-                <a:ext uri="{FF2B5EF4-FFF2-40B4-BE49-F238E27FC236}">
-                  <a16:creationId xmlns:a16="http://schemas.microsoft.com/office/drawing/2014/main" id="{615D8F55-8ACD-4EFE-A832-06E785479EA5}"/>
-                </a:ext>
-                <a:ext uri="{C183D7F6-B498-43B3-948B-1728B52AA6E4}">
-                  <adec:decorative xmlns:adec="http://schemas.microsoft.com/office/drawing/2017/decorative" val="1"/>
-                </a:ext>
-              </a:extLst>
-            </p:cNvPr>
-            <p:cNvSpPr/>
-            <p:nvPr>
-              <p:extLst>
-                <p:ext uri="{386F3935-93C4-4BCD-93E2-E3B085C9AB24}">
-                  <p16:designElem xmlns:p16="http://schemas.microsoft.com/office/powerpoint/2015/main" val="1"/>
-                </p:ext>
-              </p:extLst>
-            </p:nvPr>
-          </p:nvSpPr>
-          <p:spPr bwMode="auto">
-            <a:xfrm>
-              <a:off x="3273426" y="5653088"/>
-              <a:ext cx="138113" cy="287338"/>
-            </a:xfrm>
-            <a:custGeom>
-              <a:avLst/>
-              <a:gdLst/>
-              <a:ahLst/>
-              <a:cxnLst/>
-              <a:rect l="0" t="0" r="r" b="b"/>
-              <a:pathLst>
-                <a:path w="35" h="73">
-                  <a:moveTo>
-                    <a:pt x="0" y="0"/>
-                  </a:moveTo>
-                  <a:cubicBezTo>
-                    <a:pt x="7" y="24"/>
-                    <a:pt x="16" y="49"/>
-                    <a:pt x="26" y="73"/>
-                  </a:cubicBezTo>
-                  <a:cubicBezTo>
-                    <a:pt x="35" y="73"/>
-                    <a:pt x="35" y="73"/>
-                    <a:pt x="35" y="73"/>
-                  </a:cubicBezTo>
-                  <a:cubicBezTo>
-                    <a:pt x="23" y="49"/>
-                    <a:pt x="11" y="24"/>
-                    <a:pt x="0" y="0"/>
-                  </a:cubicBezTo>
-                  <a:close/>
-                </a:path>
-              </a:pathLst>
-            </a:custGeom>
-            <a:grpFill/>
-            <a:ln>
-              <a:noFill/>
-            </a:ln>
-          </p:spPr>
-          <p:txBody>
-            <a:bodyPr/>
-            <a:lstStyle/>
-            <a:p>
-              <a:endParaRPr lang="en-US"/>
-            </a:p>
-          </p:txBody>
-        </p:sp>
-        <p:sp>
-          <p:nvSpPr>
-            <p:cNvPr id="25" name="Freeform 21">
-              <a:extLst>
-                <a:ext uri="{FF2B5EF4-FFF2-40B4-BE49-F238E27FC236}">
-                  <a16:creationId xmlns:a16="http://schemas.microsoft.com/office/drawing/2014/main" id="{0FDF4201-8CEC-474B-A6B1-88039B70416F}"/>
-                </a:ext>
-                <a:ext uri="{C183D7F6-B498-43B3-948B-1728B52AA6E4}">
-                  <adec:decorative xmlns:adec="http://schemas.microsoft.com/office/drawing/2017/decorative" val="1"/>
-                </a:ext>
-              </a:extLst>
-            </p:cNvPr>
-            <p:cNvSpPr/>
-            <p:nvPr>
-              <p:extLst>
-                <p:ext uri="{386F3935-93C4-4BCD-93E2-E3B085C9AB24}">
-                  <p16:designElem xmlns:p16="http://schemas.microsoft.com/office/powerpoint/2015/main" val="1"/>
-                </p:ext>
-              </p:extLst>
-            </p:nvPr>
-          </p:nvSpPr>
-          <p:spPr bwMode="auto">
-            <a:xfrm>
-              <a:off x="3143251" y="4656138"/>
-              <a:ext cx="31750" cy="188913"/>
-            </a:xfrm>
-            <a:custGeom>
-              <a:avLst/>
-              <a:gdLst/>
-              <a:ahLst/>
-              <a:cxnLst/>
-              <a:rect l="0" t="0" r="r" b="b"/>
-              <a:pathLst>
-                <a:path w="8" h="48">
-                  <a:moveTo>
-                    <a:pt x="7" y="44"/>
-                  </a:moveTo>
-                  <a:cubicBezTo>
-                    <a:pt x="7" y="46"/>
-                    <a:pt x="8" y="47"/>
-                    <a:pt x="8" y="48"/>
-                  </a:cubicBezTo>
-                  <a:cubicBezTo>
-                    <a:pt x="8" y="38"/>
-                    <a:pt x="8" y="29"/>
-                    <a:pt x="8" y="19"/>
-                  </a:cubicBezTo>
-                  <a:cubicBezTo>
-                    <a:pt x="5" y="13"/>
-                    <a:pt x="3" y="6"/>
-                    <a:pt x="1" y="0"/>
-                  </a:cubicBezTo>
-                  <a:cubicBezTo>
-                    <a:pt x="0" y="9"/>
-                    <a:pt x="0" y="17"/>
-                    <a:pt x="0" y="26"/>
-                  </a:cubicBezTo>
-                  <a:cubicBezTo>
-                    <a:pt x="2" y="32"/>
-                    <a:pt x="5" y="38"/>
-                    <a:pt x="7" y="44"/>
-                  </a:cubicBezTo>
-                  <a:close/>
-                </a:path>
-              </a:pathLst>
-            </a:custGeom>
-            <a:grpFill/>
-            <a:ln>
-              <a:noFill/>
-            </a:ln>
-          </p:spPr>
-          <p:txBody>
-            <a:bodyPr/>
-            <a:lstStyle/>
-            <a:p>
-              <a:endParaRPr lang="en-US"/>
-            </a:p>
-          </p:txBody>
-        </p:sp>
-        <p:sp>
-          <p:nvSpPr>
-            <p:cNvPr id="26" name="Freeform 22">
-              <a:extLst>
-                <a:ext uri="{FF2B5EF4-FFF2-40B4-BE49-F238E27FC236}">
-                  <a16:creationId xmlns:a16="http://schemas.microsoft.com/office/drawing/2014/main" id="{0F60AEA4-B25F-417E-93FC-59686DFBE56E}"/>
-                </a:ext>
-                <a:ext uri="{C183D7F6-B498-43B3-948B-1728B52AA6E4}">
-                  <adec:decorative xmlns:adec="http://schemas.microsoft.com/office/drawing/2017/decorative" val="1"/>
-                </a:ext>
-              </a:extLst>
-            </p:cNvPr>
-            <p:cNvSpPr/>
-            <p:nvPr>
-              <p:extLst>
-                <p:ext uri="{386F3935-93C4-4BCD-93E2-E3B085C9AB24}">
-                  <p16:designElem xmlns:p16="http://schemas.microsoft.com/office/powerpoint/2015/main" val="1"/>
-                </p:ext>
-              </p:extLst>
-            </p:nvPr>
-          </p:nvSpPr>
-          <p:spPr bwMode="auto">
-            <a:xfrm>
-              <a:off x="3211513" y="5410200"/>
-              <a:ext cx="203200" cy="530225"/>
-            </a:xfrm>
-            <a:custGeom>
-              <a:avLst/>
-              <a:gdLst/>
-              <a:ahLst/>
-              <a:cxnLst/>
-              <a:rect l="0" t="0" r="r" b="b"/>
-              <a:pathLst>
-                <a:path w="52" h="135">
-                  <a:moveTo>
-                    <a:pt x="7" y="18"/>
-                  </a:moveTo>
-                  <a:cubicBezTo>
-                    <a:pt x="5" y="12"/>
-                    <a:pt x="2" y="6"/>
-                    <a:pt x="0" y="0"/>
-                  </a:cubicBezTo>
-                  <a:cubicBezTo>
-                    <a:pt x="3" y="16"/>
-                    <a:pt x="7" y="32"/>
-                    <a:pt x="12" y="48"/>
-                  </a:cubicBezTo>
-                  <a:cubicBezTo>
-                    <a:pt x="13" y="53"/>
-                    <a:pt x="14" y="57"/>
-                    <a:pt x="16" y="62"/>
-                  </a:cubicBezTo>
-                  <a:cubicBezTo>
-                    <a:pt x="27" y="86"/>
-                    <a:pt x="39" y="111"/>
-                    <a:pt x="51" y="135"/>
-                  </a:cubicBezTo>
-                  <a:cubicBezTo>
-                    <a:pt x="52" y="135"/>
-                    <a:pt x="52" y="135"/>
-                    <a:pt x="52" y="135"/>
-                  </a:cubicBezTo>
-                  <a:cubicBezTo>
-                    <a:pt x="41" y="109"/>
-                    <a:pt x="32" y="83"/>
-                    <a:pt x="24" y="56"/>
-                  </a:cubicBezTo>
-                  <a:cubicBezTo>
-                    <a:pt x="18" y="43"/>
-                    <a:pt x="13" y="31"/>
-                    <a:pt x="7" y="18"/>
-                  </a:cubicBezTo>
-                  <a:close/>
-                </a:path>
-              </a:pathLst>
-            </a:custGeom>
-            <a:grpFill/>
-            <a:ln>
-              <a:noFill/>
-            </a:ln>
-          </p:spPr>
-          <p:txBody>
-            <a:bodyPr/>
-            <a:lstStyle/>
-            <a:p>
-              <a:endParaRPr lang="en-US"/>
-            </a:p>
-          </p:txBody>
-        </p:sp>
-      </p:grpSp>
-      <p:sp>
-        <p:nvSpPr>
-          <p:cNvPr id="3" name="Content Placeholder 2">
-            <a:extLst>
-              <a:ext uri="{FF2B5EF4-FFF2-40B4-BE49-F238E27FC236}">
-                <a16:creationId xmlns:a16="http://schemas.microsoft.com/office/drawing/2014/main" id="{FCE1C0F2-A047-C00C-83FE-EF103F9240A4}"/>
-              </a:ext>
-            </a:extLst>
-          </p:cNvPr>
-          <p:cNvSpPr>
-            <a:spLocks noGrp="1"/>
-          </p:cNvSpPr>
-          <p:nvPr>
-            <p:ph idx="1"/>
-          </p:nvPr>
-        </p:nvSpPr>
-        <p:spPr>
-          <a:xfrm>
-            <a:off x="3786796" y="942108"/>
-            <a:ext cx="4841662" cy="4969114"/>
-          </a:xfrm>
-        </p:spPr>
-        <p:txBody>
-          <a:bodyPr anchor="ctr">
-            <a:normAutofit/>
-          </a:bodyPr>
-          <a:lstStyle/>
-          <a:p>
-            <a:pPr marL="0" indent="0">
-              <a:lnSpc>
-                <a:spcPct val="90000"/>
-              </a:lnSpc>
-              <a:buNone/>
-            </a:pPr>
-            <a:r>
-              <a:rPr lang="en-US" sz="1100" dirty="0">
-                <a:solidFill>
-                  <a:schemeClr val="tx2">
-                    <a:lumMod val="75000"/>
-                  </a:schemeClr>
-                </a:solidFill>
-              </a:rPr>
-              <a:t>from </a:t>
-            </a:r>
-            <a:r>
-              <a:rPr lang="en-US" sz="1100" dirty="0" err="1">
-                <a:solidFill>
-                  <a:schemeClr val="tx2">
-                    <a:lumMod val="75000"/>
-                  </a:schemeClr>
-                </a:solidFill>
-              </a:rPr>
-              <a:t>fastapi</a:t>
-            </a:r>
-            <a:r>
-              <a:rPr lang="en-US" sz="1100" dirty="0">
-                <a:solidFill>
-                  <a:schemeClr val="tx2">
-                    <a:lumMod val="75000"/>
-                  </a:schemeClr>
-                </a:solidFill>
-              </a:rPr>
-              <a:t> import </a:t>
-            </a:r>
-            <a:r>
-              <a:rPr lang="en-US" sz="1100" dirty="0" err="1">
-                <a:solidFill>
-                  <a:schemeClr val="tx2">
-                    <a:lumMod val="75000"/>
-                  </a:schemeClr>
-                </a:solidFill>
-              </a:rPr>
-              <a:t>FastAPI</a:t>
-            </a:r>
-            <a:endParaRPr lang="en-US" sz="1100" dirty="0">
-              <a:solidFill>
-                <a:schemeClr val="tx2">
-                  <a:lumMod val="75000"/>
-                </a:schemeClr>
-              </a:solidFill>
-            </a:endParaRPr>
-          </a:p>
-          <a:p>
-            <a:pPr marL="0" indent="0">
-              <a:lnSpc>
-                <a:spcPct val="90000"/>
-              </a:lnSpc>
-              <a:buNone/>
-            </a:pPr>
-            <a:r>
-              <a:rPr lang="en-US" sz="1100" dirty="0">
-                <a:solidFill>
-                  <a:schemeClr val="tx2">
-                    <a:lumMod val="75000"/>
-                  </a:schemeClr>
-                </a:solidFill>
-              </a:rPr>
-              <a:t>from </a:t>
-            </a:r>
-            <a:r>
-              <a:rPr lang="en-US" sz="1100" dirty="0" err="1">
-                <a:solidFill>
-                  <a:schemeClr val="tx2">
-                    <a:lumMod val="75000"/>
-                  </a:schemeClr>
-                </a:solidFill>
-              </a:rPr>
-              <a:t>fastapi.responses</a:t>
-            </a:r>
-            <a:r>
-              <a:rPr lang="en-US" sz="1100" dirty="0">
-                <a:solidFill>
-                  <a:schemeClr val="tx2">
-                    <a:lumMod val="75000"/>
-                  </a:schemeClr>
-                </a:solidFill>
-              </a:rPr>
-              <a:t> import </a:t>
-            </a:r>
-            <a:r>
-              <a:rPr lang="en-US" sz="1100" dirty="0" err="1">
-                <a:solidFill>
-                  <a:schemeClr val="tx2">
-                    <a:lumMod val="75000"/>
-                  </a:schemeClr>
-                </a:solidFill>
-              </a:rPr>
-              <a:t>StreamingResponse</a:t>
-            </a:r>
-            <a:endParaRPr lang="en-US" sz="1100" dirty="0">
-              <a:solidFill>
-                <a:schemeClr val="tx2">
-                  <a:lumMod val="75000"/>
-                </a:schemeClr>
-              </a:solidFill>
-            </a:endParaRPr>
-          </a:p>
-          <a:p>
-            <a:pPr marL="0" indent="0">
-              <a:lnSpc>
-                <a:spcPct val="90000"/>
-              </a:lnSpc>
-              <a:buNone/>
-            </a:pPr>
-            <a:r>
-              <a:rPr lang="en-US" sz="1100" dirty="0">
-                <a:solidFill>
-                  <a:schemeClr val="tx2">
-                    <a:lumMod val="75000"/>
-                  </a:schemeClr>
-                </a:solidFill>
-              </a:rPr>
-              <a:t>import </a:t>
-            </a:r>
-            <a:r>
-              <a:rPr lang="en-US" sz="1100" dirty="0" err="1">
-                <a:solidFill>
-                  <a:schemeClr val="tx2">
-                    <a:lumMod val="75000"/>
-                  </a:schemeClr>
-                </a:solidFill>
-              </a:rPr>
-              <a:t>asyncio</a:t>
-            </a:r>
-            <a:r>
-              <a:rPr lang="en-US" sz="1100" dirty="0">
-                <a:solidFill>
-                  <a:schemeClr val="tx2">
-                    <a:lumMod val="75000"/>
-                  </a:schemeClr>
-                </a:solidFill>
-              </a:rPr>
-              <a:t>, </a:t>
-            </a:r>
-            <a:r>
-              <a:rPr lang="en-US" sz="1100" dirty="0" err="1">
-                <a:solidFill>
-                  <a:schemeClr val="tx2">
-                    <a:lumMod val="75000"/>
-                  </a:schemeClr>
-                </a:solidFill>
-              </a:rPr>
-              <a:t>aioredis</a:t>
-            </a:r>
-            <a:endParaRPr lang="en-US" sz="1100" dirty="0">
-              <a:solidFill>
-                <a:schemeClr val="tx2">
-                  <a:lumMod val="75000"/>
-                </a:schemeClr>
-              </a:solidFill>
-            </a:endParaRPr>
-          </a:p>
-          <a:p>
-            <a:pPr marL="0" indent="0">
-              <a:lnSpc>
-                <a:spcPct val="90000"/>
-              </a:lnSpc>
-              <a:buNone/>
-            </a:pPr>
-            <a:endParaRPr lang="en-US" sz="1100" dirty="0">
-              <a:solidFill>
-                <a:schemeClr val="tx2">
-                  <a:lumMod val="75000"/>
-                </a:schemeClr>
-              </a:solidFill>
-            </a:endParaRPr>
-          </a:p>
-          <a:p>
-            <a:pPr marL="0" indent="0">
-              <a:lnSpc>
-                <a:spcPct val="90000"/>
-              </a:lnSpc>
-              <a:buNone/>
-            </a:pPr>
-            <a:r>
-              <a:rPr lang="en-US" sz="1100" dirty="0">
-                <a:solidFill>
-                  <a:schemeClr val="tx2">
-                    <a:lumMod val="75000"/>
-                  </a:schemeClr>
-                </a:solidFill>
-              </a:rPr>
-              <a:t>app = </a:t>
-            </a:r>
-            <a:r>
-              <a:rPr lang="en-US" sz="1100" dirty="0" err="1">
-                <a:solidFill>
-                  <a:schemeClr val="tx2">
-                    <a:lumMod val="75000"/>
-                  </a:schemeClr>
-                </a:solidFill>
-              </a:rPr>
-              <a:t>FastAPI</a:t>
-            </a:r>
-            <a:r>
-              <a:rPr lang="en-US" sz="1100" dirty="0">
-                <a:solidFill>
-                  <a:schemeClr val="tx2">
-                    <a:lumMod val="75000"/>
-                  </a:schemeClr>
-                </a:solidFill>
-              </a:rPr>
-              <a:t>()</a:t>
-            </a:r>
-          </a:p>
-          <a:p>
-            <a:pPr marL="0" indent="0">
-              <a:lnSpc>
-                <a:spcPct val="90000"/>
-              </a:lnSpc>
-              <a:buNone/>
-            </a:pPr>
-            <a:r>
-              <a:rPr lang="en-US" sz="1100" dirty="0" err="1">
-                <a:solidFill>
-                  <a:schemeClr val="tx2">
-                    <a:lumMod val="75000"/>
-                  </a:schemeClr>
-                </a:solidFill>
-              </a:rPr>
-              <a:t>redis</a:t>
-            </a:r>
-            <a:r>
-              <a:rPr lang="en-US" sz="1100" dirty="0">
-                <a:solidFill>
-                  <a:schemeClr val="tx2">
-                    <a:lumMod val="75000"/>
-                  </a:schemeClr>
-                </a:solidFill>
-              </a:rPr>
-              <a:t> = </a:t>
-            </a:r>
-            <a:r>
-              <a:rPr lang="en-US" sz="1100" dirty="0" err="1">
-                <a:solidFill>
-                  <a:schemeClr val="tx2">
-                    <a:lumMod val="75000"/>
-                  </a:schemeClr>
-                </a:solidFill>
-              </a:rPr>
-              <a:t>aioredis.from_url</a:t>
-            </a:r>
-            <a:r>
-              <a:rPr lang="en-US" sz="1100" dirty="0">
-                <a:solidFill>
-                  <a:schemeClr val="tx2">
-                    <a:lumMod val="75000"/>
-                  </a:schemeClr>
-                </a:solidFill>
-              </a:rPr>
-              <a:t>("</a:t>
-            </a:r>
-            <a:r>
-              <a:rPr lang="en-US" sz="1100" dirty="0" err="1">
-                <a:solidFill>
-                  <a:schemeClr val="tx2">
-                    <a:lumMod val="75000"/>
-                  </a:schemeClr>
-                </a:solidFill>
-              </a:rPr>
-              <a:t>redis</a:t>
-            </a:r>
-            <a:r>
-              <a:rPr lang="en-US" sz="1100" dirty="0">
-                <a:solidFill>
-                  <a:schemeClr val="tx2">
-                    <a:lumMod val="75000"/>
-                  </a:schemeClr>
-                </a:solidFill>
-              </a:rPr>
-              <a:t>://localhost")</a:t>
-            </a:r>
-          </a:p>
-          <a:p>
-            <a:pPr marL="0" indent="0">
-              <a:lnSpc>
-                <a:spcPct val="90000"/>
-              </a:lnSpc>
-              <a:buNone/>
-            </a:pPr>
-            <a:endParaRPr lang="pl-PL" sz="1100" dirty="0">
-              <a:solidFill>
-                <a:schemeClr val="tx2">
-                  <a:lumMod val="75000"/>
-                </a:schemeClr>
-              </a:solidFill>
-            </a:endParaRPr>
-          </a:p>
-          <a:p>
-            <a:pPr marL="0" indent="0">
-              <a:lnSpc>
-                <a:spcPct val="90000"/>
-              </a:lnSpc>
-              <a:buNone/>
-            </a:pPr>
-            <a:r>
-              <a:rPr lang="en-US" sz="1100" dirty="0">
-                <a:solidFill>
-                  <a:schemeClr val="tx2">
-                    <a:lumMod val="75000"/>
-                  </a:schemeClr>
-                </a:solidFill>
-              </a:rPr>
-              <a:t>async def </a:t>
-            </a:r>
-            <a:r>
-              <a:rPr lang="en-US" sz="1100" dirty="0" err="1">
-                <a:solidFill>
-                  <a:schemeClr val="tx2">
-                    <a:lumMod val="75000"/>
-                  </a:schemeClr>
-                </a:solidFill>
-              </a:rPr>
-              <a:t>event_stream</a:t>
-            </a:r>
-            <a:r>
-              <a:rPr lang="en-US" sz="1100" dirty="0">
-                <a:solidFill>
-                  <a:schemeClr val="tx2">
-                    <a:lumMod val="75000"/>
-                  </a:schemeClr>
-                </a:solidFill>
-              </a:rPr>
-              <a:t>():</a:t>
-            </a:r>
-          </a:p>
-          <a:p>
-            <a:pPr marL="0" indent="0">
-              <a:lnSpc>
-                <a:spcPct val="90000"/>
-              </a:lnSpc>
-              <a:buNone/>
-            </a:pPr>
-            <a:r>
-              <a:rPr lang="en-US" sz="1100" dirty="0">
-                <a:solidFill>
-                  <a:schemeClr val="tx2">
-                    <a:lumMod val="75000"/>
-                  </a:schemeClr>
-                </a:solidFill>
-              </a:rPr>
-              <a:t>    </a:t>
-            </a:r>
-            <a:r>
-              <a:rPr lang="en-US" sz="1100" dirty="0" err="1">
-                <a:solidFill>
-                  <a:schemeClr val="tx2">
-                    <a:lumMod val="75000"/>
-                  </a:schemeClr>
-                </a:solidFill>
-              </a:rPr>
-              <a:t>pubsub</a:t>
-            </a:r>
-            <a:r>
-              <a:rPr lang="en-US" sz="1100" dirty="0">
-                <a:solidFill>
-                  <a:schemeClr val="tx2">
-                    <a:lumMod val="75000"/>
-                  </a:schemeClr>
-                </a:solidFill>
-              </a:rPr>
-              <a:t> = </a:t>
-            </a:r>
-            <a:r>
-              <a:rPr lang="en-US" sz="1100" dirty="0" err="1">
-                <a:solidFill>
-                  <a:schemeClr val="tx2">
-                    <a:lumMod val="75000"/>
-                  </a:schemeClr>
-                </a:solidFill>
-              </a:rPr>
-              <a:t>redis.pubsub</a:t>
-            </a:r>
-            <a:r>
-              <a:rPr lang="en-US" sz="1100" dirty="0">
-                <a:solidFill>
-                  <a:schemeClr val="tx2">
-                    <a:lumMod val="75000"/>
-                  </a:schemeClr>
-                </a:solidFill>
-              </a:rPr>
-              <a:t>()</a:t>
-            </a:r>
-          </a:p>
-          <a:p>
-            <a:pPr marL="0" indent="0">
-              <a:lnSpc>
-                <a:spcPct val="90000"/>
-              </a:lnSpc>
-              <a:buNone/>
-            </a:pPr>
-            <a:r>
-              <a:rPr lang="en-US" sz="1100" dirty="0">
-                <a:solidFill>
-                  <a:schemeClr val="tx2">
-                    <a:lumMod val="75000"/>
-                  </a:schemeClr>
-                </a:solidFill>
-              </a:rPr>
-              <a:t>    await </a:t>
-            </a:r>
-            <a:r>
-              <a:rPr lang="en-US" sz="1100" dirty="0" err="1">
-                <a:solidFill>
-                  <a:schemeClr val="tx2">
-                    <a:lumMod val="75000"/>
-                  </a:schemeClr>
-                </a:solidFill>
-              </a:rPr>
-              <a:t>pubsub.subscribe</a:t>
-            </a:r>
-            <a:r>
-              <a:rPr lang="en-US" sz="1100" dirty="0">
-                <a:solidFill>
-                  <a:schemeClr val="tx2">
-                    <a:lumMod val="75000"/>
-                  </a:schemeClr>
-                </a:solidFill>
-              </a:rPr>
-              <a:t>("events")</a:t>
-            </a:r>
-          </a:p>
-          <a:p>
-            <a:pPr marL="0" indent="0">
-              <a:lnSpc>
-                <a:spcPct val="90000"/>
-              </a:lnSpc>
-              <a:buNone/>
-            </a:pPr>
-            <a:r>
-              <a:rPr lang="en-US" sz="1100" dirty="0">
-                <a:solidFill>
-                  <a:schemeClr val="tx2">
-                    <a:lumMod val="75000"/>
-                  </a:schemeClr>
-                </a:solidFill>
-              </a:rPr>
-              <a:t>    async for msg in </a:t>
-            </a:r>
-            <a:r>
-              <a:rPr lang="en-US" sz="1100" dirty="0" err="1">
-                <a:solidFill>
-                  <a:schemeClr val="tx2">
-                    <a:lumMod val="75000"/>
-                  </a:schemeClr>
-                </a:solidFill>
-              </a:rPr>
-              <a:t>pubsub.listen</a:t>
-            </a:r>
-            <a:r>
-              <a:rPr lang="en-US" sz="1100" dirty="0">
-                <a:solidFill>
-                  <a:schemeClr val="tx2">
-                    <a:lumMod val="75000"/>
-                  </a:schemeClr>
-                </a:solidFill>
-              </a:rPr>
-              <a:t>():</a:t>
-            </a:r>
-          </a:p>
-          <a:p>
-            <a:pPr marL="0" indent="0">
-              <a:lnSpc>
-                <a:spcPct val="90000"/>
-              </a:lnSpc>
-              <a:buNone/>
-            </a:pPr>
-            <a:r>
-              <a:rPr lang="en-US" sz="1100" dirty="0">
-                <a:solidFill>
-                  <a:schemeClr val="tx2">
-                    <a:lumMod val="75000"/>
-                  </a:schemeClr>
-                </a:solidFill>
-              </a:rPr>
-              <a:t>        if msg["type"] == "message":</a:t>
-            </a:r>
-          </a:p>
-          <a:p>
-            <a:pPr marL="0" indent="0">
-              <a:lnSpc>
-                <a:spcPct val="90000"/>
-              </a:lnSpc>
-              <a:buNone/>
-            </a:pPr>
-            <a:r>
-              <a:rPr lang="en-US" sz="1100" dirty="0">
-                <a:solidFill>
-                  <a:schemeClr val="tx2">
-                    <a:lumMod val="75000"/>
-                  </a:schemeClr>
-                </a:solidFill>
-              </a:rPr>
-              <a:t>            yield </a:t>
-            </a:r>
-            <a:r>
-              <a:rPr lang="en-US" sz="1100" dirty="0" err="1">
-                <a:solidFill>
-                  <a:schemeClr val="tx2">
-                    <a:lumMod val="75000"/>
-                  </a:schemeClr>
-                </a:solidFill>
-              </a:rPr>
-              <a:t>f"data</a:t>
-            </a:r>
-            <a:r>
-              <a:rPr lang="en-US" sz="1100" dirty="0">
-                <a:solidFill>
-                  <a:schemeClr val="tx2">
-                    <a:lumMod val="75000"/>
-                  </a:schemeClr>
-                </a:solidFill>
-              </a:rPr>
-              <a:t>: {msg['data'].decode()}\n\n"</a:t>
-            </a:r>
-          </a:p>
-          <a:p>
-            <a:pPr marL="0" indent="0">
-              <a:lnSpc>
-                <a:spcPct val="90000"/>
-              </a:lnSpc>
-              <a:buNone/>
-            </a:pPr>
-            <a:endParaRPr lang="en-US" sz="1100" dirty="0">
-              <a:solidFill>
-                <a:schemeClr val="tx2">
-                  <a:lumMod val="75000"/>
-                </a:schemeClr>
-              </a:solidFill>
-            </a:endParaRPr>
-          </a:p>
-          <a:p>
-            <a:pPr marL="0" indent="0">
-              <a:lnSpc>
-                <a:spcPct val="90000"/>
-              </a:lnSpc>
-              <a:buNone/>
-            </a:pPr>
-            <a:r>
-              <a:rPr lang="en-US" sz="1100" dirty="0">
-                <a:solidFill>
-                  <a:schemeClr val="tx2">
-                    <a:lumMod val="75000"/>
-                  </a:schemeClr>
-                </a:solidFill>
-              </a:rPr>
-              <a:t>@app.get("/events")</a:t>
-            </a:r>
-          </a:p>
-          <a:p>
-            <a:pPr marL="0" indent="0">
-              <a:lnSpc>
-                <a:spcPct val="90000"/>
-              </a:lnSpc>
-              <a:buNone/>
-            </a:pPr>
-            <a:r>
-              <a:rPr lang="en-US" sz="1100" dirty="0">
-                <a:solidFill>
-                  <a:schemeClr val="tx2">
-                    <a:lumMod val="75000"/>
-                  </a:schemeClr>
-                </a:solidFill>
-              </a:rPr>
-              <a:t>async def events():</a:t>
-            </a:r>
-          </a:p>
-          <a:p>
-            <a:pPr marL="0" indent="0">
-              <a:lnSpc>
-                <a:spcPct val="90000"/>
-              </a:lnSpc>
-              <a:buNone/>
-            </a:pPr>
-            <a:r>
-              <a:rPr lang="en-US" sz="1100" dirty="0">
-                <a:solidFill>
-                  <a:schemeClr val="tx2">
-                    <a:lumMod val="75000"/>
-                  </a:schemeClr>
-                </a:solidFill>
-              </a:rPr>
-              <a:t>    return </a:t>
-            </a:r>
-            <a:r>
-              <a:rPr lang="en-US" sz="1100" dirty="0" err="1">
-                <a:solidFill>
-                  <a:schemeClr val="tx2">
-                    <a:lumMod val="75000"/>
-                  </a:schemeClr>
-                </a:solidFill>
-              </a:rPr>
-              <a:t>StreamingResponse</a:t>
-            </a:r>
-            <a:r>
-              <a:rPr lang="en-US" sz="1100" dirty="0">
-                <a:solidFill>
-                  <a:schemeClr val="tx2">
-                    <a:lumMod val="75000"/>
-                  </a:schemeClr>
-                </a:solidFill>
-              </a:rPr>
-              <a:t>(</a:t>
-            </a:r>
-            <a:r>
-              <a:rPr lang="en-US" sz="1100" dirty="0" err="1">
-                <a:solidFill>
-                  <a:schemeClr val="tx2">
-                    <a:lumMod val="75000"/>
-                  </a:schemeClr>
-                </a:solidFill>
-              </a:rPr>
-              <a:t>event_stream</a:t>
-            </a:r>
-            <a:r>
-              <a:rPr lang="en-US" sz="1100" dirty="0">
-                <a:solidFill>
-                  <a:schemeClr val="tx2">
-                    <a:lumMod val="75000"/>
-                  </a:schemeClr>
-                </a:solidFill>
-              </a:rPr>
-              <a:t>(), </a:t>
-            </a:r>
-            <a:r>
-              <a:rPr lang="en-US" sz="1100" dirty="0" err="1">
-                <a:solidFill>
-                  <a:schemeClr val="tx2">
-                    <a:lumMod val="75000"/>
-                  </a:schemeClr>
-                </a:solidFill>
-              </a:rPr>
-              <a:t>media_type</a:t>
-            </a:r>
-            <a:r>
-              <a:rPr lang="en-US" sz="1100" dirty="0">
-                <a:solidFill>
-                  <a:schemeClr val="tx2">
-                    <a:lumMod val="75000"/>
-                  </a:schemeClr>
-                </a:solidFill>
-              </a:rPr>
-              <a:t>="text/event-stream")</a:t>
-            </a:r>
-          </a:p>
-        </p:txBody>
-      </p:sp>
+      </p:pic>
     </p:spTree>
     <p:extLst>
       <p:ext uri="{BB962C8B-B14F-4D97-AF65-F5344CB8AC3E}">
@@ -20949,6 +19350,36 @@
           </a:p>
         </p:txBody>
       </p:sp>
+      <p:pic>
+        <p:nvPicPr>
+          <p:cNvPr id="6" name="Obraz 5">
+            <a:extLst>
+              <a:ext uri="{FF2B5EF4-FFF2-40B4-BE49-F238E27FC236}">
+                <a16:creationId xmlns:a16="http://schemas.microsoft.com/office/drawing/2014/main" id="{E1D20248-B1A1-93D7-B3FD-DB28CA379E25}"/>
+              </a:ext>
+            </a:extLst>
+          </p:cNvPr>
+          <p:cNvPicPr>
+            <a:picLocks noChangeAspect="1"/>
+          </p:cNvPicPr>
+          <p:nvPr/>
+        </p:nvPicPr>
+        <p:blipFill>
+          <a:blip r:embed="rId2"/>
+          <a:stretch>
+            <a:fillRect/>
+          </a:stretch>
+        </p:blipFill>
+        <p:spPr>
+          <a:xfrm>
+            <a:off x="6615953" y="336176"/>
+            <a:ext cx="1660712" cy="1660712"/>
+          </a:xfrm>
+          <a:prstGeom prst="rect">
+            <a:avLst/>
+          </a:prstGeom>
+        </p:spPr>
+      </p:pic>
       <p:sp>
         <p:nvSpPr>
           <p:cNvPr id="3" name="Content Placeholder 2">
@@ -21052,6 +19483,36 @@
           <a:chExt cx="0" cy="0"/>
         </a:xfrm>
       </p:grpSpPr>
+      <p:pic>
+        <p:nvPicPr>
+          <p:cNvPr id="6" name="Obraz 5">
+            <a:extLst>
+              <a:ext uri="{FF2B5EF4-FFF2-40B4-BE49-F238E27FC236}">
+                <a16:creationId xmlns:a16="http://schemas.microsoft.com/office/drawing/2014/main" id="{EB057AA6-F431-ACDB-9A5E-8D0FBDE1FFB6}"/>
+              </a:ext>
+            </a:extLst>
+          </p:cNvPr>
+          <p:cNvPicPr>
+            <a:picLocks noChangeAspect="1"/>
+          </p:cNvPicPr>
+          <p:nvPr/>
+        </p:nvPicPr>
+        <p:blipFill>
+          <a:blip r:embed="rId2"/>
+          <a:stretch>
+            <a:fillRect/>
+          </a:stretch>
+        </p:blipFill>
+        <p:spPr>
+          <a:xfrm flipH="1">
+            <a:off x="6192371" y="457199"/>
+            <a:ext cx="2017059" cy="2017059"/>
+          </a:xfrm>
+          <a:prstGeom prst="rect">
+            <a:avLst/>
+          </a:prstGeom>
+        </p:spPr>
+      </p:pic>
       <p:sp>
         <p:nvSpPr>
           <p:cNvPr id="2" name="Title 1">
@@ -21296,6 +19757,36 @@
           </a:p>
         </p:txBody>
       </p:sp>
+      <p:pic>
+        <p:nvPicPr>
+          <p:cNvPr id="6" name="Obraz 5">
+            <a:extLst>
+              <a:ext uri="{FF2B5EF4-FFF2-40B4-BE49-F238E27FC236}">
+                <a16:creationId xmlns:a16="http://schemas.microsoft.com/office/drawing/2014/main" id="{558380D0-BF19-2AEB-A64F-2E027B3CA576}"/>
+              </a:ext>
+            </a:extLst>
+          </p:cNvPr>
+          <p:cNvPicPr>
+            <a:picLocks noChangeAspect="1"/>
+          </p:cNvPicPr>
+          <p:nvPr/>
+        </p:nvPicPr>
+        <p:blipFill>
+          <a:blip r:embed="rId2"/>
+          <a:stretch>
+            <a:fillRect/>
+          </a:stretch>
+        </p:blipFill>
+        <p:spPr>
+          <a:xfrm flipH="1">
+            <a:off x="6192371" y="457199"/>
+            <a:ext cx="2017059" cy="2017059"/>
+          </a:xfrm>
+          <a:prstGeom prst="rect">
+            <a:avLst/>
+          </a:prstGeom>
+        </p:spPr>
+      </p:pic>
     </p:spTree>
     <p:extLst>
       <p:ext uri="{BB962C8B-B14F-4D97-AF65-F5344CB8AC3E}">
@@ -21332,6 +19823,36 @@
           <a:chExt cx="0" cy="0"/>
         </a:xfrm>
       </p:grpSpPr>
+      <p:pic>
+        <p:nvPicPr>
+          <p:cNvPr id="6" name="Obraz 5">
+            <a:extLst>
+              <a:ext uri="{FF2B5EF4-FFF2-40B4-BE49-F238E27FC236}">
+                <a16:creationId xmlns:a16="http://schemas.microsoft.com/office/drawing/2014/main" id="{F5B2A03A-CA46-13A6-3AB2-084B63723D82}"/>
+              </a:ext>
+            </a:extLst>
+          </p:cNvPr>
+          <p:cNvPicPr>
+            <a:picLocks noChangeAspect="1"/>
+          </p:cNvPicPr>
+          <p:nvPr/>
+        </p:nvPicPr>
+        <p:blipFill>
+          <a:blip r:embed="rId2"/>
+          <a:stretch>
+            <a:fillRect/>
+          </a:stretch>
+        </p:blipFill>
+        <p:spPr>
+          <a:xfrm>
+            <a:off x="6243917" y="316006"/>
+            <a:ext cx="2133600" cy="2133600"/>
+          </a:xfrm>
+          <a:prstGeom prst="rect">
+            <a:avLst/>
+          </a:prstGeom>
+        </p:spPr>
+      </p:pic>
       <p:sp>
         <p:nvSpPr>
           <p:cNvPr id="2" name="Title 1">
@@ -21686,45 +20207,8 @@
                   </a:schemeClr>
                 </a:solidFill>
               </a:rPr>
-              <a:t> + </a:t>
-            </a:r>
-            <a:r>
-              <a:rPr lang="pl-PL" sz="2000" dirty="0" err="1">
-                <a:solidFill>
-                  <a:schemeClr val="tx2">
-                    <a:lumMod val="75000"/>
-                  </a:schemeClr>
-                </a:solidFill>
-              </a:rPr>
-              <a:t>Redis</a:t>
-            </a:r>
-            <a:r>
-              <a:rPr lang="pl-PL" sz="2000" dirty="0">
-                <a:solidFill>
-                  <a:schemeClr val="tx2">
-                    <a:lumMod val="75000"/>
-                  </a:schemeClr>
-                </a:solidFill>
-              </a:rPr>
-              <a:t> </a:t>
-            </a:r>
-            <a:r>
-              <a:rPr lang="pl-PL" sz="2000" dirty="0" err="1">
-                <a:solidFill>
-                  <a:schemeClr val="tx2">
-                    <a:lumMod val="75000"/>
-                  </a:schemeClr>
-                </a:solidFill>
-              </a:rPr>
-              <a:t>Streams</a:t>
-            </a:r>
-            <a:endParaRPr lang="pl-PL" sz="2000" dirty="0">
-              <a:solidFill>
-                <a:schemeClr val="tx2">
-                  <a:lumMod val="75000"/>
-                </a:schemeClr>
-              </a:solidFill>
-            </a:endParaRPr>
+              <a:t> + SSE</a:t>
+            </a:r>
           </a:p>
           <a:p>
             <a:pPr marL="457200" indent="-457200">
@@ -21757,7 +20241,7 @@
                   </a:schemeClr>
                 </a:solidFill>
               </a:rPr>
-              <a:t>Przykładowe zastosowania</a:t>
+              <a:t>Przykładowe zastosowania SSE</a:t>
             </a:r>
           </a:p>
           <a:p>
@@ -21774,11 +20258,43 @@
                   </a:schemeClr>
                 </a:solidFill>
               </a:rPr>
-              <a:t>Podsumowanie + Q&amp;A</a:t>
+              <a:t>Podsumowanie</a:t>
             </a:r>
           </a:p>
         </p:txBody>
       </p:sp>
+      <p:pic>
+        <p:nvPicPr>
+          <p:cNvPr id="4" name="Obraz 3">
+            <a:extLst>
+              <a:ext uri="{FF2B5EF4-FFF2-40B4-BE49-F238E27FC236}">
+                <a16:creationId xmlns:a16="http://schemas.microsoft.com/office/drawing/2014/main" id="{912F9C6C-19D1-B6A5-57F8-E1737F6CCA0C}"/>
+              </a:ext>
+            </a:extLst>
+          </p:cNvPr>
+          <p:cNvPicPr>
+            <a:picLocks noChangeAspect="1"/>
+          </p:cNvPicPr>
+          <p:nvPr/>
+        </p:nvPicPr>
+        <p:blipFill>
+          <a:blip r:embed="rId2">
+            <a:alphaModFix amt="11000"/>
+          </a:blip>
+          <a:stretch>
+            <a:fillRect/>
+          </a:stretch>
+        </p:blipFill>
+        <p:spPr>
+          <a:xfrm flipH="1">
+            <a:off x="6293223" y="352740"/>
+            <a:ext cx="2192753" cy="2192753"/>
+          </a:xfrm>
+          <a:prstGeom prst="rect">
+            <a:avLst/>
+          </a:prstGeom>
+        </p:spPr>
+      </p:pic>
     </p:spTree>
   </p:cSld>
   <p:clrMapOvr>
@@ -21810,6 +20326,36 @@
           <a:chExt cx="0" cy="0"/>
         </a:xfrm>
       </p:grpSpPr>
+      <p:pic>
+        <p:nvPicPr>
+          <p:cNvPr id="6" name="Obraz 5">
+            <a:extLst>
+              <a:ext uri="{FF2B5EF4-FFF2-40B4-BE49-F238E27FC236}">
+                <a16:creationId xmlns:a16="http://schemas.microsoft.com/office/drawing/2014/main" id="{9A92C1DD-84BC-E88F-B9FF-4C1190F6B402}"/>
+              </a:ext>
+            </a:extLst>
+          </p:cNvPr>
+          <p:cNvPicPr>
+            <a:picLocks noChangeAspect="1"/>
+          </p:cNvPicPr>
+          <p:nvPr/>
+        </p:nvPicPr>
+        <p:blipFill>
+          <a:blip r:embed="rId2"/>
+          <a:stretch>
+            <a:fillRect/>
+          </a:stretch>
+        </p:blipFill>
+        <p:spPr>
+          <a:xfrm>
+            <a:off x="6239434" y="329453"/>
+            <a:ext cx="2017059" cy="2017059"/>
+          </a:xfrm>
+          <a:prstGeom prst="rect">
+            <a:avLst/>
+          </a:prstGeom>
+        </p:spPr>
+      </p:pic>
       <p:sp>
         <p:nvSpPr>
           <p:cNvPr id="2" name="Title 1">
@@ -21963,6 +20509,36 @@
           <a:chExt cx="0" cy="0"/>
         </a:xfrm>
       </p:grpSpPr>
+      <p:pic>
+        <p:nvPicPr>
+          <p:cNvPr id="12" name="Obraz 11">
+            <a:extLst>
+              <a:ext uri="{FF2B5EF4-FFF2-40B4-BE49-F238E27FC236}">
+                <a16:creationId xmlns:a16="http://schemas.microsoft.com/office/drawing/2014/main" id="{F30D248F-21A3-9B19-A457-90879C29BD77}"/>
+              </a:ext>
+            </a:extLst>
+          </p:cNvPr>
+          <p:cNvPicPr>
+            <a:picLocks noChangeAspect="1"/>
+          </p:cNvPicPr>
+          <p:nvPr/>
+        </p:nvPicPr>
+        <p:blipFill>
+          <a:blip r:embed="rId2"/>
+          <a:stretch>
+            <a:fillRect/>
+          </a:stretch>
+        </p:blipFill>
+        <p:spPr>
+          <a:xfrm>
+            <a:off x="5951584" y="389965"/>
+            <a:ext cx="2494429" cy="2494429"/>
+          </a:xfrm>
+          <a:prstGeom prst="rect">
+            <a:avLst/>
+          </a:prstGeom>
+        </p:spPr>
+      </p:pic>
       <p:sp>
         <p:nvSpPr>
           <p:cNvPr id="2" name="Title 1">
@@ -22175,8 +20751,16 @@
           <a:lstStyle/>
           <a:p>
             <a:r>
-              <a:rPr lang="en-US" sz="2300"/>
-              <a:t>Zastosowania SSE</a:t>
+              <a:rPr lang="pl-PL" sz="2300" dirty="0"/>
+              <a:t>Przykładowe z</a:t>
+            </a:r>
+            <a:r>
+              <a:rPr lang="en-US" sz="2300" dirty="0" err="1"/>
+              <a:t>astosowania</a:t>
+            </a:r>
+            <a:r>
+              <a:rPr lang="en-US" sz="2300" dirty="0"/>
+              <a:t> SSE</a:t>
             </a:r>
           </a:p>
         </p:txBody>
@@ -22239,6 +20823,34 @@
               <a:rPr lang="en-US" dirty="0"/>
               <a:t>Change Data Capture)</a:t>
             </a:r>
+            <a:endParaRPr lang="pl-PL" dirty="0"/>
+          </a:p>
+          <a:p>
+            <a:r>
+              <a:rPr lang="pl-PL" dirty="0"/>
+              <a:t>Użycie razem z </a:t>
+            </a:r>
+            <a:r>
+              <a:rPr lang="pl-PL" dirty="0" err="1"/>
+              <a:t>Conflict-free</a:t>
+            </a:r>
+            <a:r>
+              <a:rPr lang="pl-PL" dirty="0"/>
+              <a:t> </a:t>
+            </a:r>
+            <a:r>
+              <a:rPr lang="pl-PL" dirty="0" err="1"/>
+              <a:t>Replicated</a:t>
+            </a:r>
+            <a:r>
+              <a:rPr lang="pl-PL" dirty="0"/>
+              <a:t> Data </a:t>
+            </a:r>
+            <a:r>
+              <a:rPr lang="pl-PL" dirty="0" err="1"/>
+              <a:t>Types</a:t>
+            </a:r>
+            <a:endParaRPr lang="en-US" dirty="0"/>
           </a:p>
           <a:p>
             <a:r>
@@ -22260,6 +20872,38 @@
           </a:p>
         </p:txBody>
       </p:sp>
+      <p:pic>
+        <p:nvPicPr>
+          <p:cNvPr id="4" name="Obraz 3">
+            <a:extLst>
+              <a:ext uri="{FF2B5EF4-FFF2-40B4-BE49-F238E27FC236}">
+                <a16:creationId xmlns:a16="http://schemas.microsoft.com/office/drawing/2014/main" id="{91B75F6D-F04C-FB9E-2BF9-5507E7EE631C}"/>
+              </a:ext>
+            </a:extLst>
+          </p:cNvPr>
+          <p:cNvPicPr>
+            <a:picLocks noChangeAspect="1"/>
+          </p:cNvPicPr>
+          <p:nvPr/>
+        </p:nvPicPr>
+        <p:blipFill>
+          <a:blip r:embed="rId2">
+            <a:alphaModFix amt="11000"/>
+          </a:blip>
+          <a:stretch>
+            <a:fillRect/>
+          </a:stretch>
+        </p:blipFill>
+        <p:spPr>
+          <a:xfrm flipH="1">
+            <a:off x="6293223" y="352740"/>
+            <a:ext cx="2192753" cy="2192753"/>
+          </a:xfrm>
+          <a:prstGeom prst="rect">
+            <a:avLst/>
+          </a:prstGeom>
+        </p:spPr>
+      </p:pic>
     </p:spTree>
     <p:extLst>
       <p:ext uri="{BB962C8B-B14F-4D97-AF65-F5344CB8AC3E}">
@@ -22290,6 +20934,66 @@
           <a:chExt cx="0" cy="0"/>
         </a:xfrm>
       </p:grpSpPr>
+      <p:pic>
+        <p:nvPicPr>
+          <p:cNvPr id="8" name="Obraz 7">
+            <a:extLst>
+              <a:ext uri="{FF2B5EF4-FFF2-40B4-BE49-F238E27FC236}">
+                <a16:creationId xmlns:a16="http://schemas.microsoft.com/office/drawing/2014/main" id="{B6F7D07D-164D-66CC-A445-3F9C47734311}"/>
+              </a:ext>
+            </a:extLst>
+          </p:cNvPr>
+          <p:cNvPicPr>
+            <a:picLocks noChangeAspect="1"/>
+          </p:cNvPicPr>
+          <p:nvPr/>
+        </p:nvPicPr>
+        <p:blipFill>
+          <a:blip r:embed="rId2"/>
+          <a:stretch>
+            <a:fillRect/>
+          </a:stretch>
+        </p:blipFill>
+        <p:spPr>
+          <a:xfrm>
+            <a:off x="4097990" y="485775"/>
+            <a:ext cx="1939738" cy="1939738"/>
+          </a:xfrm>
+          <a:prstGeom prst="rect">
+            <a:avLst/>
+          </a:prstGeom>
+        </p:spPr>
+      </p:pic>
+      <p:pic>
+        <p:nvPicPr>
+          <p:cNvPr id="6" name="Obraz 5">
+            <a:extLst>
+              <a:ext uri="{FF2B5EF4-FFF2-40B4-BE49-F238E27FC236}">
+                <a16:creationId xmlns:a16="http://schemas.microsoft.com/office/drawing/2014/main" id="{1F923A00-CDB0-1BB1-8CD6-1ACA65972A1C}"/>
+              </a:ext>
+            </a:extLst>
+          </p:cNvPr>
+          <p:cNvPicPr>
+            <a:picLocks noChangeAspect="1"/>
+          </p:cNvPicPr>
+          <p:nvPr/>
+        </p:nvPicPr>
+        <p:blipFill>
+          <a:blip r:embed="rId2"/>
+          <a:stretch>
+            <a:fillRect/>
+          </a:stretch>
+        </p:blipFill>
+        <p:spPr>
+          <a:xfrm>
+            <a:off x="6476439" y="47066"/>
+            <a:ext cx="2378448" cy="2378448"/>
+          </a:xfrm>
+          <a:prstGeom prst="rect">
+            <a:avLst/>
+          </a:prstGeom>
+        </p:spPr>
+      </p:pic>
       <p:sp>
         <p:nvSpPr>
           <p:cNvPr id="2" name="Title 1">
@@ -22311,26 +21015,6 @@
           <a:bodyPr/>
           <a:lstStyle/>
           <a:p>
-            <a:r>
-              <a:rPr lang="en-US" dirty="0" err="1"/>
-              <a:t>Podsumowanie</a:t>
-            </a:r>
-            <a:r>
-              <a:rPr lang="en-US" dirty="0"/>
-              <a:t> </a:t>
-            </a:r>
-            <a:r>
-              <a:rPr lang="en-US" dirty="0" err="1"/>
-              <a:t>i</a:t>
-            </a:r>
-            <a:r>
-              <a:rPr lang="en-US" dirty="0"/>
-              <a:t> </a:t>
-            </a:r>
-            <a:r>
-              <a:rPr lang="en-US" dirty="0" err="1"/>
-              <a:t>pytania</a:t>
-            </a:r>
             <a:endParaRPr lang="en-US" dirty="0"/>
           </a:p>
         </p:txBody>
@@ -22353,8 +21037,8 @@
         </p:nvSpPr>
         <p:spPr>
           <a:xfrm>
-            <a:off x="722377" y="2133600"/>
-            <a:ext cx="7812024" cy="3777622"/>
+            <a:off x="722377" y="624110"/>
+            <a:ext cx="7812024" cy="5287112"/>
           </a:xfrm>
         </p:spPr>
         <p:txBody>
@@ -22368,12 +21052,42 @@
             </a:pPr>
             <a:r>
               <a:rPr lang="pl-PL" sz="8800" dirty="0"/>
-              <a:t>?</a:t>
+              <a:t>Q&amp;A…</a:t>
             </a:r>
             <a:endParaRPr lang="en-US" sz="8800" dirty="0"/>
           </a:p>
         </p:txBody>
       </p:sp>
+      <p:pic>
+        <p:nvPicPr>
+          <p:cNvPr id="7" name="Obraz 6">
+            <a:extLst>
+              <a:ext uri="{FF2B5EF4-FFF2-40B4-BE49-F238E27FC236}">
+                <a16:creationId xmlns:a16="http://schemas.microsoft.com/office/drawing/2014/main" id="{CEDE9230-804C-CFA7-8FAB-B96EC8D73BD8}"/>
+              </a:ext>
+            </a:extLst>
+          </p:cNvPr>
+          <p:cNvPicPr>
+            <a:picLocks noChangeAspect="1"/>
+          </p:cNvPicPr>
+          <p:nvPr/>
+        </p:nvPicPr>
+        <p:blipFill>
+          <a:blip r:embed="rId2"/>
+          <a:stretch>
+            <a:fillRect/>
+          </a:stretch>
+        </p:blipFill>
+        <p:spPr>
+          <a:xfrm>
+            <a:off x="6594662" y="2369824"/>
+            <a:ext cx="1939738" cy="1939738"/>
+          </a:xfrm>
+          <a:prstGeom prst="rect">
+            <a:avLst/>
+          </a:prstGeom>
+        </p:spPr>
+      </p:pic>
     </p:spTree>
     <p:extLst>
       <p:ext uri="{BB962C8B-B14F-4D97-AF65-F5344CB8AC3E}">
@@ -22452,6 +21166,38 @@
           </a:p>
         </p:txBody>
       </p:sp>
+      <p:pic>
+        <p:nvPicPr>
+          <p:cNvPr id="2" name="Obraz 1">
+            <a:extLst>
+              <a:ext uri="{FF2B5EF4-FFF2-40B4-BE49-F238E27FC236}">
+                <a16:creationId xmlns:a16="http://schemas.microsoft.com/office/drawing/2014/main" id="{1EFC5476-D63B-5FC1-3C15-7260EE99F45B}"/>
+              </a:ext>
+            </a:extLst>
+          </p:cNvPr>
+          <p:cNvPicPr>
+            <a:picLocks noChangeAspect="1"/>
+          </p:cNvPicPr>
+          <p:nvPr/>
+        </p:nvPicPr>
+        <p:blipFill>
+          <a:blip r:embed="rId2">
+            <a:alphaModFix amt="11000"/>
+          </a:blip>
+          <a:stretch>
+            <a:fillRect/>
+          </a:stretch>
+        </p:blipFill>
+        <p:spPr>
+          <a:xfrm flipH="1">
+            <a:off x="6293223" y="352740"/>
+            <a:ext cx="2192753" cy="2192753"/>
+          </a:xfrm>
+          <a:prstGeom prst="rect">
+            <a:avLst/>
+          </a:prstGeom>
+        </p:spPr>
+      </p:pic>
     </p:spTree>
     <p:extLst>
       <p:ext uri="{BB962C8B-B14F-4D97-AF65-F5344CB8AC3E}">
@@ -22496,6 +21242,36 @@
           <a:chExt cx="0" cy="0"/>
         </a:xfrm>
       </p:grpSpPr>
+      <p:pic>
+        <p:nvPicPr>
+          <p:cNvPr id="6" name="Obraz 5">
+            <a:extLst>
+              <a:ext uri="{FF2B5EF4-FFF2-40B4-BE49-F238E27FC236}">
+                <a16:creationId xmlns:a16="http://schemas.microsoft.com/office/drawing/2014/main" id="{A334636B-BCA8-CC22-D06C-71C9BC1C21C1}"/>
+              </a:ext>
+            </a:extLst>
+          </p:cNvPr>
+          <p:cNvPicPr>
+            <a:picLocks noChangeAspect="1"/>
+          </p:cNvPicPr>
+          <p:nvPr/>
+        </p:nvPicPr>
+        <p:blipFill>
+          <a:blip r:embed="rId2"/>
+          <a:stretch>
+            <a:fillRect/>
+          </a:stretch>
+        </p:blipFill>
+        <p:spPr>
+          <a:xfrm>
+            <a:off x="5667935" y="275665"/>
+            <a:ext cx="2554941" cy="2554941"/>
+          </a:xfrm>
+          <a:prstGeom prst="rect">
+            <a:avLst/>
+          </a:prstGeom>
+        </p:spPr>
+      </p:pic>
       <p:sp>
         <p:nvSpPr>
           <p:cNvPr id="2" name="Title 1">
@@ -22515,7 +21291,7 @@
         <p:spPr>
           <a:xfrm>
             <a:off x="784514" y="942108"/>
-            <a:ext cx="2442412" cy="4969113"/>
+            <a:ext cx="2644486" cy="4969113"/>
           </a:xfrm>
         </p:spPr>
         <p:txBody>
@@ -22525,17 +21301,57 @@
           <a:lstStyle/>
           <a:p>
             <a:r>
-              <a:rPr lang="en-US" sz="2800">
+              <a:rPr lang="en-US" sz="2800" dirty="0" err="1">
                 <a:solidFill>
                   <a:schemeClr val="tx2">
                     <a:lumMod val="75000"/>
                   </a:schemeClr>
                 </a:solidFill>
               </a:rPr>
-              <a:t>Komunikacja w aplikacjach web</a:t>
+              <a:t>Komunikacja</a:t>
+            </a:r>
+            <a:r>
+              <a:rPr lang="en-US" sz="2800" dirty="0">
+                <a:solidFill>
+                  <a:schemeClr val="tx2">
+                    <a:lumMod val="75000"/>
+                  </a:schemeClr>
+                </a:solidFill>
+              </a:rPr>
+              <a:t> w </a:t>
+            </a:r>
+            <a:r>
+              <a:rPr lang="pl-PL" sz="2800" dirty="0">
+                <a:solidFill>
+                  <a:schemeClr val="tx2">
+                    <a:lumMod val="75000"/>
+                  </a:schemeClr>
+                </a:solidFill>
+              </a:rPr>
+              <a:t>a</a:t>
+            </a:r>
+            <a:r>
+              <a:rPr lang="en-US" sz="2800" dirty="0" err="1">
+                <a:solidFill>
+                  <a:schemeClr val="tx2">
+                    <a:lumMod val="75000"/>
+                  </a:schemeClr>
+                </a:solidFill>
+              </a:rPr>
+              <a:t>plikacjach</a:t>
+            </a:r>
+            <a:r>
+              <a:rPr lang="en-US" sz="2800" dirty="0">
+                <a:solidFill>
+                  <a:schemeClr val="tx2">
+                    <a:lumMod val="75000"/>
+                  </a:schemeClr>
+                </a:solidFill>
+              </a:rPr>
+              <a:t> web</a:t>
             </a:r>
             <a:br>
-              <a:rPr lang="en-US" sz="2800">
+              <a:rPr lang="en-US" sz="2800" dirty="0">
                 <a:solidFill>
                   <a:schemeClr val="tx2">
                     <a:lumMod val="75000"/>
@@ -22543,7 +21359,7 @@
                 </a:solidFill>
               </a:rPr>
             </a:br>
-            <a:endParaRPr lang="en-US" sz="2800">
+            <a:endParaRPr lang="en-US" sz="2800" dirty="0">
               <a:solidFill>
                 <a:schemeClr val="tx2">
                   <a:lumMod val="75000"/>
@@ -22791,9 +21607,10 @@
           <a:lstStyle/>
           <a:p>
             <a:r>
-              <a:rPr lang="en-US" dirty="0"/>
+              <a:rPr lang="en-US"/>
               <a:t>HTTP request-response</a:t>
             </a:r>
+            <a:endParaRPr lang="en-US" dirty="0"/>
           </a:p>
         </p:txBody>
       </p:sp>
@@ -22813,7 +21630,7 @@
             <p:ph idx="1"/>
             <p:extLst>
               <p:ext uri="{D42A27DB-BD31-4B8C-83A1-F6EECF244321}">
-                <p14:modId xmlns:p14="http://schemas.microsoft.com/office/powerpoint/2010/main" val="1339354482"/>
+                <p14:modId xmlns:p14="http://schemas.microsoft.com/office/powerpoint/2010/main" val="3503907116"/>
               </p:ext>
             </p:extLst>
           </p:nvPr>
@@ -22828,6 +21645,36 @@
           </a:graphicData>
         </a:graphic>
       </p:graphicFrame>
+      <p:pic>
+        <p:nvPicPr>
+          <p:cNvPr id="6" name="Obraz 5">
+            <a:extLst>
+              <a:ext uri="{FF2B5EF4-FFF2-40B4-BE49-F238E27FC236}">
+                <a16:creationId xmlns:a16="http://schemas.microsoft.com/office/drawing/2014/main" id="{F68780C1-46D9-0C55-E6C3-4D48A988B0C2}"/>
+              </a:ext>
+            </a:extLst>
+          </p:cNvPr>
+          <p:cNvPicPr>
+            <a:picLocks noChangeAspect="1"/>
+          </p:cNvPicPr>
+          <p:nvPr/>
+        </p:nvPicPr>
+        <p:blipFill>
+          <a:blip r:embed="rId7"/>
+          <a:stretch>
+            <a:fillRect/>
+          </a:stretch>
+        </p:blipFill>
+        <p:spPr>
+          <a:xfrm>
+            <a:off x="5721723" y="228600"/>
+            <a:ext cx="2662518" cy="2662518"/>
+          </a:xfrm>
+          <a:prstGeom prst="rect">
+            <a:avLst/>
+          </a:prstGeom>
+        </p:spPr>
+      </p:pic>
     </p:spTree>
     <p:extLst>
       <p:ext uri="{BB962C8B-B14F-4D97-AF65-F5344CB8AC3E}">
@@ -22864,6 +21711,36 @@
           <a:chExt cx="0" cy="0"/>
         </a:xfrm>
       </p:grpSpPr>
+      <p:pic>
+        <p:nvPicPr>
+          <p:cNvPr id="8" name="Obraz 7">
+            <a:extLst>
+              <a:ext uri="{FF2B5EF4-FFF2-40B4-BE49-F238E27FC236}">
+                <a16:creationId xmlns:a16="http://schemas.microsoft.com/office/drawing/2014/main" id="{96974605-8C58-5003-B731-AF702FF891E8}"/>
+              </a:ext>
+            </a:extLst>
+          </p:cNvPr>
+          <p:cNvPicPr>
+            <a:picLocks noChangeAspect="1"/>
+          </p:cNvPicPr>
+          <p:nvPr/>
+        </p:nvPicPr>
+        <p:blipFill>
+          <a:blip r:embed="rId2"/>
+          <a:stretch>
+            <a:fillRect/>
+          </a:stretch>
+        </p:blipFill>
+        <p:spPr>
+          <a:xfrm>
+            <a:off x="6118410" y="289112"/>
+            <a:ext cx="2528047" cy="2528047"/>
+          </a:xfrm>
+          <a:prstGeom prst="rect">
+            <a:avLst/>
+          </a:prstGeom>
+        </p:spPr>
+      </p:pic>
       <p:sp>
         <p:nvSpPr>
           <p:cNvPr id="2" name="Title 1">
@@ -23290,9 +22167,60 @@
               <a:rPr lang="en-US" dirty="0"/>
               <a:t>).</a:t>
             </a:r>
+            <a:endParaRPr lang="pl-PL" dirty="0"/>
+          </a:p>
+          <a:p>
+            <a:pPr>
+              <a:lnSpc>
+                <a:spcPct val="90000"/>
+              </a:lnSpc>
+            </a:pPr>
+            <a:r>
+              <a:rPr lang="pl-PL" dirty="0"/>
+              <a:t>Problemy z </a:t>
+            </a:r>
+            <a:r>
+              <a:rPr lang="pl-PL" dirty="0" err="1"/>
+              <a:t>timeoutami</a:t>
+            </a:r>
+            <a:r>
+              <a:rPr lang="pl-PL" dirty="0"/>
+              <a:t>.</a:t>
+            </a:r>
+            <a:endParaRPr lang="en-US" dirty="0"/>
           </a:p>
         </p:txBody>
       </p:sp>
+      <p:pic>
+        <p:nvPicPr>
+          <p:cNvPr id="6" name="Obraz 5">
+            <a:extLst>
+              <a:ext uri="{FF2B5EF4-FFF2-40B4-BE49-F238E27FC236}">
+                <a16:creationId xmlns:a16="http://schemas.microsoft.com/office/drawing/2014/main" id="{D85538E6-205F-A21F-8E36-D80927D2C77E}"/>
+              </a:ext>
+            </a:extLst>
+          </p:cNvPr>
+          <p:cNvPicPr>
+            <a:picLocks noChangeAspect="1"/>
+          </p:cNvPicPr>
+          <p:nvPr/>
+        </p:nvPicPr>
+        <p:blipFill>
+          <a:blip r:embed="rId2"/>
+          <a:stretch>
+            <a:fillRect/>
+          </a:stretch>
+        </p:blipFill>
+        <p:spPr>
+          <a:xfrm>
+            <a:off x="6533029" y="312055"/>
+            <a:ext cx="1905000" cy="1905000"/>
+          </a:xfrm>
+          <a:prstGeom prst="rect">
+            <a:avLst/>
+          </a:prstGeom>
+        </p:spPr>
+      </p:pic>
     </p:spTree>
     <p:extLst>
       <p:ext uri="{BB962C8B-B14F-4D97-AF65-F5344CB8AC3E}">
@@ -23380,7 +22308,12 @@
             <p:ph idx="1"/>
           </p:nvPr>
         </p:nvSpPr>
-        <p:spPr/>
+        <p:spPr>
+          <a:xfrm>
+            <a:off x="1942415" y="1835524"/>
+            <a:ext cx="6591985" cy="4075698"/>
+          </a:xfrm>
+        </p:spPr>
         <p:txBody>
           <a:bodyPr>
             <a:normAutofit/>
@@ -23437,7 +22370,23 @@
             </a:pPr>
             <a:r>
               <a:rPr lang="pl-PL" dirty="0"/>
-              <a:t>Dodatkowa konfiguracja na serwerze</a:t>
+              <a:t>Dodatkowa konfiguracja na serwerze (np. nagłówki dla </a:t>
+            </a:r>
+            <a:r>
+              <a:rPr lang="pl-PL" dirty="0" err="1"/>
+              <a:t>handshake</a:t>
+            </a:r>
+            <a:r>
+              <a:rPr lang="pl-PL" dirty="0"/>
+              <a:t> </a:t>
+            </a:r>
+            <a:r>
+              <a:rPr lang="pl-PL" dirty="0" err="1"/>
+              <a:t>WebSocket</a:t>
+            </a:r>
+            <a:r>
+              <a:rPr lang="pl-PL" dirty="0"/>
+              <a:t>)</a:t>
             </a:r>
           </a:p>
           <a:p>
@@ -23501,12 +22450,83 @@
             </a:pPr>
             <a:r>
               <a:rPr lang="pl-PL" dirty="0"/>
-              <a:t>Biblioteki wprowadzają swoje abstrakcje które nie do końca są standardowe – np. Socket.IO</a:t>
-            </a:r>
-            <a:endParaRPr lang="en-US" dirty="0"/>
+              <a:t>Biblioteki wprowadzają swoje abstrakcje które nie do końca są standardowe – np. Socket.IO (np. </a:t>
+            </a:r>
+            <a:r>
+              <a:rPr lang="pl-PL" dirty="0" err="1"/>
+              <a:t>fallback</a:t>
+            </a:r>
+            <a:r>
+              <a:rPr lang="pl-PL" dirty="0"/>
+              <a:t>)</a:t>
+            </a:r>
           </a:p>
         </p:txBody>
       </p:sp>
+      <p:pic>
+        <p:nvPicPr>
+          <p:cNvPr id="4" name="Obraz 3">
+            <a:extLst>
+              <a:ext uri="{FF2B5EF4-FFF2-40B4-BE49-F238E27FC236}">
+                <a16:creationId xmlns:a16="http://schemas.microsoft.com/office/drawing/2014/main" id="{9D5EA635-E5A2-C6A8-6C79-48B2017BFE4D}"/>
+              </a:ext>
+            </a:extLst>
+          </p:cNvPr>
+          <p:cNvPicPr>
+            <a:picLocks noChangeAspect="1"/>
+          </p:cNvPicPr>
+          <p:nvPr/>
+        </p:nvPicPr>
+        <p:blipFill>
+          <a:blip r:embed="rId2">
+            <a:alphaModFix amt="11000"/>
+          </a:blip>
+          <a:stretch>
+            <a:fillRect/>
+          </a:stretch>
+        </p:blipFill>
+        <p:spPr>
+          <a:xfrm>
+            <a:off x="3996892" y="352740"/>
+            <a:ext cx="2249266" cy="2249266"/>
+          </a:xfrm>
+          <a:prstGeom prst="rect">
+            <a:avLst/>
+          </a:prstGeom>
+        </p:spPr>
+      </p:pic>
+      <p:pic>
+        <p:nvPicPr>
+          <p:cNvPr id="5" name="Obraz 4">
+            <a:extLst>
+              <a:ext uri="{FF2B5EF4-FFF2-40B4-BE49-F238E27FC236}">
+                <a16:creationId xmlns:a16="http://schemas.microsoft.com/office/drawing/2014/main" id="{6557F419-2523-5F3B-0A6A-C7D0E918166D}"/>
+              </a:ext>
+            </a:extLst>
+          </p:cNvPr>
+          <p:cNvPicPr>
+            <a:picLocks noChangeAspect="1"/>
+          </p:cNvPicPr>
+          <p:nvPr/>
+        </p:nvPicPr>
+        <p:blipFill>
+          <a:blip r:embed="rId2">
+            <a:alphaModFix amt="11000"/>
+          </a:blip>
+          <a:stretch>
+            <a:fillRect/>
+          </a:stretch>
+        </p:blipFill>
+        <p:spPr>
+          <a:xfrm flipH="1">
+            <a:off x="6102422" y="168178"/>
+            <a:ext cx="2192753" cy="2192753"/>
+          </a:xfrm>
+          <a:prstGeom prst="rect">
+            <a:avLst/>
+          </a:prstGeom>
+        </p:spPr>
+      </p:pic>
     </p:spTree>
     <p:extLst>
       <p:ext uri="{BB962C8B-B14F-4D97-AF65-F5344CB8AC3E}">
@@ -23543,6 +22563,36 @@
           <a:chExt cx="0" cy="0"/>
         </a:xfrm>
       </p:grpSpPr>
+      <p:pic>
+        <p:nvPicPr>
+          <p:cNvPr id="6" name="Obraz 5">
+            <a:extLst>
+              <a:ext uri="{FF2B5EF4-FFF2-40B4-BE49-F238E27FC236}">
+                <a16:creationId xmlns:a16="http://schemas.microsoft.com/office/drawing/2014/main" id="{183B9B94-24B0-C674-EF7C-4893751EC682}"/>
+              </a:ext>
+            </a:extLst>
+          </p:cNvPr>
+          <p:cNvPicPr>
+            <a:picLocks noChangeAspect="1"/>
+          </p:cNvPicPr>
+          <p:nvPr/>
+        </p:nvPicPr>
+        <p:blipFill>
+          <a:blip r:embed="rId2"/>
+          <a:stretch>
+            <a:fillRect/>
+          </a:stretch>
+        </p:blipFill>
+        <p:spPr>
+          <a:xfrm>
+            <a:off x="6140824" y="255494"/>
+            <a:ext cx="2393576" cy="2393576"/>
+          </a:xfrm>
+          <a:prstGeom prst="rect">
+            <a:avLst/>
+          </a:prstGeom>
+        </p:spPr>
+      </p:pic>
       <p:sp>
         <p:nvSpPr>
           <p:cNvPr id="2" name="Title 1">
@@ -23678,7 +22728,7 @@
             </a:r>
             <a:r>
               <a:rPr lang="pl-PL" dirty="0"/>
-              <a:t> i firewalli</a:t>
+              <a:t> i firewall</a:t>
             </a:r>
           </a:p>
           <a:p>
@@ -23885,6 +22935,98 @@
           </a:p>
         </p:txBody>
       </p:sp>
+      <p:pic>
+        <p:nvPicPr>
+          <p:cNvPr id="4" name="Obraz 3">
+            <a:extLst>
+              <a:ext uri="{FF2B5EF4-FFF2-40B4-BE49-F238E27FC236}">
+                <a16:creationId xmlns:a16="http://schemas.microsoft.com/office/drawing/2014/main" id="{7A561EA1-2456-327C-67B4-DE43BCC3897A}"/>
+              </a:ext>
+            </a:extLst>
+          </p:cNvPr>
+          <p:cNvPicPr>
+            <a:picLocks noChangeAspect="1"/>
+          </p:cNvPicPr>
+          <p:nvPr/>
+        </p:nvPicPr>
+        <p:blipFill>
+          <a:blip r:embed="rId2">
+            <a:alphaModFix amt="11000"/>
+          </a:blip>
+          <a:stretch>
+            <a:fillRect/>
+          </a:stretch>
+        </p:blipFill>
+        <p:spPr>
+          <a:xfrm flipH="1">
+            <a:off x="5878786" y="369027"/>
+            <a:ext cx="2192753" cy="2192753"/>
+          </a:xfrm>
+          <a:prstGeom prst="rect">
+            <a:avLst/>
+          </a:prstGeom>
+        </p:spPr>
+      </p:pic>
+      <p:pic>
+        <p:nvPicPr>
+          <p:cNvPr id="6" name="Obraz 5">
+            <a:extLst>
+              <a:ext uri="{FF2B5EF4-FFF2-40B4-BE49-F238E27FC236}">
+                <a16:creationId xmlns:a16="http://schemas.microsoft.com/office/drawing/2014/main" id="{FFABE833-85D8-2BEB-E887-C4D16F0CBF85}"/>
+              </a:ext>
+            </a:extLst>
+          </p:cNvPr>
+          <p:cNvPicPr>
+            <a:picLocks noChangeAspect="1"/>
+          </p:cNvPicPr>
+          <p:nvPr/>
+        </p:nvPicPr>
+        <p:blipFill>
+          <a:blip r:embed="rId3"/>
+          <a:stretch>
+            <a:fillRect/>
+          </a:stretch>
+        </p:blipFill>
+        <p:spPr>
+          <a:xfrm>
+            <a:off x="7654091" y="640445"/>
+            <a:ext cx="1280890" cy="1280890"/>
+          </a:xfrm>
+          <a:prstGeom prst="rect">
+            <a:avLst/>
+          </a:prstGeom>
+        </p:spPr>
+      </p:pic>
+      <p:pic>
+        <p:nvPicPr>
+          <p:cNvPr id="8" name="Obraz 7">
+            <a:extLst>
+              <a:ext uri="{FF2B5EF4-FFF2-40B4-BE49-F238E27FC236}">
+                <a16:creationId xmlns:a16="http://schemas.microsoft.com/office/drawing/2014/main" id="{40CC6BEA-46A5-3FA5-55DB-8B341D44362A}"/>
+              </a:ext>
+            </a:extLst>
+          </p:cNvPr>
+          <p:cNvPicPr>
+            <a:picLocks noChangeAspect="1"/>
+          </p:cNvPicPr>
+          <p:nvPr/>
+        </p:nvPicPr>
+        <p:blipFill>
+          <a:blip r:embed="rId4"/>
+          <a:stretch>
+            <a:fillRect/>
+          </a:stretch>
+        </p:blipFill>
+        <p:spPr>
+          <a:xfrm>
+            <a:off x="5493124" y="2299446"/>
+            <a:ext cx="2386853" cy="2386853"/>
+          </a:xfrm>
+          <a:prstGeom prst="rect">
+            <a:avLst/>
+          </a:prstGeom>
+        </p:spPr>
+      </p:pic>
     </p:spTree>
     <p:extLst>
       <p:ext uri="{BB962C8B-B14F-4D97-AF65-F5344CB8AC3E}">

--- a/Nie tylko websocket/Nie tylko WebSocket.pptx
+++ b/Nie tylko websocket/Nie tylko WebSocket.pptx
@@ -4,6 +4,9 @@
   <p:sldMasterIdLst>
     <p:sldMasterId id="2147483723" r:id="rId1"/>
   </p:sldMasterIdLst>
+  <p:notesMasterIdLst>
+    <p:notesMasterId r:id="rId26"/>
+  </p:notesMasterIdLst>
   <p:sldIdLst>
     <p:sldId id="256" r:id="rId2"/>
     <p:sldId id="257" r:id="rId3"/>
@@ -3009,6 +3012,439 @@
 </dgm:styleDef>
 </file>
 
+<file path=ppt/notesMasters/notesMaster1.xml><?xml version="1.0" encoding="utf-8"?>
+<p:notesMaster xmlns:a="http://schemas.openxmlformats.org/drawingml/2006/main" xmlns:r="http://schemas.openxmlformats.org/officeDocument/2006/relationships" xmlns:p="http://schemas.openxmlformats.org/presentationml/2006/main">
+  <p:cSld>
+    <p:bg>
+      <p:bgRef idx="1001">
+        <a:schemeClr val="bg1"/>
+      </p:bgRef>
+    </p:bg>
+    <p:spTree>
+      <p:nvGrpSpPr>
+        <p:cNvPr id="1" name=""/>
+        <p:cNvGrpSpPr/>
+        <p:nvPr/>
+      </p:nvGrpSpPr>
+      <p:grpSpPr>
+        <a:xfrm>
+          <a:off x="0" y="0"/>
+          <a:ext cx="0" cy="0"/>
+          <a:chOff x="0" y="0"/>
+          <a:chExt cx="0" cy="0"/>
+        </a:xfrm>
+      </p:grpSpPr>
+      <p:sp>
+        <p:nvSpPr>
+          <p:cNvPr id="2" name="Symbol zastępczy nagłówka 1"/>
+          <p:cNvSpPr>
+            <a:spLocks noGrp="1"/>
+          </p:cNvSpPr>
+          <p:nvPr>
+            <p:ph type="hdr" sz="quarter"/>
+          </p:nvPr>
+        </p:nvSpPr>
+        <p:spPr>
+          <a:xfrm>
+            <a:off x="0" y="0"/>
+            <a:ext cx="2971800" cy="458788"/>
+          </a:xfrm>
+          <a:prstGeom prst="rect">
+            <a:avLst/>
+          </a:prstGeom>
+        </p:spPr>
+        <p:txBody>
+          <a:bodyPr vert="horz" lIns="91440" tIns="45720" rIns="91440" bIns="45720" rtlCol="0"/>
+          <a:lstStyle>
+            <a:lvl1pPr algn="l">
+              <a:defRPr sz="1200"/>
+            </a:lvl1pPr>
+          </a:lstStyle>
+          <a:p>
+            <a:endParaRPr lang="pl-PL"/>
+          </a:p>
+        </p:txBody>
+      </p:sp>
+      <p:sp>
+        <p:nvSpPr>
+          <p:cNvPr id="3" name="Symbol zastępczy daty 2"/>
+          <p:cNvSpPr>
+            <a:spLocks noGrp="1"/>
+          </p:cNvSpPr>
+          <p:nvPr>
+            <p:ph type="dt" idx="1"/>
+          </p:nvPr>
+        </p:nvSpPr>
+        <p:spPr>
+          <a:xfrm>
+            <a:off x="3884613" y="0"/>
+            <a:ext cx="2971800" cy="458788"/>
+          </a:xfrm>
+          <a:prstGeom prst="rect">
+            <a:avLst/>
+          </a:prstGeom>
+        </p:spPr>
+        <p:txBody>
+          <a:bodyPr vert="horz" lIns="91440" tIns="45720" rIns="91440" bIns="45720" rtlCol="0"/>
+          <a:lstStyle>
+            <a:lvl1pPr algn="r">
+              <a:defRPr sz="1200"/>
+            </a:lvl1pPr>
+          </a:lstStyle>
+          <a:p>
+            <a:fld id="{BB345B6B-85EF-4A6D-A539-9510F76E1373}" type="datetimeFigureOut">
+              <a:rPr lang="pl-PL" smtClean="0"/>
+              <a:t>28.08.2025</a:t>
+            </a:fld>
+            <a:endParaRPr lang="pl-PL"/>
+          </a:p>
+        </p:txBody>
+      </p:sp>
+      <p:sp>
+        <p:nvSpPr>
+          <p:cNvPr id="4" name="Symbol zastępczy obrazu slajdu 3"/>
+          <p:cNvSpPr>
+            <a:spLocks noGrp="1" noRot="1" noChangeAspect="1"/>
+          </p:cNvSpPr>
+          <p:nvPr>
+            <p:ph type="sldImg" idx="2"/>
+          </p:nvPr>
+        </p:nvSpPr>
+        <p:spPr>
+          <a:xfrm>
+            <a:off x="1371600" y="1143000"/>
+            <a:ext cx="4114800" cy="3086100"/>
+          </a:xfrm>
+          <a:prstGeom prst="rect">
+            <a:avLst/>
+          </a:prstGeom>
+          <a:noFill/>
+          <a:ln w="12700">
+            <a:solidFill>
+              <a:prstClr val="black"/>
+            </a:solidFill>
+          </a:ln>
+        </p:spPr>
+        <p:txBody>
+          <a:bodyPr vert="horz" lIns="91440" tIns="45720" rIns="91440" bIns="45720" rtlCol="0" anchor="ctr"/>
+          <a:lstStyle/>
+          <a:p>
+            <a:endParaRPr lang="pl-PL"/>
+          </a:p>
+        </p:txBody>
+      </p:sp>
+      <p:sp>
+        <p:nvSpPr>
+          <p:cNvPr id="5" name="Symbol zastępczy notatek 4"/>
+          <p:cNvSpPr>
+            <a:spLocks noGrp="1"/>
+          </p:cNvSpPr>
+          <p:nvPr>
+            <p:ph type="body" sz="quarter" idx="3"/>
+          </p:nvPr>
+        </p:nvSpPr>
+        <p:spPr>
+          <a:xfrm>
+            <a:off x="685800" y="4400550"/>
+            <a:ext cx="5486400" cy="3600450"/>
+          </a:xfrm>
+          <a:prstGeom prst="rect">
+            <a:avLst/>
+          </a:prstGeom>
+        </p:spPr>
+        <p:txBody>
+          <a:bodyPr vert="horz" lIns="91440" tIns="45720" rIns="91440" bIns="45720" rtlCol="0"/>
+          <a:lstStyle/>
+          <a:p>
+            <a:pPr lvl="0"/>
+            <a:r>
+              <a:rPr lang="pl-PL"/>
+              <a:t>Kliknij, aby edytować style wzorca tekstu</a:t>
+            </a:r>
+          </a:p>
+          <a:p>
+            <a:pPr lvl="1"/>
+            <a:r>
+              <a:rPr lang="pl-PL"/>
+              <a:t>Drugi poziom</a:t>
+            </a:r>
+          </a:p>
+          <a:p>
+            <a:pPr lvl="2"/>
+            <a:r>
+              <a:rPr lang="pl-PL"/>
+              <a:t>Trzeci poziom</a:t>
+            </a:r>
+          </a:p>
+          <a:p>
+            <a:pPr lvl="3"/>
+            <a:r>
+              <a:rPr lang="pl-PL"/>
+              <a:t>Czwarty poziom</a:t>
+            </a:r>
+          </a:p>
+          <a:p>
+            <a:pPr lvl="4"/>
+            <a:r>
+              <a:rPr lang="pl-PL"/>
+              <a:t>Piąty poziom</a:t>
+            </a:r>
+          </a:p>
+        </p:txBody>
+      </p:sp>
+      <p:sp>
+        <p:nvSpPr>
+          <p:cNvPr id="6" name="Symbol zastępczy stopki 5"/>
+          <p:cNvSpPr>
+            <a:spLocks noGrp="1"/>
+          </p:cNvSpPr>
+          <p:nvPr>
+            <p:ph type="ftr" sz="quarter" idx="4"/>
+          </p:nvPr>
+        </p:nvSpPr>
+        <p:spPr>
+          <a:xfrm>
+            <a:off x="0" y="8685213"/>
+            <a:ext cx="2971800" cy="458787"/>
+          </a:xfrm>
+          <a:prstGeom prst="rect">
+            <a:avLst/>
+          </a:prstGeom>
+        </p:spPr>
+        <p:txBody>
+          <a:bodyPr vert="horz" lIns="91440" tIns="45720" rIns="91440" bIns="45720" rtlCol="0" anchor="b"/>
+          <a:lstStyle>
+            <a:lvl1pPr algn="l">
+              <a:defRPr sz="1200"/>
+            </a:lvl1pPr>
+          </a:lstStyle>
+          <a:p>
+            <a:endParaRPr lang="pl-PL"/>
+          </a:p>
+        </p:txBody>
+      </p:sp>
+      <p:sp>
+        <p:nvSpPr>
+          <p:cNvPr id="7" name="Symbol zastępczy numeru slajdu 6"/>
+          <p:cNvSpPr>
+            <a:spLocks noGrp="1"/>
+          </p:cNvSpPr>
+          <p:nvPr>
+            <p:ph type="sldNum" sz="quarter" idx="5"/>
+          </p:nvPr>
+        </p:nvSpPr>
+        <p:spPr>
+          <a:xfrm>
+            <a:off x="3884613" y="8685213"/>
+            <a:ext cx="2971800" cy="458787"/>
+          </a:xfrm>
+          <a:prstGeom prst="rect">
+            <a:avLst/>
+          </a:prstGeom>
+        </p:spPr>
+        <p:txBody>
+          <a:bodyPr vert="horz" lIns="91440" tIns="45720" rIns="91440" bIns="45720" rtlCol="0" anchor="b"/>
+          <a:lstStyle>
+            <a:lvl1pPr algn="r">
+              <a:defRPr sz="1200"/>
+            </a:lvl1pPr>
+          </a:lstStyle>
+          <a:p>
+            <a:fld id="{ED753DBF-C71B-4396-8508-919EFBFCEB27}" type="slidenum">
+              <a:rPr lang="pl-PL" smtClean="0"/>
+              <a:t>‹#›</a:t>
+            </a:fld>
+            <a:endParaRPr lang="pl-PL"/>
+          </a:p>
+        </p:txBody>
+      </p:sp>
+    </p:spTree>
+    <p:extLst>
+      <p:ext uri="{BB962C8B-B14F-4D97-AF65-F5344CB8AC3E}">
+        <p14:creationId xmlns:p14="http://schemas.microsoft.com/office/powerpoint/2010/main" val="1518146324"/>
+      </p:ext>
+    </p:extLst>
+  </p:cSld>
+  <p:clrMap bg1="lt1" tx1="dk1" bg2="lt2" tx2="dk2" accent1="accent1" accent2="accent2" accent3="accent3" accent4="accent4" accent5="accent5" accent6="accent6" hlink="hlink" folHlink="folHlink"/>
+  <p:notesStyle>
+    <a:lvl1pPr marL="0" algn="l" defTabSz="914400" rtl="0" eaLnBrk="1" latinLnBrk="0" hangingPunct="1">
+      <a:defRPr sz="1200" kern="1200">
+        <a:solidFill>
+          <a:schemeClr val="tx1"/>
+        </a:solidFill>
+        <a:latin typeface="+mn-lt"/>
+        <a:ea typeface="+mn-ea"/>
+        <a:cs typeface="+mn-cs"/>
+      </a:defRPr>
+    </a:lvl1pPr>
+    <a:lvl2pPr marL="457200" algn="l" defTabSz="914400" rtl="0" eaLnBrk="1" latinLnBrk="0" hangingPunct="1">
+      <a:defRPr sz="1200" kern="1200">
+        <a:solidFill>
+          <a:schemeClr val="tx1"/>
+        </a:solidFill>
+        <a:latin typeface="+mn-lt"/>
+        <a:ea typeface="+mn-ea"/>
+        <a:cs typeface="+mn-cs"/>
+      </a:defRPr>
+    </a:lvl2pPr>
+    <a:lvl3pPr marL="914400" algn="l" defTabSz="914400" rtl="0" eaLnBrk="1" latinLnBrk="0" hangingPunct="1">
+      <a:defRPr sz="1200" kern="1200">
+        <a:solidFill>
+          <a:schemeClr val="tx1"/>
+        </a:solidFill>
+        <a:latin typeface="+mn-lt"/>
+        <a:ea typeface="+mn-ea"/>
+        <a:cs typeface="+mn-cs"/>
+      </a:defRPr>
+    </a:lvl3pPr>
+    <a:lvl4pPr marL="1371600" algn="l" defTabSz="914400" rtl="0" eaLnBrk="1" latinLnBrk="0" hangingPunct="1">
+      <a:defRPr sz="1200" kern="1200">
+        <a:solidFill>
+          <a:schemeClr val="tx1"/>
+        </a:solidFill>
+        <a:latin typeface="+mn-lt"/>
+        <a:ea typeface="+mn-ea"/>
+        <a:cs typeface="+mn-cs"/>
+      </a:defRPr>
+    </a:lvl4pPr>
+    <a:lvl5pPr marL="1828800" algn="l" defTabSz="914400" rtl="0" eaLnBrk="1" latinLnBrk="0" hangingPunct="1">
+      <a:defRPr sz="1200" kern="1200">
+        <a:solidFill>
+          <a:schemeClr val="tx1"/>
+        </a:solidFill>
+        <a:latin typeface="+mn-lt"/>
+        <a:ea typeface="+mn-ea"/>
+        <a:cs typeface="+mn-cs"/>
+      </a:defRPr>
+    </a:lvl5pPr>
+    <a:lvl6pPr marL="2286000" algn="l" defTabSz="914400" rtl="0" eaLnBrk="1" latinLnBrk="0" hangingPunct="1">
+      <a:defRPr sz="1200" kern="1200">
+        <a:solidFill>
+          <a:schemeClr val="tx1"/>
+        </a:solidFill>
+        <a:latin typeface="+mn-lt"/>
+        <a:ea typeface="+mn-ea"/>
+        <a:cs typeface="+mn-cs"/>
+      </a:defRPr>
+    </a:lvl6pPr>
+    <a:lvl7pPr marL="2743200" algn="l" defTabSz="914400" rtl="0" eaLnBrk="1" latinLnBrk="0" hangingPunct="1">
+      <a:defRPr sz="1200" kern="1200">
+        <a:solidFill>
+          <a:schemeClr val="tx1"/>
+        </a:solidFill>
+        <a:latin typeface="+mn-lt"/>
+        <a:ea typeface="+mn-ea"/>
+        <a:cs typeface="+mn-cs"/>
+      </a:defRPr>
+    </a:lvl7pPr>
+    <a:lvl8pPr marL="3200400" algn="l" defTabSz="914400" rtl="0" eaLnBrk="1" latinLnBrk="0" hangingPunct="1">
+      <a:defRPr sz="1200" kern="1200">
+        <a:solidFill>
+          <a:schemeClr val="tx1"/>
+        </a:solidFill>
+        <a:latin typeface="+mn-lt"/>
+        <a:ea typeface="+mn-ea"/>
+        <a:cs typeface="+mn-cs"/>
+      </a:defRPr>
+    </a:lvl8pPr>
+    <a:lvl9pPr marL="3657600" algn="l" defTabSz="914400" rtl="0" eaLnBrk="1" latinLnBrk="0" hangingPunct="1">
+      <a:defRPr sz="1200" kern="1200">
+        <a:solidFill>
+          <a:schemeClr val="tx1"/>
+        </a:solidFill>
+        <a:latin typeface="+mn-lt"/>
+        <a:ea typeface="+mn-ea"/>
+        <a:cs typeface="+mn-cs"/>
+      </a:defRPr>
+    </a:lvl9pPr>
+  </p:notesStyle>
+</p:notesMaster>
+</file>
+
+<file path=ppt/notesSlides/notesSlide1.xml><?xml version="1.0" encoding="utf-8"?>
+<p:notes xmlns:a="http://schemas.openxmlformats.org/drawingml/2006/main" xmlns:r="http://schemas.openxmlformats.org/officeDocument/2006/relationships" xmlns:p="http://schemas.openxmlformats.org/presentationml/2006/main">
+  <p:cSld>
+    <p:spTree>
+      <p:nvGrpSpPr>
+        <p:cNvPr id="1" name=""/>
+        <p:cNvGrpSpPr/>
+        <p:nvPr/>
+      </p:nvGrpSpPr>
+      <p:grpSpPr>
+        <a:xfrm>
+          <a:off x="0" y="0"/>
+          <a:ext cx="0" cy="0"/>
+          <a:chOff x="0" y="0"/>
+          <a:chExt cx="0" cy="0"/>
+        </a:xfrm>
+      </p:grpSpPr>
+      <p:sp>
+        <p:nvSpPr>
+          <p:cNvPr id="2" name="Symbol zastępczy obrazu slajdu 1"/>
+          <p:cNvSpPr>
+            <a:spLocks noGrp="1" noRot="1" noChangeAspect="1"/>
+          </p:cNvSpPr>
+          <p:nvPr>
+            <p:ph type="sldImg"/>
+          </p:nvPr>
+        </p:nvSpPr>
+        <p:spPr/>
+      </p:sp>
+      <p:sp>
+        <p:nvSpPr>
+          <p:cNvPr id="3" name="Symbol zastępczy notatek 2"/>
+          <p:cNvSpPr>
+            <a:spLocks noGrp="1"/>
+          </p:cNvSpPr>
+          <p:nvPr>
+            <p:ph type="body" idx="1"/>
+          </p:nvPr>
+        </p:nvSpPr>
+        <p:spPr/>
+        <p:txBody>
+          <a:bodyPr/>
+          <a:lstStyle/>
+          <a:p>
+            <a:endParaRPr lang="pl-PL" dirty="0"/>
+          </a:p>
+        </p:txBody>
+      </p:sp>
+      <p:sp>
+        <p:nvSpPr>
+          <p:cNvPr id="4" name="Symbol zastępczy numeru slajdu 3"/>
+          <p:cNvSpPr>
+            <a:spLocks noGrp="1"/>
+          </p:cNvSpPr>
+          <p:nvPr>
+            <p:ph type="sldNum" sz="quarter" idx="5"/>
+          </p:nvPr>
+        </p:nvSpPr>
+        <p:spPr/>
+        <p:txBody>
+          <a:bodyPr/>
+          <a:lstStyle/>
+          <a:p>
+            <a:fld id="{ED753DBF-C71B-4396-8508-919EFBFCEB27}" type="slidenum">
+              <a:rPr lang="pl-PL" smtClean="0"/>
+              <a:t>9</a:t>
+            </a:fld>
+            <a:endParaRPr lang="pl-PL"/>
+          </a:p>
+        </p:txBody>
+      </p:sp>
+    </p:spTree>
+    <p:extLst>
+      <p:ext uri="{BB962C8B-B14F-4D97-AF65-F5344CB8AC3E}">
+        <p14:creationId xmlns:p14="http://schemas.microsoft.com/office/powerpoint/2010/main" val="3937185737"/>
+      </p:ext>
+    </p:extLst>
+  </p:cSld>
+  <p:clrMapOvr>
+    <a:masterClrMapping/>
+  </p:clrMapOvr>
+</p:notes>
+</file>
+
 <file path=ppt/slideLayouts/slideLayout1.xml><?xml version="1.0" encoding="utf-8"?>
 <p:sldLayout xmlns:a="http://schemas.openxmlformats.org/drawingml/2006/main" xmlns:r="http://schemas.openxmlformats.org/officeDocument/2006/relationships" xmlns:p="http://schemas.openxmlformats.org/presentationml/2006/main" type="title" preserve="1">
   <p:cSld name="Title Slide">
@@ -3529,7 +3965,7 @@
           <a:p>
             <a:fld id="{5BCAD085-E8A6-8845-BD4E-CB4CCA059FC4}" type="datetimeFigureOut">
               <a:rPr lang="en-US" smtClean="0"/>
-              <a:t>8/27/2025</a:t>
+              <a:t>8/28/2025</a:t>
             </a:fld>
             <a:endParaRPr lang="en-US"/>
           </a:p>
@@ -3928,7 +4364,7 @@
           <a:p>
             <a:fld id="{5BCAD085-E8A6-8845-BD4E-CB4CCA059FC4}" type="datetimeFigureOut">
               <a:rPr lang="en-US" smtClean="0"/>
-              <a:t>8/27/2025</a:t>
+              <a:t>8/28/2025</a:t>
             </a:fld>
             <a:endParaRPr lang="en-US"/>
           </a:p>
@@ -4262,7 +4698,7 @@
           <a:p>
             <a:fld id="{5BCAD085-E8A6-8845-BD4E-CB4CCA059FC4}" type="datetimeFigureOut">
               <a:rPr lang="en-US" smtClean="0"/>
-              <a:t>8/27/2025</a:t>
+              <a:t>8/28/2025</a:t>
             </a:fld>
             <a:endParaRPr lang="en-US"/>
           </a:p>
@@ -4580,7 +5016,7 @@
           <a:p>
             <a:fld id="{5BCAD085-E8A6-8845-BD4E-CB4CCA059FC4}" type="datetimeFigureOut">
               <a:rPr lang="en-US" smtClean="0"/>
-              <a:t>8/27/2025</a:t>
+              <a:t>8/28/2025</a:t>
             </a:fld>
             <a:endParaRPr lang="en-US"/>
           </a:p>
@@ -4974,7 +5410,7 @@
           <a:p>
             <a:fld id="{5BCAD085-E8A6-8845-BD4E-CB4CCA059FC4}" type="datetimeFigureOut">
               <a:rPr lang="en-US" smtClean="0"/>
-              <a:t>8/27/2025</a:t>
+              <a:t>8/28/2025</a:t>
             </a:fld>
             <a:endParaRPr lang="en-US"/>
           </a:p>
@@ -5229,7 +5665,7 @@
           <a:p>
             <a:fld id="{5BCAD085-E8A6-8845-BD4E-CB4CCA059FC4}" type="datetimeFigureOut">
               <a:rPr lang="en-US" smtClean="0"/>
-              <a:t>8/27/2025</a:t>
+              <a:t>8/28/2025</a:t>
             </a:fld>
             <a:endParaRPr lang="en-US"/>
           </a:p>
@@ -5489,7 +5925,7 @@
           <a:p>
             <a:fld id="{5BCAD085-E8A6-8845-BD4E-CB4CCA059FC4}" type="datetimeFigureOut">
               <a:rPr lang="en-US" smtClean="0"/>
-              <a:t>8/27/2025</a:t>
+              <a:t>8/28/2025</a:t>
             </a:fld>
             <a:endParaRPr lang="en-US"/>
           </a:p>
@@ -5749,7 +6185,7 @@
           <a:p>
             <a:fld id="{5BCAD085-E8A6-8845-BD4E-CB4CCA059FC4}" type="datetimeFigureOut">
               <a:rPr lang="en-US" smtClean="0"/>
-              <a:t>8/27/2025</a:t>
+              <a:t>8/28/2025</a:t>
             </a:fld>
             <a:endParaRPr lang="en-US"/>
           </a:p>
@@ -6076,7 +6512,7 @@
           <a:p>
             <a:fld id="{5BCAD085-E8A6-8845-BD4E-CB4CCA059FC4}" type="datetimeFigureOut">
               <a:rPr lang="en-US" smtClean="0"/>
-              <a:t>8/27/2025</a:t>
+              <a:t>8/28/2025</a:t>
             </a:fld>
             <a:endParaRPr lang="en-US"/>
           </a:p>
@@ -6397,7 +6833,7 @@
           <a:p>
             <a:fld id="{5BCAD085-E8A6-8845-BD4E-CB4CCA059FC4}" type="datetimeFigureOut">
               <a:rPr lang="en-US" smtClean="0"/>
-              <a:t>8/27/2025</a:t>
+              <a:t>8/28/2025</a:t>
             </a:fld>
             <a:endParaRPr lang="en-US"/>
           </a:p>
@@ -6852,7 +7288,7 @@
           <a:p>
             <a:fld id="{5BCAD085-E8A6-8845-BD4E-CB4CCA059FC4}" type="datetimeFigureOut">
               <a:rPr lang="en-US" smtClean="0"/>
-              <a:t>8/27/2025</a:t>
+              <a:t>8/28/2025</a:t>
             </a:fld>
             <a:endParaRPr lang="en-US"/>
           </a:p>
@@ -7060,7 +7496,7 @@
           <a:p>
             <a:fld id="{5BCAD085-E8A6-8845-BD4E-CB4CCA059FC4}" type="datetimeFigureOut">
               <a:rPr lang="en-US" smtClean="0"/>
-              <a:t>8/27/2025</a:t>
+              <a:t>8/28/2025</a:t>
             </a:fld>
             <a:endParaRPr lang="en-US"/>
           </a:p>
@@ -7235,7 +7671,7 @@
           <a:p>
             <a:fld id="{5BCAD085-E8A6-8845-BD4E-CB4CCA059FC4}" type="datetimeFigureOut">
               <a:rPr lang="en-US" smtClean="0"/>
-              <a:t>8/27/2025</a:t>
+              <a:t>8/28/2025</a:t>
             </a:fld>
             <a:endParaRPr lang="en-US"/>
           </a:p>
@@ -7566,7 +8002,7 @@
           <a:p>
             <a:fld id="{5BCAD085-E8A6-8845-BD4E-CB4CCA059FC4}" type="datetimeFigureOut">
               <a:rPr lang="en-US" smtClean="0"/>
-              <a:t>8/27/2025</a:t>
+              <a:t>8/28/2025</a:t>
             </a:fld>
             <a:endParaRPr lang="en-US"/>
           </a:p>
@@ -7909,7 +8345,7 @@
           <a:p>
             <a:fld id="{5BCAD085-E8A6-8845-BD4E-CB4CCA059FC4}" type="datetimeFigureOut">
               <a:rPr lang="en-US" smtClean="0"/>
-              <a:t>8/27/2025</a:t>
+              <a:t>8/28/2025</a:t>
             </a:fld>
             <a:endParaRPr lang="en-US"/>
           </a:p>
@@ -10024,7 +10460,7 @@
           <a:p>
             <a:fld id="{5BCAD085-E8A6-8845-BD4E-CB4CCA059FC4}" type="datetimeFigureOut">
               <a:rPr lang="en-US" smtClean="0"/>
-              <a:t>8/27/2025</a:t>
+              <a:t>8/28/2025</a:t>
             </a:fld>
             <a:endParaRPr lang="en-US"/>
           </a:p>
@@ -19631,132 +20067,6 @@
           <a:chExt cx="0" cy="0"/>
         </a:xfrm>
       </p:grpSpPr>
-      <p:sp>
-        <p:nvSpPr>
-          <p:cNvPr id="2" name="Title 1">
-            <a:extLst>
-              <a:ext uri="{FF2B5EF4-FFF2-40B4-BE49-F238E27FC236}">
-                <a16:creationId xmlns:a16="http://schemas.microsoft.com/office/drawing/2014/main" id="{1DE5EF95-FB7A-EA39-2C44-0F31C7594ADD}"/>
-              </a:ext>
-            </a:extLst>
-          </p:cNvPr>
-          <p:cNvSpPr>
-            <a:spLocks noGrp="1"/>
-          </p:cNvSpPr>
-          <p:nvPr>
-            <p:ph type="title"/>
-          </p:nvPr>
-        </p:nvSpPr>
-        <p:spPr/>
-        <p:txBody>
-          <a:bodyPr>
-            <a:normAutofit/>
-          </a:bodyPr>
-          <a:lstStyle/>
-          <a:p>
-            <a:r>
-              <a:rPr lang="pl-PL" sz="2500" dirty="0"/>
-              <a:t>Utrzymywanie połączenia oraz problemy z HTTPS</a:t>
-            </a:r>
-            <a:endParaRPr lang="en-US" sz="2500" dirty="0"/>
-          </a:p>
-        </p:txBody>
-      </p:sp>
-      <p:sp>
-        <p:nvSpPr>
-          <p:cNvPr id="3" name="Content Placeholder 2">
-            <a:extLst>
-              <a:ext uri="{FF2B5EF4-FFF2-40B4-BE49-F238E27FC236}">
-                <a16:creationId xmlns:a16="http://schemas.microsoft.com/office/drawing/2014/main" id="{AB08DD35-92A9-E49C-DACC-96286204B03A}"/>
-              </a:ext>
-            </a:extLst>
-          </p:cNvPr>
-          <p:cNvSpPr>
-            <a:spLocks noGrp="1"/>
-          </p:cNvSpPr>
-          <p:nvPr>
-            <p:ph idx="1"/>
-          </p:nvPr>
-        </p:nvSpPr>
-        <p:spPr/>
-        <p:txBody>
-          <a:bodyPr>
-            <a:normAutofit/>
-          </a:bodyPr>
-          <a:lstStyle/>
-          <a:p>
-            <a:pPr>
-              <a:lnSpc>
-                <a:spcPct val="90000"/>
-              </a:lnSpc>
-            </a:pPr>
-            <a:r>
-              <a:rPr lang="pl-PL" dirty="0"/>
-              <a:t>SSE wymaga stałego połączenia – firewalle, </a:t>
-            </a:r>
-            <a:r>
-              <a:rPr lang="pl-PL" dirty="0" err="1"/>
-              <a:t>load</a:t>
-            </a:r>
-            <a:r>
-              <a:rPr lang="pl-PL" dirty="0"/>
-              <a:t> </a:t>
-            </a:r>
-            <a:r>
-              <a:rPr lang="pl-PL" dirty="0" err="1"/>
-              <a:t>balancery</a:t>
-            </a:r>
-            <a:r>
-              <a:rPr lang="pl-PL" dirty="0"/>
-              <a:t> mogą zrywać połączenie.  </a:t>
-            </a:r>
-          </a:p>
-          <a:p>
-            <a:pPr>
-              <a:lnSpc>
-                <a:spcPct val="90000"/>
-              </a:lnSpc>
-            </a:pPr>
-            <a:r>
-              <a:rPr lang="pl-PL" dirty="0"/>
-              <a:t>Rozwiązanie: </a:t>
-            </a:r>
-            <a:r>
-              <a:rPr lang="pl-PL" dirty="0" err="1"/>
-              <a:t>keep-alive</a:t>
-            </a:r>
-            <a:r>
-              <a:rPr lang="pl-PL" dirty="0"/>
-              <a:t>, </a:t>
-            </a:r>
-            <a:r>
-              <a:rPr lang="pl-PL" dirty="0" err="1"/>
-              <a:t>reconnect</a:t>
-            </a:r>
-            <a:r>
-              <a:rPr lang="pl-PL" dirty="0"/>
-              <a:t> na kliencie (automatyczny), </a:t>
-            </a:r>
-            <a:r>
-              <a:rPr lang="pl-PL" dirty="0" err="1"/>
-              <a:t>heartbeat</a:t>
-            </a:r>
-            <a:r>
-              <a:rPr lang="pl-PL" dirty="0"/>
-              <a:t> </a:t>
-            </a:r>
-            <a:r>
-              <a:rPr lang="pl-PL" dirty="0" err="1"/>
-              <a:t>messages</a:t>
-            </a:r>
-            <a:r>
-              <a:rPr lang="pl-PL" dirty="0"/>
-              <a:t>.</a:t>
-            </a:r>
-            <a:endParaRPr lang="en-US" dirty="0"/>
-          </a:p>
-        </p:txBody>
-      </p:sp>
       <p:pic>
         <p:nvPicPr>
           <p:cNvPr id="6" name="Obraz 5">
@@ -19787,6 +20097,132 @@
           </a:prstGeom>
         </p:spPr>
       </p:pic>
+      <p:sp>
+        <p:nvSpPr>
+          <p:cNvPr id="2" name="Title 1">
+            <a:extLst>
+              <a:ext uri="{FF2B5EF4-FFF2-40B4-BE49-F238E27FC236}">
+                <a16:creationId xmlns:a16="http://schemas.microsoft.com/office/drawing/2014/main" id="{1DE5EF95-FB7A-EA39-2C44-0F31C7594ADD}"/>
+              </a:ext>
+            </a:extLst>
+          </p:cNvPr>
+          <p:cNvSpPr>
+            <a:spLocks noGrp="1"/>
+          </p:cNvSpPr>
+          <p:nvPr>
+            <p:ph type="title"/>
+          </p:nvPr>
+        </p:nvSpPr>
+        <p:spPr/>
+        <p:txBody>
+          <a:bodyPr>
+            <a:normAutofit/>
+          </a:bodyPr>
+          <a:lstStyle/>
+          <a:p>
+            <a:r>
+              <a:rPr lang="pl-PL" sz="2500" dirty="0"/>
+              <a:t>Utrzymywanie połączenia oraz problemy z HTTPS</a:t>
+            </a:r>
+            <a:endParaRPr lang="en-US" sz="2500" dirty="0"/>
+          </a:p>
+        </p:txBody>
+      </p:sp>
+      <p:sp>
+        <p:nvSpPr>
+          <p:cNvPr id="3" name="Content Placeholder 2">
+            <a:extLst>
+              <a:ext uri="{FF2B5EF4-FFF2-40B4-BE49-F238E27FC236}">
+                <a16:creationId xmlns:a16="http://schemas.microsoft.com/office/drawing/2014/main" id="{AB08DD35-92A9-E49C-DACC-96286204B03A}"/>
+              </a:ext>
+            </a:extLst>
+          </p:cNvPr>
+          <p:cNvSpPr>
+            <a:spLocks noGrp="1"/>
+          </p:cNvSpPr>
+          <p:nvPr>
+            <p:ph idx="1"/>
+          </p:nvPr>
+        </p:nvSpPr>
+        <p:spPr/>
+        <p:txBody>
+          <a:bodyPr>
+            <a:normAutofit/>
+          </a:bodyPr>
+          <a:lstStyle/>
+          <a:p>
+            <a:pPr>
+              <a:lnSpc>
+                <a:spcPct val="90000"/>
+              </a:lnSpc>
+            </a:pPr>
+            <a:r>
+              <a:rPr lang="pl-PL" dirty="0"/>
+              <a:t>SSE wymaga stałego połączenia – firewalle, </a:t>
+            </a:r>
+            <a:r>
+              <a:rPr lang="pl-PL" dirty="0" err="1"/>
+              <a:t>load</a:t>
+            </a:r>
+            <a:r>
+              <a:rPr lang="pl-PL" dirty="0"/>
+              <a:t> </a:t>
+            </a:r>
+            <a:r>
+              <a:rPr lang="pl-PL" dirty="0" err="1"/>
+              <a:t>balancery</a:t>
+            </a:r>
+            <a:r>
+              <a:rPr lang="pl-PL" dirty="0"/>
+              <a:t> mogą zrywać połączenie.  </a:t>
+            </a:r>
+          </a:p>
+          <a:p>
+            <a:pPr>
+              <a:lnSpc>
+                <a:spcPct val="90000"/>
+              </a:lnSpc>
+            </a:pPr>
+            <a:r>
+              <a:rPr lang="pl-PL" dirty="0"/>
+              <a:t>Rozwiązanie: </a:t>
+            </a:r>
+            <a:r>
+              <a:rPr lang="pl-PL" dirty="0" err="1"/>
+              <a:t>keep-alive</a:t>
+            </a:r>
+            <a:r>
+              <a:rPr lang="pl-PL" dirty="0"/>
+              <a:t>, </a:t>
+            </a:r>
+            <a:r>
+              <a:rPr lang="pl-PL" dirty="0" err="1"/>
+              <a:t>reconnect</a:t>
+            </a:r>
+            <a:r>
+              <a:rPr lang="pl-PL" dirty="0"/>
+              <a:t> na kliencie (automatyczny), </a:t>
+            </a:r>
+            <a:r>
+              <a:rPr lang="pl-PL" dirty="0" err="1"/>
+              <a:t>heartbeat</a:t>
+            </a:r>
+            <a:r>
+              <a:rPr lang="pl-PL" dirty="0"/>
+              <a:t> </a:t>
+            </a:r>
+            <a:r>
+              <a:rPr lang="pl-PL" dirty="0" err="1"/>
+              <a:t>messages</a:t>
+            </a:r>
+            <a:r>
+              <a:rPr lang="pl-PL" dirty="0"/>
+              <a:t>.</a:t>
+            </a:r>
+            <a:endParaRPr lang="en-US" dirty="0"/>
+          </a:p>
+        </p:txBody>
+      </p:sp>
     </p:spTree>
     <p:extLst>
       <p:ext uri="{BB962C8B-B14F-4D97-AF65-F5344CB8AC3E}">
@@ -22950,7 +23386,7 @@
           <p:nvPr/>
         </p:nvPicPr>
         <p:blipFill>
-          <a:blip r:embed="rId2">
+          <a:blip r:embed="rId3">
             <a:alphaModFix amt="11000"/>
           </a:blip>
           <a:stretch>
@@ -22982,7 +23418,7 @@
           <p:nvPr/>
         </p:nvPicPr>
         <p:blipFill>
-          <a:blip r:embed="rId3"/>
+          <a:blip r:embed="rId4"/>
           <a:stretch>
             <a:fillRect/>
           </a:stretch>
@@ -23012,7 +23448,7 @@
           <p:nvPr/>
         </p:nvPicPr>
         <p:blipFill>
-          <a:blip r:embed="rId4"/>
+          <a:blip r:embed="rId5"/>
           <a:stretch>
             <a:fillRect/>
           </a:stretch>
@@ -23281,4 +23717,319 @@
     </a:ext>
   </a:extLst>
 </a:theme>
+</file>
+
+<file path=ppt/theme/theme2.xml><?xml version="1.0" encoding="utf-8"?>
+<a:theme xmlns:a="http://schemas.openxmlformats.org/drawingml/2006/main" name="Motyw pakietu Office">
+  <a:themeElements>
+    <a:clrScheme name="Pakiet Office">
+      <a:dk1>
+        <a:sysClr val="windowText" lastClr="000000"/>
+      </a:dk1>
+      <a:lt1>
+        <a:sysClr val="window" lastClr="FFFFFF"/>
+      </a:lt1>
+      <a:dk2>
+        <a:srgbClr val="0E2841"/>
+      </a:dk2>
+      <a:lt2>
+        <a:srgbClr val="E8E8E8"/>
+      </a:lt2>
+      <a:accent1>
+        <a:srgbClr val="156082"/>
+      </a:accent1>
+      <a:accent2>
+        <a:srgbClr val="E97132"/>
+      </a:accent2>
+      <a:accent3>
+        <a:srgbClr val="196B24"/>
+      </a:accent3>
+      <a:accent4>
+        <a:srgbClr val="0F9ED5"/>
+      </a:accent4>
+      <a:accent5>
+        <a:srgbClr val="A02B93"/>
+      </a:accent5>
+      <a:accent6>
+        <a:srgbClr val="4EA72E"/>
+      </a:accent6>
+      <a:hlink>
+        <a:srgbClr val="467886"/>
+      </a:hlink>
+      <a:folHlink>
+        <a:srgbClr val="96607D"/>
+      </a:folHlink>
+    </a:clrScheme>
+    <a:fontScheme name="Pakiet Office">
+      <a:majorFont>
+        <a:latin typeface="Aptos Display" panose="02110004020202020204"/>
+        <a:ea typeface=""/>
+        <a:cs typeface=""/>
+        <a:font script="Jpan" typeface="游ゴシック Light"/>
+        <a:font script="Hang" typeface="맑은 고딕"/>
+        <a:font script="Hans" typeface="等线 Light"/>
+        <a:font script="Hant" typeface="新細明體"/>
+        <a:font script="Arab" typeface="Times New Roman"/>
+        <a:font script="Hebr" typeface="Times New Roman"/>
+        <a:font script="Thai" typeface="Angsana New"/>
+        <a:font script="Ethi" typeface="Nyala"/>
+        <a:font script="Beng" typeface="Vrinda"/>
+        <a:font script="Gujr" typeface="Shruti"/>
+        <a:font script="Khmr" typeface="MoolBoran"/>
+        <a:font script="Knda" typeface="Tunga"/>
+        <a:font script="Guru" typeface="Raavi"/>
+        <a:font script="Cans" typeface="Euphemia"/>
+        <a:font script="Cher" typeface="Plantagenet Cherokee"/>
+        <a:font script="Yiii" typeface="Microsoft Yi Baiti"/>
+        <a:font script="Tibt" typeface="Microsoft Himalaya"/>
+        <a:font script="Thaa" typeface="MV Boli"/>
+        <a:font script="Deva" typeface="Mangal"/>
+        <a:font script="Telu" typeface="Gautami"/>
+        <a:font script="Taml" typeface="Latha"/>
+        <a:font script="Syrc" typeface="Estrangelo Edessa"/>
+        <a:font script="Orya" typeface="Kalinga"/>
+        <a:font script="Mlym" typeface="Kartika"/>
+        <a:font script="Laoo" typeface="DokChampa"/>
+        <a:font script="Sinh" typeface="Iskoola Pota"/>
+        <a:font script="Mong" typeface="Mongolian Baiti"/>
+        <a:font script="Viet" typeface="Times New Roman"/>
+        <a:font script="Uigh" typeface="Microsoft Uighur"/>
+        <a:font script="Geor" typeface="Sylfaen"/>
+        <a:font script="Armn" typeface="Arial"/>
+        <a:font script="Bugi" typeface="Leelawadee UI"/>
+        <a:font script="Bopo" typeface="Microsoft JhengHei"/>
+        <a:font script="Java" typeface="Javanese Text"/>
+        <a:font script="Lisu" typeface="Segoe UI"/>
+        <a:font script="Mymr" typeface="Myanmar Text"/>
+        <a:font script="Nkoo" typeface="Ebrima"/>
+        <a:font script="Olck" typeface="Nirmala UI"/>
+        <a:font script="Osma" typeface="Ebrima"/>
+        <a:font script="Phag" typeface="Phagspa"/>
+        <a:font script="Syrn" typeface="Estrangelo Edessa"/>
+        <a:font script="Syrj" typeface="Estrangelo Edessa"/>
+        <a:font script="Syre" typeface="Estrangelo Edessa"/>
+        <a:font script="Sora" typeface="Nirmala UI"/>
+        <a:font script="Tale" typeface="Microsoft Tai Le"/>
+        <a:font script="Talu" typeface="Microsoft New Tai Lue"/>
+        <a:font script="Tfng" typeface="Ebrima"/>
+      </a:majorFont>
+      <a:minorFont>
+        <a:latin typeface="Aptos" panose="02110004020202020204"/>
+        <a:ea typeface=""/>
+        <a:cs typeface=""/>
+        <a:font script="Jpan" typeface="游ゴシック"/>
+        <a:font script="Hang" typeface="맑은 고딕"/>
+        <a:font script="Hans" typeface="等线"/>
+        <a:font script="Hant" typeface="新細明體"/>
+        <a:font script="Arab" typeface="Arial"/>
+        <a:font script="Hebr" typeface="Arial"/>
+        <a:font script="Thai" typeface="Cordia New"/>
+        <a:font script="Ethi" typeface="Nyala"/>
+        <a:font script="Beng" typeface="Vrinda"/>
+        <a:font script="Gujr" typeface="Shruti"/>
+        <a:font script="Khmr" typeface="DaunPenh"/>
+        <a:font script="Knda" typeface="Tunga"/>
+        <a:font script="Guru" typeface="Raavi"/>
+        <a:font script="Cans" typeface="Euphemia"/>
+        <a:font script="Cher" typeface="Plantagenet Cherokee"/>
+        <a:font script="Yiii" typeface="Microsoft Yi Baiti"/>
+        <a:font script="Tibt" typeface="Microsoft Himalaya"/>
+        <a:font script="Thaa" typeface="MV Boli"/>
+        <a:font script="Deva" typeface="Mangal"/>
+        <a:font script="Telu" typeface="Gautami"/>
+        <a:font script="Taml" typeface="Latha"/>
+        <a:font script="Syrc" typeface="Estrangelo Edessa"/>
+        <a:font script="Orya" typeface="Kalinga"/>
+        <a:font script="Mlym" typeface="Kartika"/>
+        <a:font script="Laoo" typeface="DokChampa"/>
+        <a:font script="Sinh" typeface="Iskoola Pota"/>
+        <a:font script="Mong" typeface="Mongolian Baiti"/>
+        <a:font script="Viet" typeface="Arial"/>
+        <a:font script="Uigh" typeface="Microsoft Uighur"/>
+        <a:font script="Geor" typeface="Sylfaen"/>
+        <a:font script="Armn" typeface="Arial"/>
+        <a:font script="Bugi" typeface="Leelawadee UI"/>
+        <a:font script="Bopo" typeface="Microsoft JhengHei"/>
+        <a:font script="Java" typeface="Javanese Text"/>
+        <a:font script="Lisu" typeface="Segoe UI"/>
+        <a:font script="Mymr" typeface="Myanmar Text"/>
+        <a:font script="Nkoo" typeface="Ebrima"/>
+        <a:font script="Olck" typeface="Nirmala UI"/>
+        <a:font script="Osma" typeface="Ebrima"/>
+        <a:font script="Phag" typeface="Phagspa"/>
+        <a:font script="Syrn" typeface="Estrangelo Edessa"/>
+        <a:font script="Syrj" typeface="Estrangelo Edessa"/>
+        <a:font script="Syre" typeface="Estrangelo Edessa"/>
+        <a:font script="Sora" typeface="Nirmala UI"/>
+        <a:font script="Tale" typeface="Microsoft Tai Le"/>
+        <a:font script="Talu" typeface="Microsoft New Tai Lue"/>
+        <a:font script="Tfng" typeface="Ebrima"/>
+      </a:minorFont>
+    </a:fontScheme>
+    <a:fmtScheme name="Pakiet Office">
+      <a:fillStyleLst>
+        <a:solidFill>
+          <a:schemeClr val="phClr"/>
+        </a:solidFill>
+        <a:gradFill rotWithShape="1">
+          <a:gsLst>
+            <a:gs pos="0">
+              <a:schemeClr val="phClr">
+                <a:lumMod val="110000"/>
+                <a:satMod val="105000"/>
+                <a:tint val="67000"/>
+              </a:schemeClr>
+            </a:gs>
+            <a:gs pos="50000">
+              <a:schemeClr val="phClr">
+                <a:lumMod val="105000"/>
+                <a:satMod val="103000"/>
+                <a:tint val="73000"/>
+              </a:schemeClr>
+            </a:gs>
+            <a:gs pos="100000">
+              <a:schemeClr val="phClr">
+                <a:lumMod val="105000"/>
+                <a:satMod val="109000"/>
+                <a:tint val="81000"/>
+              </a:schemeClr>
+            </a:gs>
+          </a:gsLst>
+          <a:lin ang="5400000" scaled="0"/>
+        </a:gradFill>
+        <a:gradFill rotWithShape="1">
+          <a:gsLst>
+            <a:gs pos="0">
+              <a:schemeClr val="phClr">
+                <a:satMod val="103000"/>
+                <a:lumMod val="102000"/>
+                <a:tint val="94000"/>
+              </a:schemeClr>
+            </a:gs>
+            <a:gs pos="50000">
+              <a:schemeClr val="phClr">
+                <a:satMod val="110000"/>
+                <a:lumMod val="100000"/>
+                <a:shade val="100000"/>
+              </a:schemeClr>
+            </a:gs>
+            <a:gs pos="100000">
+              <a:schemeClr val="phClr">
+                <a:lumMod val="99000"/>
+                <a:satMod val="120000"/>
+                <a:shade val="78000"/>
+              </a:schemeClr>
+            </a:gs>
+          </a:gsLst>
+          <a:lin ang="5400000" scaled="0"/>
+        </a:gradFill>
+      </a:fillStyleLst>
+      <a:lnStyleLst>
+        <a:ln w="12700" cap="flat" cmpd="sng" algn="ctr">
+          <a:solidFill>
+            <a:schemeClr val="phClr"/>
+          </a:solidFill>
+          <a:prstDash val="solid"/>
+          <a:miter lim="800000"/>
+        </a:ln>
+        <a:ln w="19050" cap="flat" cmpd="sng" algn="ctr">
+          <a:solidFill>
+            <a:schemeClr val="phClr"/>
+          </a:solidFill>
+          <a:prstDash val="solid"/>
+          <a:miter lim="800000"/>
+        </a:ln>
+        <a:ln w="25400" cap="flat" cmpd="sng" algn="ctr">
+          <a:solidFill>
+            <a:schemeClr val="phClr"/>
+          </a:solidFill>
+          <a:prstDash val="solid"/>
+          <a:miter lim="800000"/>
+        </a:ln>
+      </a:lnStyleLst>
+      <a:effectStyleLst>
+        <a:effectStyle>
+          <a:effectLst/>
+        </a:effectStyle>
+        <a:effectStyle>
+          <a:effectLst/>
+        </a:effectStyle>
+        <a:effectStyle>
+          <a:effectLst>
+            <a:outerShdw blurRad="57150" dist="19050" dir="5400000" algn="ctr" rotWithShape="0">
+              <a:srgbClr val="000000">
+                <a:alpha val="63000"/>
+              </a:srgbClr>
+            </a:outerShdw>
+          </a:effectLst>
+        </a:effectStyle>
+      </a:effectStyleLst>
+      <a:bgFillStyleLst>
+        <a:solidFill>
+          <a:schemeClr val="phClr"/>
+        </a:solidFill>
+        <a:solidFill>
+          <a:schemeClr val="phClr">
+            <a:tint val="95000"/>
+            <a:satMod val="170000"/>
+          </a:schemeClr>
+        </a:solidFill>
+        <a:gradFill rotWithShape="1">
+          <a:gsLst>
+            <a:gs pos="0">
+              <a:schemeClr val="phClr">
+                <a:tint val="93000"/>
+                <a:satMod val="150000"/>
+                <a:shade val="98000"/>
+                <a:lumMod val="102000"/>
+              </a:schemeClr>
+            </a:gs>
+            <a:gs pos="50000">
+              <a:schemeClr val="phClr">
+                <a:tint val="98000"/>
+                <a:satMod val="130000"/>
+                <a:shade val="90000"/>
+                <a:lumMod val="103000"/>
+              </a:schemeClr>
+            </a:gs>
+            <a:gs pos="100000">
+              <a:schemeClr val="phClr">
+                <a:shade val="63000"/>
+                <a:satMod val="120000"/>
+              </a:schemeClr>
+            </a:gs>
+          </a:gsLst>
+          <a:lin ang="5400000" scaled="0"/>
+        </a:gradFill>
+      </a:bgFillStyleLst>
+    </a:fmtScheme>
+  </a:themeElements>
+  <a:objectDefaults>
+    <a:lnDef>
+      <a:spPr/>
+      <a:bodyPr/>
+      <a:lstStyle/>
+      <a:style>
+        <a:lnRef idx="2">
+          <a:schemeClr val="accent1"/>
+        </a:lnRef>
+        <a:fillRef idx="0">
+          <a:schemeClr val="accent1"/>
+        </a:fillRef>
+        <a:effectRef idx="1">
+          <a:schemeClr val="accent1"/>
+        </a:effectRef>
+        <a:fontRef idx="minor">
+          <a:schemeClr val="tx1"/>
+        </a:fontRef>
+      </a:style>
+    </a:lnDef>
+  </a:objectDefaults>
+  <a:extraClrSchemeLst/>
+  <a:extLst>
+    <a:ext uri="{05A4C25C-085E-4340-85A3-A5531E510DB2}">
+      <thm15:themeFamily xmlns:thm15="http://schemas.microsoft.com/office/thememl/2012/main" name="Office Theme" id="{2E142A2C-CD16-42D6-873A-C26D2A0506FA}" vid="{1BDDFF52-6CD6-40A5-AB3C-68EB2F1E4D0A}"/>
+    </a:ext>
+  </a:extLst>
+</a:theme>
 </file>
--- a/Nie tylko websocket/Nie tylko WebSocket.pptx
+++ b/Nie tylko websocket/Nie tylko WebSocket.pptx
@@ -21634,6 +21634,42 @@
           </a:prstGeom>
         </p:spPr>
       </p:pic>
+      <p:pic>
+        <p:nvPicPr>
+          <p:cNvPr id="7" name="Grafika 6">
+            <a:extLst>
+              <a:ext uri="{FF2B5EF4-FFF2-40B4-BE49-F238E27FC236}">
+                <a16:creationId xmlns:a16="http://schemas.microsoft.com/office/drawing/2014/main" id="{BB03875A-A36F-03B9-83DF-00D1E35D4008}"/>
+              </a:ext>
+            </a:extLst>
+          </p:cNvPr>
+          <p:cNvPicPr>
+            <a:picLocks noChangeAspect="1"/>
+          </p:cNvPicPr>
+          <p:nvPr/>
+        </p:nvPicPr>
+        <p:blipFill>
+          <a:blip r:embed="rId3">
+            <a:extLst>
+              <a:ext uri="{96DAC541-7B7A-43D3-8B79-37D633B846F1}">
+                <asvg:svgBlip xmlns:asvg="http://schemas.microsoft.com/office/drawing/2016/SVG/main" r:embed="rId4"/>
+              </a:ext>
+            </a:extLst>
+          </a:blip>
+          <a:stretch>
+            <a:fillRect/>
+          </a:stretch>
+        </p:blipFill>
+        <p:spPr>
+          <a:xfrm>
+            <a:off x="6296813" y="4160837"/>
+            <a:ext cx="1977237" cy="1977237"/>
+          </a:xfrm>
+          <a:prstGeom prst="rect">
+            <a:avLst/>
+          </a:prstGeom>
+        </p:spPr>
+      </p:pic>
     </p:spTree>
     <p:extLst>
       <p:ext uri="{BB962C8B-B14F-4D97-AF65-F5344CB8AC3E}">
